--- a/交換經驗分享會_蔡秀吉_百川學程.pptx
+++ b/交換經驗分享會_蔡秀吉_百川學程.pptx
@@ -24,7 +24,7 @@
     <p:sldId id="272" r:id="rId23"/>
     <p:sldId id="273" r:id="rId24"/>
   </p:sldIdLst>
-  <p:sldSz cx="9144000" cy="6858000" type="screen4x3"/>
+  <p:sldSz cx="12191695" cy="6858000" type="screen4x3"/>
   <p:notesSz cx="6858000" cy="9144000"/>
   <p:defaultTextStyle>
     <a:defPPr>
@@ -3347,196 +3347,196 @@
               </a:defRPr>
             </a:pPr>
             <a:r>
-              <a:t>⏰ 第一天</a:t>
-            </a:r>
-          </a:p>
-          <a:p>
-            <a:pPr>
-              <a:spcBef>
-                <a:spcPts val="1200"/>
-              </a:spcBef>
-              <a:defRPr sz="1800">
-                <a:solidFill>
-                  <a:srgbClr val="2C3E50"/>
-                </a:solidFill>
-              </a:defRPr>
-            </a:pPr>
-            <a:r>
-              <a:t>✓ 調時差（立刻調整作息）</a:t>
-            </a:r>
-          </a:p>
-          <a:p>
-            <a:pPr>
-              <a:spcBef>
-                <a:spcPts val="1200"/>
-              </a:spcBef>
-              <a:defRPr sz="1800">
-                <a:solidFill>
-                  <a:srgbClr val="2C3E50"/>
-                </a:solidFill>
-              </a:defRPr>
-            </a:pPr>
-            <a:r>
-              <a:t>✓ 確認住宿（檢查設施、記錄損壞）</a:t>
-            </a:r>
-          </a:p>
-          <a:p>
-            <a:pPr>
-              <a:spcBef>
-                <a:spcPts val="1200"/>
-              </a:spcBef>
-              <a:defRPr sz="1800">
-                <a:solidFill>
-                  <a:srgbClr val="2C3E50"/>
-                </a:solidFill>
-              </a:defRPr>
-            </a:pPr>
-            <a:r>
-              <a:t>✓ 購買網卡/申辦門號</a:t>
-            </a:r>
-          </a:p>
-          <a:p>
-            <a:pPr>
-              <a:spcBef>
-                <a:spcPts val="1200"/>
-              </a:spcBef>
-              <a:defRPr sz="1800">
-                <a:solidFill>
-                  <a:srgbClr val="2C3E50"/>
-                </a:solidFill>
-              </a:defRPr>
-            </a:pPr>
-            <a:r>
-              <a:t>✓ 買基本食物、日用品</a:t>
-            </a:r>
-          </a:p>
-          <a:p>
-            <a:pPr>
-              <a:spcBef>
-                <a:spcPts val="1200"/>
-              </a:spcBef>
-              <a:defRPr sz="1800">
-                <a:solidFill>
-                  <a:srgbClr val="2C3E50"/>
-                </a:solidFill>
-              </a:defRPr>
-            </a:pPr>
-          </a:p>
-          <a:p>
-            <a:pPr>
-              <a:spcBef>
-                <a:spcPts val="1200"/>
-              </a:spcBef>
-              <a:defRPr sz="1800">
-                <a:solidFill>
-                  <a:srgbClr val="2C3E50"/>
-                </a:solidFill>
-              </a:defRPr>
-            </a:pPr>
-            <a:r>
-              <a:t>⏰ 48小時內</a:t>
-            </a:r>
-          </a:p>
-          <a:p>
-            <a:pPr>
-              <a:spcBef>
-                <a:spcPts val="1200"/>
-              </a:spcBef>
-              <a:defRPr sz="1800">
-                <a:solidFill>
-                  <a:srgbClr val="2C3E50"/>
-                </a:solidFill>
-              </a:defRPr>
-            </a:pPr>
-            <a:r>
-              <a:t>✓ 開立當地銀行帳戶（需護照、入學證明、住址證明）</a:t>
-            </a:r>
-          </a:p>
-          <a:p>
-            <a:pPr>
-              <a:spcBef>
-                <a:spcPts val="1200"/>
-              </a:spcBef>
-              <a:defRPr sz="1800">
-                <a:solidFill>
-                  <a:srgbClr val="2C3E50"/>
-                </a:solidFill>
-              </a:defRPr>
-            </a:pPr>
-            <a:r>
-              <a:t>✓ 辦理學生證（各種優惠的關鍵）</a:t>
-            </a:r>
-          </a:p>
-          <a:p>
-            <a:pPr>
-              <a:spcBef>
-                <a:spcPts val="1200"/>
-              </a:spcBef>
-              <a:defRPr sz="1800">
-                <a:solidFill>
-                  <a:srgbClr val="2C3E50"/>
-                </a:solidFill>
-              </a:defRPr>
-            </a:pPr>
-            <a:r>
-              <a:t>✓ 購買交通月票</a:t>
-            </a:r>
-          </a:p>
-          <a:p>
-            <a:pPr>
-              <a:spcBef>
-                <a:spcPts val="1200"/>
-              </a:spcBef>
-              <a:defRPr sz="1800">
-                <a:solidFill>
-                  <a:srgbClr val="2C3E50"/>
-                </a:solidFill>
-              </a:defRPr>
-            </a:pPr>
-            <a:r>
-              <a:t>✓ 確認教室位置（提前踩點！門牌難找）</a:t>
-            </a:r>
-          </a:p>
-          <a:p>
-            <a:pPr>
-              <a:spcBef>
-                <a:spcPts val="1200"/>
-              </a:spcBef>
-              <a:defRPr sz="1800">
-                <a:solidFill>
-                  <a:srgbClr val="2C3E50"/>
-                </a:solidFill>
-              </a:defRPr>
-            </a:pPr>
-            <a:r>
-              <a:t>✓ 日本：到區公所辦轉入手續</a:t>
-            </a:r>
-          </a:p>
-          <a:p>
-            <a:pPr>
-              <a:spcBef>
-                <a:spcPts val="1200"/>
-              </a:spcBef>
-              <a:defRPr sz="1800">
-                <a:solidFill>
-                  <a:srgbClr val="2C3E50"/>
-                </a:solidFill>
-              </a:defRPr>
-            </a:pPr>
-          </a:p>
-          <a:p>
-            <a:pPr>
-              <a:spcBef>
-                <a:spcPts val="1200"/>
-              </a:spcBef>
-              <a:defRPr sz="1800">
-                <a:solidFill>
-                  <a:srgbClr val="2C3E50"/>
-                </a:solidFill>
-              </a:defRPr>
-            </a:pPr>
-            <a:r>
-              <a:t>💡 提醒：歐洲行政效率慢，辦事可能需3個工作日</a:t>
+              <a:t>【第一天】</a:t>
+            </a:r>
+          </a:p>
+          <a:p>
+            <a:pPr>
+              <a:spcBef>
+                <a:spcPts val="1200"/>
+              </a:spcBef>
+              <a:defRPr sz="1800">
+                <a:solidFill>
+                  <a:srgbClr val="2C3E50"/>
+                </a:solidFill>
+              </a:defRPr>
+            </a:pPr>
+            <a:r>
+              <a:t>• 調時差（立刻調整作息）</a:t>
+            </a:r>
+          </a:p>
+          <a:p>
+            <a:pPr>
+              <a:spcBef>
+                <a:spcPts val="1200"/>
+              </a:spcBef>
+              <a:defRPr sz="1800">
+                <a:solidFill>
+                  <a:srgbClr val="2C3E50"/>
+                </a:solidFill>
+              </a:defRPr>
+            </a:pPr>
+            <a:r>
+              <a:t>• 確認住宿（檢查設施、記錄損壞）</a:t>
+            </a:r>
+          </a:p>
+          <a:p>
+            <a:pPr>
+              <a:spcBef>
+                <a:spcPts val="1200"/>
+              </a:spcBef>
+              <a:defRPr sz="1800">
+                <a:solidFill>
+                  <a:srgbClr val="2C3E50"/>
+                </a:solidFill>
+              </a:defRPr>
+            </a:pPr>
+            <a:r>
+              <a:t>• 購買網卡/申辦門號</a:t>
+            </a:r>
+          </a:p>
+          <a:p>
+            <a:pPr>
+              <a:spcBef>
+                <a:spcPts val="1200"/>
+              </a:spcBef>
+              <a:defRPr sz="1800">
+                <a:solidFill>
+                  <a:srgbClr val="2C3E50"/>
+                </a:solidFill>
+              </a:defRPr>
+            </a:pPr>
+            <a:r>
+              <a:t>• 買基本食物、日用品</a:t>
+            </a:r>
+          </a:p>
+          <a:p>
+            <a:pPr>
+              <a:spcBef>
+                <a:spcPts val="1200"/>
+              </a:spcBef>
+              <a:defRPr sz="1800">
+                <a:solidFill>
+                  <a:srgbClr val="2C3E50"/>
+                </a:solidFill>
+              </a:defRPr>
+            </a:pPr>
+          </a:p>
+          <a:p>
+            <a:pPr>
+              <a:spcBef>
+                <a:spcPts val="1200"/>
+              </a:spcBef>
+              <a:defRPr sz="1800">
+                <a:solidFill>
+                  <a:srgbClr val="2C3E50"/>
+                </a:solidFill>
+              </a:defRPr>
+            </a:pPr>
+            <a:r>
+              <a:t>【48小時內】</a:t>
+            </a:r>
+          </a:p>
+          <a:p>
+            <a:pPr>
+              <a:spcBef>
+                <a:spcPts val="1200"/>
+              </a:spcBef>
+              <a:defRPr sz="1800">
+                <a:solidFill>
+                  <a:srgbClr val="2C3E50"/>
+                </a:solidFill>
+              </a:defRPr>
+            </a:pPr>
+            <a:r>
+              <a:t>• 開立當地銀行帳戶（需護照、入學證明、住址證明）</a:t>
+            </a:r>
+          </a:p>
+          <a:p>
+            <a:pPr>
+              <a:spcBef>
+                <a:spcPts val="1200"/>
+              </a:spcBef>
+              <a:defRPr sz="1800">
+                <a:solidFill>
+                  <a:srgbClr val="2C3E50"/>
+                </a:solidFill>
+              </a:defRPr>
+            </a:pPr>
+            <a:r>
+              <a:t>• 辦理學生證（各種優惠的關鍵）</a:t>
+            </a:r>
+          </a:p>
+          <a:p>
+            <a:pPr>
+              <a:spcBef>
+                <a:spcPts val="1200"/>
+              </a:spcBef>
+              <a:defRPr sz="1800">
+                <a:solidFill>
+                  <a:srgbClr val="2C3E50"/>
+                </a:solidFill>
+              </a:defRPr>
+            </a:pPr>
+            <a:r>
+              <a:t>• 購買交通月票</a:t>
+            </a:r>
+          </a:p>
+          <a:p>
+            <a:pPr>
+              <a:spcBef>
+                <a:spcPts val="1200"/>
+              </a:spcBef>
+              <a:defRPr sz="1800">
+                <a:solidFill>
+                  <a:srgbClr val="2C3E50"/>
+                </a:solidFill>
+              </a:defRPr>
+            </a:pPr>
+            <a:r>
+              <a:t>• 確認教室位置（提前踩點！門牌難找）</a:t>
+            </a:r>
+          </a:p>
+          <a:p>
+            <a:pPr>
+              <a:spcBef>
+                <a:spcPts val="1200"/>
+              </a:spcBef>
+              <a:defRPr sz="1800">
+                <a:solidFill>
+                  <a:srgbClr val="2C3E50"/>
+                </a:solidFill>
+              </a:defRPr>
+            </a:pPr>
+            <a:r>
+              <a:t>• 日本：到區公所辦轉入手續</a:t>
+            </a:r>
+          </a:p>
+          <a:p>
+            <a:pPr>
+              <a:spcBef>
+                <a:spcPts val="1200"/>
+              </a:spcBef>
+              <a:defRPr sz="1800">
+                <a:solidFill>
+                  <a:srgbClr val="2C3E50"/>
+                </a:solidFill>
+              </a:defRPr>
+            </a:pPr>
+          </a:p>
+          <a:p>
+            <a:pPr>
+              <a:spcBef>
+                <a:spcPts val="1200"/>
+              </a:spcBef>
+              <a:defRPr sz="1800">
+                <a:solidFill>
+                  <a:srgbClr val="2C3E50"/>
+                </a:solidFill>
+              </a:defRPr>
+            </a:pPr>
+            <a:r>
+              <a:t>【提醒】歐洲行政效率慢，辦事可能需3個工作日</a:t>
             </a:r>
           </a:p>
           <a:p>
@@ -3639,7 +3639,7 @@
               </a:defRPr>
             </a:pPr>
             <a:r>
-              <a:t>✅ 優勢</a:t>
+              <a:t>優勢面向</a:t>
             </a:r>
           </a:p>
         </p:txBody>
@@ -3677,7 +3677,7 @@
               </a:defRPr>
             </a:pPr>
             <a:r>
-              <a:t>😊 正面文化差異</a:t>
+              <a:t>【正面文化差異】</a:t>
             </a:r>
           </a:p>
           <a:p>
@@ -3779,7 +3779,7 @@
               </a:defRPr>
             </a:pPr>
             <a:r>
-              <a:t>🎓 學術差異</a:t>
+              <a:t>【學術差異】</a:t>
             </a:r>
           </a:p>
           <a:p>
@@ -3874,7 +3874,7 @@
               </a:defRPr>
             </a:pPr>
             <a:r>
-              <a:t>⚠️ 挑戰</a:t>
+              <a:t>挑戰面向</a:t>
             </a:r>
           </a:p>
         </p:txBody>
@@ -3912,7 +3912,7 @@
               </a:defRPr>
             </a:pPr>
             <a:r>
-              <a:t>😓 可能遇到的挑戰</a:t>
+              <a:t>【可能遇到的挑戰】</a:t>
             </a:r>
           </a:p>
           <a:p>
@@ -4029,7 +4029,7 @@
               </a:defRPr>
             </a:pPr>
             <a:r>
-              <a:t>💪 應對策略</a:t>
+              <a:t>【應對策略】</a:t>
             </a:r>
           </a:p>
           <a:p>
@@ -4223,7 +4223,7 @@
               </a:defRPr>
             </a:pPr>
             <a:r>
-              <a:t>🗣️ Speak Up - 為自己發聲</a:t>
+              <a:t>【Speak Up - 為自己發聲】</a:t>
             </a:r>
           </a:p>
           <a:p>
@@ -4295,7 +4295,7 @@
               </a:defRPr>
             </a:pPr>
             <a:r>
-              <a:t>🍜 破冰神器</a:t>
+              <a:t>【破冰神器】</a:t>
             </a:r>
           </a:p>
           <a:p>
@@ -4352,7 +4352,7 @@
               </a:defRPr>
             </a:pPr>
             <a:r>
-              <a:t>🧠 Work Smart, Not Just Work Hard</a:t>
+              <a:t>【Work Smart, Not Just Work Hard】</a:t>
             </a:r>
           </a:p>
           <a:p>
@@ -4424,7 +4424,7 @@
               </a:defRPr>
             </a:pPr>
             <a:r>
-              <a:t>🌍 文化差異理解</a:t>
+              <a:t>【文化差異理解】</a:t>
             </a:r>
           </a:p>
           <a:p>
@@ -4603,7 +4603,7 @@
               </a:defRPr>
             </a:pPr>
             <a:r>
-              <a:t>🎯 設定明確目標</a:t>
+              <a:t>【設定明確目標】</a:t>
             </a:r>
           </a:p>
           <a:p>
@@ -4675,7 +4675,7 @@
               </a:defRPr>
             </a:pPr>
             <a:r>
-              <a:t>🚀 Try New Things</a:t>
+              <a:t>【Try New Things】</a:t>
             </a:r>
           </a:p>
           <a:p>
@@ -4747,7 +4747,7 @@
               </a:defRPr>
             </a:pPr>
             <a:r>
-              <a:t>💎 找到研究/學習的熱情</a:t>
+              <a:t>【找到研究/學習的熱情】</a:t>
             </a:r>
           </a:p>
           <a:p>
@@ -4819,7 +4819,7 @@
               </a:defRPr>
             </a:pPr>
             <a:r>
-              <a:t>🏫 代表學校的責任</a:t>
+              <a:t>【代表學校的責任】</a:t>
             </a:r>
           </a:p>
           <a:p>
@@ -4983,34 +4983,34 @@
               </a:defRPr>
             </a:pPr>
             <a:r>
-              <a:t>📚 原則：讀書第一，旅遊第二</a:t>
-            </a:r>
-          </a:p>
-          <a:p>
-            <a:pPr>
-              <a:spcBef>
-                <a:spcPts val="1200"/>
-              </a:spcBef>
-              <a:defRPr sz="1800">
-                <a:solidFill>
-                  <a:srgbClr val="2C3E50"/>
-                </a:solidFill>
-              </a:defRPr>
-            </a:pPr>
-          </a:p>
-          <a:p>
-            <a:pPr>
-              <a:spcBef>
-                <a:spcPts val="1200"/>
-              </a:spcBef>
-              <a:defRPr sz="1800">
-                <a:solidFill>
-                  <a:srgbClr val="2C3E50"/>
-                </a:solidFill>
-              </a:defRPr>
-            </a:pPr>
-            <a:r>
-              <a:t>✅ 可行的平衡模式：</a:t>
+              <a:t>【原則】讀書第一，旅遊第二</a:t>
+            </a:r>
+          </a:p>
+          <a:p>
+            <a:pPr>
+              <a:spcBef>
+                <a:spcPts val="1200"/>
+              </a:spcBef>
+              <a:defRPr sz="1800">
+                <a:solidFill>
+                  <a:srgbClr val="2C3E50"/>
+                </a:solidFill>
+              </a:defRPr>
+            </a:pPr>
+          </a:p>
+          <a:p>
+            <a:pPr>
+              <a:spcBef>
+                <a:spcPts val="1200"/>
+              </a:spcBef>
+              <a:defRPr sz="1800">
+                <a:solidFill>
+                  <a:srgbClr val="2C3E50"/>
+                </a:solidFill>
+              </a:defRPr>
+            </a:pPr>
+            <a:r>
+              <a:t>可行的平衡模式：</a:t>
             </a:r>
           </a:p>
           <a:p>
@@ -5097,79 +5097,79 @@
               </a:defRPr>
             </a:pPr>
             <a:r>
-              <a:t>⚠️ 避免的陷阱：</a:t>
-            </a:r>
-          </a:p>
-          <a:p>
-            <a:pPr>
-              <a:spcBef>
-                <a:spcPts val="1200"/>
-              </a:spcBef>
-              <a:defRPr sz="1800">
-                <a:solidFill>
-                  <a:srgbClr val="2C3E50"/>
-                </a:solidFill>
-              </a:defRPr>
-            </a:pPr>
-            <a:r>
-              <a:t>✗ 完全不旅遊（浪費地理優勢）</a:t>
-            </a:r>
-          </a:p>
-          <a:p>
-            <a:pPr>
-              <a:spcBef>
-                <a:spcPts val="1200"/>
-              </a:spcBef>
-              <a:defRPr sz="1800">
-                <a:solidFill>
-                  <a:srgbClr val="2C3E50"/>
-                </a:solidFill>
-              </a:defRPr>
-            </a:pPr>
-            <a:r>
-              <a:t>✗ 過度旅遊（學業掛掉）</a:t>
-            </a:r>
-          </a:p>
-          <a:p>
-            <a:pPr>
-              <a:spcBef>
-                <a:spcPts val="1200"/>
-              </a:spcBef>
-              <a:defRPr sz="1800">
-                <a:solidFill>
-                  <a:srgbClr val="2C3E50"/>
-                </a:solidFill>
-              </a:defRPr>
-            </a:pPr>
-            <a:r>
-              <a:t>✗ 臨時起意（機票住宿貴、時間浪費）</a:t>
-            </a:r>
-          </a:p>
-          <a:p>
-            <a:pPr>
-              <a:spcBef>
-                <a:spcPts val="1200"/>
-              </a:spcBef>
-              <a:defRPr sz="1800">
-                <a:solidFill>
-                  <a:srgbClr val="2C3E50"/>
-                </a:solidFill>
-              </a:defRPr>
-            </a:pPr>
-          </a:p>
-          <a:p>
-            <a:pPr>
-              <a:spcBef>
-                <a:spcPts val="1200"/>
-              </a:spcBef>
-              <a:defRPr sz="1800">
-                <a:solidFill>
-                  <a:srgbClr val="2C3E50"/>
-                </a:solidFill>
-              </a:defRPr>
-            </a:pPr>
-            <a:r>
-              <a:t>💡 時間管理技巧：</a:t>
+              <a:t>避免的陷阱：</a:t>
+            </a:r>
+          </a:p>
+          <a:p>
+            <a:pPr>
+              <a:spcBef>
+                <a:spcPts val="1200"/>
+              </a:spcBef>
+              <a:defRPr sz="1800">
+                <a:solidFill>
+                  <a:srgbClr val="2C3E50"/>
+                </a:solidFill>
+              </a:defRPr>
+            </a:pPr>
+            <a:r>
+              <a:t>• 完全不旅遊（浪費地理優勢）</a:t>
+            </a:r>
+          </a:p>
+          <a:p>
+            <a:pPr>
+              <a:spcBef>
+                <a:spcPts val="1200"/>
+              </a:spcBef>
+              <a:defRPr sz="1800">
+                <a:solidFill>
+                  <a:srgbClr val="2C3E50"/>
+                </a:solidFill>
+              </a:defRPr>
+            </a:pPr>
+            <a:r>
+              <a:t>• 過度旅遊（學業掛掉）</a:t>
+            </a:r>
+          </a:p>
+          <a:p>
+            <a:pPr>
+              <a:spcBef>
+                <a:spcPts val="1200"/>
+              </a:spcBef>
+              <a:defRPr sz="1800">
+                <a:solidFill>
+                  <a:srgbClr val="2C3E50"/>
+                </a:solidFill>
+              </a:defRPr>
+            </a:pPr>
+            <a:r>
+              <a:t>• 臨時起意（機票住宿貴、時間浪費）</a:t>
+            </a:r>
+          </a:p>
+          <a:p>
+            <a:pPr>
+              <a:spcBef>
+                <a:spcPts val="1200"/>
+              </a:spcBef>
+              <a:defRPr sz="1800">
+                <a:solidFill>
+                  <a:srgbClr val="2C3E50"/>
+                </a:solidFill>
+              </a:defRPr>
+            </a:pPr>
+          </a:p>
+          <a:p>
+            <a:pPr>
+              <a:spcBef>
+                <a:spcPts val="1200"/>
+              </a:spcBef>
+              <a:defRPr sz="1800">
+                <a:solidFill>
+                  <a:srgbClr val="2C3E50"/>
+                </a:solidFill>
+              </a:defRPr>
+            </a:pPr>
+            <a:r>
+              <a:t>時間管理技巧：</a:t>
             </a:r>
           </a:p>
           <a:p>
@@ -5348,79 +5348,79 @@
               </a:defRPr>
             </a:pPr>
             <a:r>
-              <a:t>🎓 百川人的獨特優勢：</a:t>
-            </a:r>
-          </a:p>
-          <a:p>
-            <a:pPr>
-              <a:spcBef>
-                <a:spcPts val="1200"/>
-              </a:spcBef>
-              <a:defRPr sz="1800">
-                <a:solidFill>
-                  <a:srgbClr val="2C3E50"/>
-                </a:solidFill>
-              </a:defRPr>
-            </a:pPr>
-            <a:r>
-              <a:t>✓ 跨領域背景 = 國際競爭力</a:t>
-            </a:r>
-          </a:p>
-          <a:p>
-            <a:pPr>
-              <a:spcBef>
-                <a:spcPts val="1200"/>
-              </a:spcBef>
-              <a:defRPr sz="1800">
-                <a:solidFill>
-                  <a:srgbClr val="2C3E50"/>
-                </a:solidFill>
-              </a:defRPr>
-            </a:pPr>
-            <a:r>
-              <a:t>✓ 能整合不同領域的視角</a:t>
-            </a:r>
-          </a:p>
-          <a:p>
-            <a:pPr>
-              <a:spcBef>
-                <a:spcPts val="1200"/>
-              </a:spcBef>
-              <a:defRPr sz="1800">
-                <a:solidFill>
-                  <a:srgbClr val="2C3E50"/>
-                </a:solidFill>
-              </a:defRPr>
-            </a:pPr>
-            <a:r>
-              <a:t>✓ 適合申請需要創新思維的計畫</a:t>
-            </a:r>
-          </a:p>
-          <a:p>
-            <a:pPr>
-              <a:spcBef>
-                <a:spcPts val="1200"/>
-              </a:spcBef>
-              <a:defRPr sz="1800">
-                <a:solidFill>
-                  <a:srgbClr val="2C3E50"/>
-                </a:solidFill>
-              </a:defRPr>
-            </a:pPr>
-          </a:p>
-          <a:p>
-            <a:pPr>
-              <a:spcBef>
-                <a:spcPts val="1200"/>
-              </a:spcBef>
-              <a:defRPr sz="1800">
-                <a:solidFill>
-                  <a:srgbClr val="2C3E50"/>
-                </a:solidFill>
-              </a:defRPr>
-            </a:pPr>
-            <a:r>
-              <a:t>🛤️ 開闢外軌途徑：</a:t>
+              <a:t>【百川人的獨特優勢】</a:t>
+            </a:r>
+          </a:p>
+          <a:p>
+            <a:pPr>
+              <a:spcBef>
+                <a:spcPts val="1200"/>
+              </a:spcBef>
+              <a:defRPr sz="1800">
+                <a:solidFill>
+                  <a:srgbClr val="2C3E50"/>
+                </a:solidFill>
+              </a:defRPr>
+            </a:pPr>
+            <a:r>
+              <a:t>• 跨領域背景 = 國際競爭力</a:t>
+            </a:r>
+          </a:p>
+          <a:p>
+            <a:pPr>
+              <a:spcBef>
+                <a:spcPts val="1200"/>
+              </a:spcBef>
+              <a:defRPr sz="1800">
+                <a:solidFill>
+                  <a:srgbClr val="2C3E50"/>
+                </a:solidFill>
+              </a:defRPr>
+            </a:pPr>
+            <a:r>
+              <a:t>• 能整合不同領域的視角</a:t>
+            </a:r>
+          </a:p>
+          <a:p>
+            <a:pPr>
+              <a:spcBef>
+                <a:spcPts val="1200"/>
+              </a:spcBef>
+              <a:defRPr sz="1800">
+                <a:solidFill>
+                  <a:srgbClr val="2C3E50"/>
+                </a:solidFill>
+              </a:defRPr>
+            </a:pPr>
+            <a:r>
+              <a:t>• 適合申請需要創新思維的計畫</a:t>
+            </a:r>
+          </a:p>
+          <a:p>
+            <a:pPr>
+              <a:spcBef>
+                <a:spcPts val="1200"/>
+              </a:spcBef>
+              <a:defRPr sz="1800">
+                <a:solidFill>
+                  <a:srgbClr val="2C3E50"/>
+                </a:solidFill>
+              </a:defRPr>
+            </a:pPr>
+          </a:p>
+          <a:p>
+            <a:pPr>
+              <a:spcBef>
+                <a:spcPts val="1200"/>
+              </a:spcBef>
+              <a:defRPr sz="1800">
+                <a:solidFill>
+                  <a:srgbClr val="2C3E50"/>
+                </a:solidFill>
+              </a:defRPr>
+            </a:pPr>
+            <a:r>
+              <a:t>【開闢外軌途徑】</a:t>
             </a:r>
           </a:p>
           <a:p>
@@ -5507,7 +5507,7 @@
               </a:defRPr>
             </a:pPr>
             <a:r>
-              <a:t>📝 大二/大三就要開始準備：</a:t>
+              <a:t>【大二/大三就要開始準備】</a:t>
             </a:r>
           </a:p>
           <a:p>
@@ -5594,7 +5594,7 @@
               </a:defRPr>
             </a:pPr>
             <a:r>
-              <a:t>💼 大五/畢業生也能申請（透過學校推薦）</a:t>
+              <a:t>【備註】大五/畢業生也能申請（透過學校推薦）</a:t>
             </a:r>
           </a:p>
         </p:txBody>
@@ -5728,196 +5728,196 @@
               </a:defRPr>
             </a:pPr>
             <a:r>
-              <a:t>⏰ 提早規劃（12-18個月前開始）</a:t>
-            </a:r>
-          </a:p>
-          <a:p>
-            <a:pPr>
-              <a:spcBef>
-                <a:spcPts val="1200"/>
-              </a:spcBef>
-              <a:defRPr sz="1800">
-                <a:solidFill>
-                  <a:srgbClr val="2C3E50"/>
-                </a:solidFill>
-              </a:defRPr>
-            </a:pPr>
-          </a:p>
-          <a:p>
-            <a:pPr>
-              <a:spcBef>
-                <a:spcPts val="1200"/>
-              </a:spcBef>
-              <a:defRPr sz="1800">
-                <a:solidFill>
-                  <a:srgbClr val="2C3E50"/>
-                </a:solidFill>
-              </a:defRPr>
-            </a:pPr>
-            <a:r>
-              <a:t>🎯 釐清目的（玩樂 vs 進修 vs 平衡）</a:t>
-            </a:r>
-          </a:p>
-          <a:p>
-            <a:pPr>
-              <a:spcBef>
-                <a:spcPts val="1200"/>
-              </a:spcBef>
-              <a:defRPr sz="1800">
-                <a:solidFill>
-                  <a:srgbClr val="2C3E50"/>
-                </a:solidFill>
-              </a:defRPr>
-            </a:pPr>
-          </a:p>
-          <a:p>
-            <a:pPr>
-              <a:spcBef>
-                <a:spcPts val="1200"/>
-              </a:spcBef>
-              <a:defRPr sz="1800">
-                <a:solidFill>
-                  <a:srgbClr val="2C3E50"/>
-                </a:solidFill>
-              </a:defRPr>
-            </a:pPr>
-            <a:r>
-              <a:t>📚 三大支柱（英文、GPA、動機）</a:t>
-            </a:r>
-          </a:p>
-          <a:p>
-            <a:pPr>
-              <a:spcBef>
-                <a:spcPts val="1200"/>
-              </a:spcBef>
-              <a:defRPr sz="1800">
-                <a:solidFill>
-                  <a:srgbClr val="2C3E50"/>
-                </a:solidFill>
-              </a:defRPr>
-            </a:pPr>
-          </a:p>
-          <a:p>
-            <a:pPr>
-              <a:spcBef>
-                <a:spcPts val="1200"/>
-              </a:spcBef>
-              <a:defRPr sz="1800">
-                <a:solidFill>
-                  <a:srgbClr val="2C3E50"/>
-                </a:solidFill>
-              </a:defRPr>
-            </a:pPr>
-            <a:r>
-              <a:t>💰 善用獎學金（學海計畫、教育部獎學金）</a:t>
-            </a:r>
-          </a:p>
-          <a:p>
-            <a:pPr>
-              <a:spcBef>
-                <a:spcPts val="1200"/>
-              </a:spcBef>
-              <a:defRPr sz="1800">
-                <a:solidFill>
-                  <a:srgbClr val="2C3E50"/>
-                </a:solidFill>
-              </a:defRPr>
-            </a:pPr>
-          </a:p>
-          <a:p>
-            <a:pPr>
-              <a:spcBef>
-                <a:spcPts val="1200"/>
-              </a:spcBef>
-              <a:defRPr sz="1800">
-                <a:solidFill>
-                  <a:srgbClr val="2C3E50"/>
-                </a:solidFill>
-              </a:defRPr>
-            </a:pPr>
-            <a:r>
-              <a:t>🧳 行前準備（簽證、保險、網卡、2張信用卡）</a:t>
-            </a:r>
-          </a:p>
-          <a:p>
-            <a:pPr>
-              <a:spcBef>
-                <a:spcPts val="1200"/>
-              </a:spcBef>
-              <a:defRPr sz="1800">
-                <a:solidFill>
-                  <a:srgbClr val="2C3E50"/>
-                </a:solidFill>
-              </a:defRPr>
-            </a:pPr>
-          </a:p>
-          <a:p>
-            <a:pPr>
-              <a:spcBef>
-                <a:spcPts val="1200"/>
-              </a:spcBef>
-              <a:defRPr sz="1800">
-                <a:solidFill>
-                  <a:srgbClr val="2C3E50"/>
-                </a:solidFill>
-              </a:defRPr>
-            </a:pPr>
-            <a:r>
-              <a:t>🗣️ Speak Up &amp; Work Smart</a:t>
-            </a:r>
-          </a:p>
-          <a:p>
-            <a:pPr>
-              <a:spcBef>
-                <a:spcPts val="1200"/>
-              </a:spcBef>
-              <a:defRPr sz="1800">
-                <a:solidFill>
-                  <a:srgbClr val="2C3E50"/>
-                </a:solidFill>
-              </a:defRPr>
-            </a:pPr>
-          </a:p>
-          <a:p>
-            <a:pPr>
-              <a:spcBef>
-                <a:spcPts val="1200"/>
-              </a:spcBef>
-              <a:defRPr sz="1800">
-                <a:solidFill>
-                  <a:srgbClr val="2C3E50"/>
-                </a:solidFill>
-              </a:defRPr>
-            </a:pPr>
-            <a:r>
-              <a:t>🌱 Try New Things &amp; 跳脫舒適圈</a:t>
-            </a:r>
-          </a:p>
-          <a:p>
-            <a:pPr>
-              <a:spcBef>
-                <a:spcPts val="1200"/>
-              </a:spcBef>
-              <a:defRPr sz="1800">
-                <a:solidFill>
-                  <a:srgbClr val="2C3E50"/>
-                </a:solidFill>
-              </a:defRPr>
-            </a:pPr>
-          </a:p>
-          <a:p>
-            <a:pPr>
-              <a:spcBef>
-                <a:spcPts val="1200"/>
-              </a:spcBef>
-              <a:defRPr sz="1800">
-                <a:solidFill>
-                  <a:srgbClr val="2C3E50"/>
-                </a:solidFill>
-              </a:defRPr>
-            </a:pPr>
-            <a:r>
-              <a:t>🏆 代表學校，為自己創造機會</a:t>
+              <a:t>▸ 提早規劃（12-18個月前開始）</a:t>
+            </a:r>
+          </a:p>
+          <a:p>
+            <a:pPr>
+              <a:spcBef>
+                <a:spcPts val="1200"/>
+              </a:spcBef>
+              <a:defRPr sz="1800">
+                <a:solidFill>
+                  <a:srgbClr val="2C3E50"/>
+                </a:solidFill>
+              </a:defRPr>
+            </a:pPr>
+          </a:p>
+          <a:p>
+            <a:pPr>
+              <a:spcBef>
+                <a:spcPts val="1200"/>
+              </a:spcBef>
+              <a:defRPr sz="1800">
+                <a:solidFill>
+                  <a:srgbClr val="2C3E50"/>
+                </a:solidFill>
+              </a:defRPr>
+            </a:pPr>
+            <a:r>
+              <a:t>▸ 釐清目的（玩樂 vs 進修 vs 平衡）</a:t>
+            </a:r>
+          </a:p>
+          <a:p>
+            <a:pPr>
+              <a:spcBef>
+                <a:spcPts val="1200"/>
+              </a:spcBef>
+              <a:defRPr sz="1800">
+                <a:solidFill>
+                  <a:srgbClr val="2C3E50"/>
+                </a:solidFill>
+              </a:defRPr>
+            </a:pPr>
+          </a:p>
+          <a:p>
+            <a:pPr>
+              <a:spcBef>
+                <a:spcPts val="1200"/>
+              </a:spcBef>
+              <a:defRPr sz="1800">
+                <a:solidFill>
+                  <a:srgbClr val="2C3E50"/>
+                </a:solidFill>
+              </a:defRPr>
+            </a:pPr>
+            <a:r>
+              <a:t>▸ 三大支柱（英文、GPA、動機）</a:t>
+            </a:r>
+          </a:p>
+          <a:p>
+            <a:pPr>
+              <a:spcBef>
+                <a:spcPts val="1200"/>
+              </a:spcBef>
+              <a:defRPr sz="1800">
+                <a:solidFill>
+                  <a:srgbClr val="2C3E50"/>
+                </a:solidFill>
+              </a:defRPr>
+            </a:pPr>
+          </a:p>
+          <a:p>
+            <a:pPr>
+              <a:spcBef>
+                <a:spcPts val="1200"/>
+              </a:spcBef>
+              <a:defRPr sz="1800">
+                <a:solidFill>
+                  <a:srgbClr val="2C3E50"/>
+                </a:solidFill>
+              </a:defRPr>
+            </a:pPr>
+            <a:r>
+              <a:t>▸ 善用獎學金（學海計畫、教育部獎學金）</a:t>
+            </a:r>
+          </a:p>
+          <a:p>
+            <a:pPr>
+              <a:spcBef>
+                <a:spcPts val="1200"/>
+              </a:spcBef>
+              <a:defRPr sz="1800">
+                <a:solidFill>
+                  <a:srgbClr val="2C3E50"/>
+                </a:solidFill>
+              </a:defRPr>
+            </a:pPr>
+          </a:p>
+          <a:p>
+            <a:pPr>
+              <a:spcBef>
+                <a:spcPts val="1200"/>
+              </a:spcBef>
+              <a:defRPr sz="1800">
+                <a:solidFill>
+                  <a:srgbClr val="2C3E50"/>
+                </a:solidFill>
+              </a:defRPr>
+            </a:pPr>
+            <a:r>
+              <a:t>▸ 行前準備（簽證、保險、網卡、2張信用卡）</a:t>
+            </a:r>
+          </a:p>
+          <a:p>
+            <a:pPr>
+              <a:spcBef>
+                <a:spcPts val="1200"/>
+              </a:spcBef>
+              <a:defRPr sz="1800">
+                <a:solidFill>
+                  <a:srgbClr val="2C3E50"/>
+                </a:solidFill>
+              </a:defRPr>
+            </a:pPr>
+          </a:p>
+          <a:p>
+            <a:pPr>
+              <a:spcBef>
+                <a:spcPts val="1200"/>
+              </a:spcBef>
+              <a:defRPr sz="1800">
+                <a:solidFill>
+                  <a:srgbClr val="2C3E50"/>
+                </a:solidFill>
+              </a:defRPr>
+            </a:pPr>
+            <a:r>
+              <a:t>▸ Speak Up &amp; Work Smart</a:t>
+            </a:r>
+          </a:p>
+          <a:p>
+            <a:pPr>
+              <a:spcBef>
+                <a:spcPts val="1200"/>
+              </a:spcBef>
+              <a:defRPr sz="1800">
+                <a:solidFill>
+                  <a:srgbClr val="2C3E50"/>
+                </a:solidFill>
+              </a:defRPr>
+            </a:pPr>
+          </a:p>
+          <a:p>
+            <a:pPr>
+              <a:spcBef>
+                <a:spcPts val="1200"/>
+              </a:spcBef>
+              <a:defRPr sz="1800">
+                <a:solidFill>
+                  <a:srgbClr val="2C3E50"/>
+                </a:solidFill>
+              </a:defRPr>
+            </a:pPr>
+            <a:r>
+              <a:t>▸ Try New Things &amp; 跳脫舒適圈</a:t>
+            </a:r>
+          </a:p>
+          <a:p>
+            <a:pPr>
+              <a:spcBef>
+                <a:spcPts val="1200"/>
+              </a:spcBef>
+              <a:defRPr sz="1800">
+                <a:solidFill>
+                  <a:srgbClr val="2C3E50"/>
+                </a:solidFill>
+              </a:defRPr>
+            </a:pPr>
+          </a:p>
+          <a:p>
+            <a:pPr>
+              <a:spcBef>
+                <a:spcPts val="1200"/>
+              </a:spcBef>
+              <a:defRPr sz="1800">
+                <a:solidFill>
+                  <a:srgbClr val="2C3E50"/>
+                </a:solidFill>
+              </a:defRPr>
+            </a:pPr>
+            <a:r>
+              <a:t>▸ 代表學校，為自己創造機會</a:t>
             </a:r>
           </a:p>
         </p:txBody>
@@ -6051,190 +6051,190 @@
               </a:defRPr>
             </a:pPr>
             <a:r>
-              <a:t>❓ GPA要多少才能申請？</a:t>
-            </a:r>
-          </a:p>
-          <a:p>
-            <a:pPr>
-              <a:spcBef>
-                <a:spcPts val="1200"/>
-              </a:spcBef>
-              <a:defRPr sz="1800">
-                <a:solidFill>
-                  <a:srgbClr val="2C3E50"/>
-                </a:solidFill>
-              </a:defRPr>
-            </a:pPr>
-            <a:r>
-              <a:t>→ 沒有絕對標準，但越高越好。學海計畫各校標準不同。</a:t>
-            </a:r>
-          </a:p>
-          <a:p>
-            <a:pPr>
-              <a:spcBef>
-                <a:spcPts val="1200"/>
-              </a:spcBef>
-              <a:defRPr sz="1800">
-                <a:solidFill>
-                  <a:srgbClr val="2C3E50"/>
-                </a:solidFill>
-              </a:defRPr>
-            </a:pPr>
-          </a:p>
-          <a:p>
-            <a:pPr>
-              <a:spcBef>
-                <a:spcPts val="1200"/>
-              </a:spcBef>
-              <a:defRPr sz="1800">
-                <a:solidFill>
-                  <a:srgbClr val="2C3E50"/>
-                </a:solidFill>
-              </a:defRPr>
-            </a:pPr>
-            <a:r>
-              <a:t>❓ 英文要考到幾分？</a:t>
-            </a:r>
-          </a:p>
-          <a:p>
-            <a:pPr>
-              <a:spcBef>
-                <a:spcPts val="1200"/>
-              </a:spcBef>
-              <a:defRPr sz="1800">
-                <a:solidFill>
-                  <a:srgbClr val="2C3E50"/>
-                </a:solidFill>
-              </a:defRPr>
-            </a:pPr>
-            <a:r>
-              <a:t>→ 多數學校：托福80+ / 雅思6.0+ / 在校英文80+</a:t>
-            </a:r>
-          </a:p>
-          <a:p>
-            <a:pPr>
-              <a:spcBef>
-                <a:spcPts val="1200"/>
-              </a:spcBef>
-              <a:defRPr sz="1800">
-                <a:solidFill>
-                  <a:srgbClr val="2C3E50"/>
-                </a:solidFill>
-              </a:defRPr>
-            </a:pPr>
-          </a:p>
-          <a:p>
-            <a:pPr>
-              <a:spcBef>
-                <a:spcPts val="1200"/>
-              </a:spcBef>
-              <a:defRPr sz="1800">
-                <a:solidFill>
-                  <a:srgbClr val="2C3E50"/>
-                </a:solidFill>
-              </a:defRPr>
-            </a:pPr>
-            <a:r>
-              <a:t>❓ 沒有姊妹校可以交換嗎？</a:t>
-            </a:r>
-          </a:p>
-          <a:p>
-            <a:pPr>
-              <a:spcBef>
-                <a:spcPts val="1200"/>
-              </a:spcBef>
-              <a:defRPr sz="1800">
-                <a:solidFill>
-                  <a:srgbClr val="2C3E50"/>
-                </a:solidFill>
-              </a:defRPr>
-            </a:pPr>
-            <a:r>
-              <a:t>→ 可以！透過教育部獎學金，不限姊妹校。</a:t>
-            </a:r>
-          </a:p>
-          <a:p>
-            <a:pPr>
-              <a:spcBef>
-                <a:spcPts val="1200"/>
-              </a:spcBef>
-              <a:defRPr sz="1800">
-                <a:solidFill>
-                  <a:srgbClr val="2C3E50"/>
-                </a:solidFill>
-              </a:defRPr>
-            </a:pPr>
-          </a:p>
-          <a:p>
-            <a:pPr>
-              <a:spcBef>
-                <a:spcPts val="1200"/>
-              </a:spcBef>
-              <a:defRPr sz="1800">
-                <a:solidFill>
-                  <a:srgbClr val="2C3E50"/>
-                </a:solidFill>
-              </a:defRPr>
-            </a:pPr>
-            <a:r>
-              <a:t>❓ 交換要花多少錢？</a:t>
-            </a:r>
-          </a:p>
-          <a:p>
-            <a:pPr>
-              <a:spcBef>
-                <a:spcPts val="1200"/>
-              </a:spcBef>
-              <a:defRPr sz="1800">
-                <a:solidFill>
-                  <a:srgbClr val="2C3E50"/>
-                </a:solidFill>
-              </a:defRPr>
-            </a:pPr>
-            <a:r>
-              <a:t>→ 視國家而定。學海計畫補助5-30萬，力學優秀生可全額。</a:t>
-            </a:r>
-          </a:p>
-          <a:p>
-            <a:pPr>
-              <a:spcBef>
-                <a:spcPts val="1200"/>
-              </a:spcBef>
-              <a:defRPr sz="1800">
-                <a:solidFill>
-                  <a:srgbClr val="2C3E50"/>
-                </a:solidFill>
-              </a:defRPr>
-            </a:pPr>
-          </a:p>
-          <a:p>
-            <a:pPr>
-              <a:spcBef>
-                <a:spcPts val="1200"/>
-              </a:spcBef>
-              <a:defRPr sz="1800">
-                <a:solidFill>
-                  <a:srgbClr val="2C3E50"/>
-                </a:solidFill>
-              </a:defRPr>
-            </a:pPr>
-            <a:r>
-              <a:t>❓ 現在開始準備來得及嗎？</a:t>
-            </a:r>
-          </a:p>
-          <a:p>
-            <a:pPr>
-              <a:spcBef>
-                <a:spcPts val="1200"/>
-              </a:spcBef>
-              <a:defRPr sz="1800">
-                <a:solidFill>
-                  <a:srgbClr val="2C3E50"/>
-                </a:solidFill>
-              </a:defRPr>
-            </a:pPr>
-            <a:r>
-              <a:t>→ 看你想何時出發。至少需要12個月準備時間。</a:t>
+              <a:t>Q: GPA要多少才能申請？</a:t>
+            </a:r>
+          </a:p>
+          <a:p>
+            <a:pPr>
+              <a:spcBef>
+                <a:spcPts val="1200"/>
+              </a:spcBef>
+              <a:defRPr sz="1800">
+                <a:solidFill>
+                  <a:srgbClr val="2C3E50"/>
+                </a:solidFill>
+              </a:defRPr>
+            </a:pPr>
+            <a:r>
+              <a:t>A: 沒有絕對標準，但越高越好。學海計畫各校標準不同。</a:t>
+            </a:r>
+          </a:p>
+          <a:p>
+            <a:pPr>
+              <a:spcBef>
+                <a:spcPts val="1200"/>
+              </a:spcBef>
+              <a:defRPr sz="1800">
+                <a:solidFill>
+                  <a:srgbClr val="2C3E50"/>
+                </a:solidFill>
+              </a:defRPr>
+            </a:pPr>
+          </a:p>
+          <a:p>
+            <a:pPr>
+              <a:spcBef>
+                <a:spcPts val="1200"/>
+              </a:spcBef>
+              <a:defRPr sz="1800">
+                <a:solidFill>
+                  <a:srgbClr val="2C3E50"/>
+                </a:solidFill>
+              </a:defRPr>
+            </a:pPr>
+            <a:r>
+              <a:t>Q: 英文要考到幾分？</a:t>
+            </a:r>
+          </a:p>
+          <a:p>
+            <a:pPr>
+              <a:spcBef>
+                <a:spcPts val="1200"/>
+              </a:spcBef>
+              <a:defRPr sz="1800">
+                <a:solidFill>
+                  <a:srgbClr val="2C3E50"/>
+                </a:solidFill>
+              </a:defRPr>
+            </a:pPr>
+            <a:r>
+              <a:t>A: 多數學校：托福80+ / 雅思6.0+ / 在校英文80+</a:t>
+            </a:r>
+          </a:p>
+          <a:p>
+            <a:pPr>
+              <a:spcBef>
+                <a:spcPts val="1200"/>
+              </a:spcBef>
+              <a:defRPr sz="1800">
+                <a:solidFill>
+                  <a:srgbClr val="2C3E50"/>
+                </a:solidFill>
+              </a:defRPr>
+            </a:pPr>
+          </a:p>
+          <a:p>
+            <a:pPr>
+              <a:spcBef>
+                <a:spcPts val="1200"/>
+              </a:spcBef>
+              <a:defRPr sz="1800">
+                <a:solidFill>
+                  <a:srgbClr val="2C3E50"/>
+                </a:solidFill>
+              </a:defRPr>
+            </a:pPr>
+            <a:r>
+              <a:t>Q: 沒有姊妹校可以交換嗎？</a:t>
+            </a:r>
+          </a:p>
+          <a:p>
+            <a:pPr>
+              <a:spcBef>
+                <a:spcPts val="1200"/>
+              </a:spcBef>
+              <a:defRPr sz="1800">
+                <a:solidFill>
+                  <a:srgbClr val="2C3E50"/>
+                </a:solidFill>
+              </a:defRPr>
+            </a:pPr>
+            <a:r>
+              <a:t>A: 可以！透過教育部獎學金，不限姊妹校。</a:t>
+            </a:r>
+          </a:p>
+          <a:p>
+            <a:pPr>
+              <a:spcBef>
+                <a:spcPts val="1200"/>
+              </a:spcBef>
+              <a:defRPr sz="1800">
+                <a:solidFill>
+                  <a:srgbClr val="2C3E50"/>
+                </a:solidFill>
+              </a:defRPr>
+            </a:pPr>
+          </a:p>
+          <a:p>
+            <a:pPr>
+              <a:spcBef>
+                <a:spcPts val="1200"/>
+              </a:spcBef>
+              <a:defRPr sz="1800">
+                <a:solidFill>
+                  <a:srgbClr val="2C3E50"/>
+                </a:solidFill>
+              </a:defRPr>
+            </a:pPr>
+            <a:r>
+              <a:t>Q: 交換要花多少錢？</a:t>
+            </a:r>
+          </a:p>
+          <a:p>
+            <a:pPr>
+              <a:spcBef>
+                <a:spcPts val="1200"/>
+              </a:spcBef>
+              <a:defRPr sz="1800">
+                <a:solidFill>
+                  <a:srgbClr val="2C3E50"/>
+                </a:solidFill>
+              </a:defRPr>
+            </a:pPr>
+            <a:r>
+              <a:t>A: 視國家而定。學海計畫補助5-30萬，力學優秀生可全額。</a:t>
+            </a:r>
+          </a:p>
+          <a:p>
+            <a:pPr>
+              <a:spcBef>
+                <a:spcPts val="1200"/>
+              </a:spcBef>
+              <a:defRPr sz="1800">
+                <a:solidFill>
+                  <a:srgbClr val="2C3E50"/>
+                </a:solidFill>
+              </a:defRPr>
+            </a:pPr>
+          </a:p>
+          <a:p>
+            <a:pPr>
+              <a:spcBef>
+                <a:spcPts val="1200"/>
+              </a:spcBef>
+              <a:defRPr sz="1800">
+                <a:solidFill>
+                  <a:srgbClr val="2C3E50"/>
+                </a:solidFill>
+              </a:defRPr>
+            </a:pPr>
+            <a:r>
+              <a:t>Q: 現在開始準備來得及嗎？</a:t>
+            </a:r>
+          </a:p>
+          <a:p>
+            <a:pPr>
+              <a:spcBef>
+                <a:spcPts val="1200"/>
+              </a:spcBef>
+              <a:defRPr sz="1800">
+                <a:solidFill>
+                  <a:srgbClr val="2C3E50"/>
+                </a:solidFill>
+              </a:defRPr>
+            </a:pPr>
+            <a:r>
+              <a:t>A: 看你想何時出發。至少需要12個月準備時間。</a:t>
             </a:r>
           </a:p>
         </p:txBody>
@@ -6317,7 +6317,7 @@
               </a:defRPr>
             </a:pPr>
             <a:r>
-              <a:t>🌍 The world is your classroom. 🌍</a:t>
+              <a:t>The world is your classroom.</a:t>
             </a:r>
           </a:p>
         </p:txBody>
@@ -6451,52 +6451,52 @@
               </a:defRPr>
             </a:pPr>
             <a:r>
-              <a:t>✓ 身為百川人，校級交換管道受限</a:t>
-            </a:r>
-          </a:p>
-          <a:p>
-            <a:pPr>
-              <a:spcBef>
-                <a:spcPts val="1200"/>
-              </a:spcBef>
-              <a:defRPr sz="1800">
-                <a:solidFill>
-                  <a:srgbClr val="2C3E50"/>
-                </a:solidFill>
-              </a:defRPr>
-            </a:pPr>
-            <a:r>
-              <a:t>✓ 需自行開闢外軌途徑（如教育部獎學金）</a:t>
-            </a:r>
-          </a:p>
-          <a:p>
-            <a:pPr>
-              <a:spcBef>
-                <a:spcPts val="1200"/>
-              </a:spcBef>
-              <a:defRPr sz="1800">
-                <a:solidFill>
-                  <a:srgbClr val="2C3E50"/>
-                </a:solidFill>
-              </a:defRPr>
-            </a:pPr>
-            <a:r>
-              <a:t>✓ 跨領域背景 = 國際競爭力的優勢</a:t>
-            </a:r>
-          </a:p>
-          <a:p>
-            <a:pPr>
-              <a:spcBef>
-                <a:spcPts val="1200"/>
-              </a:spcBef>
-              <a:defRPr sz="1800">
-                <a:solidFill>
-                  <a:srgbClr val="2C3E50"/>
-                </a:solidFill>
-              </a:defRPr>
-            </a:pPr>
-            <a:r>
-              <a:t>✓ 全球化視野對百川人的職涯發展至關重要</a:t>
+              <a:t>• 身為百川人，校級交換管道受限</a:t>
+            </a:r>
+          </a:p>
+          <a:p>
+            <a:pPr>
+              <a:spcBef>
+                <a:spcPts val="1200"/>
+              </a:spcBef>
+              <a:defRPr sz="1800">
+                <a:solidFill>
+                  <a:srgbClr val="2C3E50"/>
+                </a:solidFill>
+              </a:defRPr>
+            </a:pPr>
+            <a:r>
+              <a:t>• 需自行開闢外軌途徑（如教育部獎學金）</a:t>
+            </a:r>
+          </a:p>
+          <a:p>
+            <a:pPr>
+              <a:spcBef>
+                <a:spcPts val="1200"/>
+              </a:spcBef>
+              <a:defRPr sz="1800">
+                <a:solidFill>
+                  <a:srgbClr val="2C3E50"/>
+                </a:solidFill>
+              </a:defRPr>
+            </a:pPr>
+            <a:r>
+              <a:t>• 跨領域背景 = 國際競爭力的優勢</a:t>
+            </a:r>
+          </a:p>
+          <a:p>
+            <a:pPr>
+              <a:spcBef>
+                <a:spcPts val="1200"/>
+              </a:spcBef>
+              <a:defRPr sz="1800">
+                <a:solidFill>
+                  <a:srgbClr val="2C3E50"/>
+                </a:solidFill>
+              </a:defRPr>
+            </a:pPr>
+            <a:r>
+              <a:t>• 全球化視野對百川人的職涯發展至關重要</a:t>
             </a:r>
           </a:p>
           <a:p>
@@ -6523,7 +6523,7 @@
               </a:defRPr>
             </a:pPr>
             <a:r>
-              <a:t>💡 挑戰：如何在有限資源下，找到屬於自己的路？</a:t>
+              <a:t>【挑戰】如何在有限資源下，找到屬於自己的路？</a:t>
             </a:r>
           </a:p>
         </p:txBody>
@@ -6657,97 +6657,97 @@
               </a:defRPr>
             </a:pPr>
             <a:r>
-              <a:t>📅 12-18個月前：決定目標、開始研究國家/學校</a:t>
-            </a:r>
-          </a:p>
-          <a:p>
-            <a:pPr>
-              <a:spcBef>
-                <a:spcPts val="1200"/>
-              </a:spcBef>
-              <a:defRPr sz="1800">
-                <a:solidFill>
-                  <a:srgbClr val="2C3E50"/>
-                </a:solidFill>
-              </a:defRPr>
-            </a:pPr>
-            <a:r>
-              <a:t>📅 10-12個月前：準備英文考試（托福/雅思）、提升GPA</a:t>
-            </a:r>
-          </a:p>
-          <a:p>
-            <a:pPr>
-              <a:spcBef>
-                <a:spcPts val="1200"/>
-              </a:spcBef>
-              <a:defRPr sz="1800">
-                <a:solidFill>
-                  <a:srgbClr val="2C3E50"/>
-                </a:solidFill>
-              </a:defRPr>
-            </a:pPr>
-            <a:r>
-              <a:t>📅 8-10個月前：撰寫研究計畫、爭取教授邀請函</a:t>
-            </a:r>
-          </a:p>
-          <a:p>
-            <a:pPr>
-              <a:spcBef>
-                <a:spcPts val="1200"/>
-              </a:spcBef>
-              <a:defRPr sz="1800">
-                <a:solidFill>
-                  <a:srgbClr val="2C3E50"/>
-                </a:solidFill>
-              </a:defRPr>
-            </a:pPr>
-            <a:r>
-              <a:t>📅 6-8個月前：申請獎學金（學海計畫等）</a:t>
-            </a:r>
-          </a:p>
-          <a:p>
-            <a:pPr>
-              <a:spcBef>
-                <a:spcPts val="1200"/>
-              </a:spcBef>
-              <a:defRPr sz="1800">
-                <a:solidFill>
-                  <a:srgbClr val="2C3E50"/>
-                </a:solidFill>
-              </a:defRPr>
-            </a:pPr>
-            <a:r>
-              <a:t>📅 4-6個月前：申請學校、準備申請文件</a:t>
-            </a:r>
-          </a:p>
-          <a:p>
-            <a:pPr>
-              <a:spcBef>
-                <a:spcPts val="1200"/>
-              </a:spcBef>
-              <a:defRPr sz="1800">
-                <a:solidFill>
-                  <a:srgbClr val="2C3E50"/>
-                </a:solidFill>
-              </a:defRPr>
-            </a:pPr>
-            <a:r>
-              <a:t>📅 2-4個月前：申請簽證（德國需2個月！）</a:t>
-            </a:r>
-          </a:p>
-          <a:p>
-            <a:pPr>
-              <a:spcBef>
-                <a:spcPts val="1200"/>
-              </a:spcBef>
-              <a:defRPr sz="1800">
-                <a:solidFill>
-                  <a:srgbClr val="2C3E50"/>
-                </a:solidFill>
-              </a:defRPr>
-            </a:pPr>
-            <a:r>
-              <a:t>📅 1-2個月前：訂機票、保險、住宿、網卡</a:t>
+              <a:t>▸ 12-18個月前：決定目標、開始研究國家/學校</a:t>
+            </a:r>
+          </a:p>
+          <a:p>
+            <a:pPr>
+              <a:spcBef>
+                <a:spcPts val="1200"/>
+              </a:spcBef>
+              <a:defRPr sz="1800">
+                <a:solidFill>
+                  <a:srgbClr val="2C3E50"/>
+                </a:solidFill>
+              </a:defRPr>
+            </a:pPr>
+            <a:r>
+              <a:t>▸ 10-12個月前：準備英文考試（托福/雅思）、提升GPA</a:t>
+            </a:r>
+          </a:p>
+          <a:p>
+            <a:pPr>
+              <a:spcBef>
+                <a:spcPts val="1200"/>
+              </a:spcBef>
+              <a:defRPr sz="1800">
+                <a:solidFill>
+                  <a:srgbClr val="2C3E50"/>
+                </a:solidFill>
+              </a:defRPr>
+            </a:pPr>
+            <a:r>
+              <a:t>▸ 8-10個月前：撰寫研究計畫、爭取教授邀請函</a:t>
+            </a:r>
+          </a:p>
+          <a:p>
+            <a:pPr>
+              <a:spcBef>
+                <a:spcPts val="1200"/>
+              </a:spcBef>
+              <a:defRPr sz="1800">
+                <a:solidFill>
+                  <a:srgbClr val="2C3E50"/>
+                </a:solidFill>
+              </a:defRPr>
+            </a:pPr>
+            <a:r>
+              <a:t>▸ 6-8個月前：申請獎學金（學海計畫等）</a:t>
+            </a:r>
+          </a:p>
+          <a:p>
+            <a:pPr>
+              <a:spcBef>
+                <a:spcPts val="1200"/>
+              </a:spcBef>
+              <a:defRPr sz="1800">
+                <a:solidFill>
+                  <a:srgbClr val="2C3E50"/>
+                </a:solidFill>
+              </a:defRPr>
+            </a:pPr>
+            <a:r>
+              <a:t>▸ 4-6個月前：申請學校、準備申請文件</a:t>
+            </a:r>
+          </a:p>
+          <a:p>
+            <a:pPr>
+              <a:spcBef>
+                <a:spcPts val="1200"/>
+              </a:spcBef>
+              <a:defRPr sz="1800">
+                <a:solidFill>
+                  <a:srgbClr val="2C3E50"/>
+                </a:solidFill>
+              </a:defRPr>
+            </a:pPr>
+            <a:r>
+              <a:t>▸ 2-4個月前：申請簽證（德國需2個月！）</a:t>
+            </a:r>
+          </a:p>
+          <a:p>
+            <a:pPr>
+              <a:spcBef>
+                <a:spcPts val="1200"/>
+              </a:spcBef>
+              <a:defRPr sz="1800">
+                <a:solidFill>
+                  <a:srgbClr val="2C3E50"/>
+                </a:solidFill>
+              </a:defRPr>
+            </a:pPr>
+            <a:r>
+              <a:t>▸ 1-2個月前：訂機票、保險、住宿、網卡</a:t>
             </a:r>
           </a:p>
           <a:p>
@@ -6774,7 +6774,7 @@
               </a:defRPr>
             </a:pPr>
             <a:r>
-              <a:t>⚠️ 越早開始，選擇越多！</a:t>
+              <a:t>【重要】越早開始，選擇越多！</a:t>
             </a:r>
           </a:p>
         </p:txBody>
@@ -6862,7 +6862,7 @@
               </a:defRPr>
             </a:pPr>
             <a:r>
-              <a:t>🎯 玩樂導向</a:t>
+              <a:t>類型一：玩樂導向</a:t>
             </a:r>
           </a:p>
         </p:txBody>
@@ -6900,7 +6900,7 @@
               </a:defRPr>
             </a:pPr>
             <a:r>
-              <a:t>🎒 以旅遊玩樂為主</a:t>
+              <a:t>【玩樂導向】以旅遊玩樂為主</a:t>
             </a:r>
           </a:p>
           <a:p>
@@ -6987,7 +6987,7 @@
               </a:defRPr>
             </a:pPr>
             <a:r>
-              <a:t>⚖️ 平衡型</a:t>
+              <a:t>【平衡型】</a:t>
             </a:r>
           </a:p>
           <a:p>
@@ -7067,7 +7067,7 @@
               </a:defRPr>
             </a:pPr>
             <a:r>
-              <a:t>🎯 進修導向</a:t>
+              <a:t>類型二：進修導向</a:t>
             </a:r>
           </a:p>
         </p:txBody>
@@ -7105,7 +7105,7 @@
               </a:defRPr>
             </a:pPr>
             <a:r>
-              <a:t>📚 以學術進修為重</a:t>
+              <a:t>【進修導向】以學術進修為重</a:t>
             </a:r>
           </a:p>
           <a:p>
@@ -7192,7 +7192,7 @@
               </a:defRPr>
             </a:pPr>
             <a:r>
-              <a:t>💡 重要提醒</a:t>
+              <a:t>【重要提醒】</a:t>
             </a:r>
           </a:p>
           <a:p>
@@ -7371,7 +7371,7 @@
               </a:defRPr>
             </a:pPr>
             <a:r>
-              <a:t>1️⃣ 英文能力（最重要！可提前準備）</a:t>
+              <a:t>一、英文能力（最重要！可提前準備）</a:t>
             </a:r>
           </a:p>
           <a:p>
@@ -7443,7 +7443,7 @@
               </a:defRPr>
             </a:pPr>
             <a:r>
-              <a:t>2️⃣ 在校成績 GPA（可量化指標）</a:t>
+              <a:t>二、在校成績 GPA（可量化指標）</a:t>
             </a:r>
           </a:p>
           <a:p>
@@ -7500,7 +7500,7 @@
               </a:defRPr>
             </a:pPr>
             <a:r>
-              <a:t>3️⃣ 動機與研究計畫（展現熱忱）</a:t>
+              <a:t>三、動機與研究計畫（展現熱忱）</a:t>
             </a:r>
           </a:p>
           <a:p>
@@ -7694,7 +7694,7 @@
               </a:defRPr>
             </a:pPr>
             <a:r>
-              <a:t>🎓 教育部學海計畫（大學交換）</a:t>
+              <a:t>【A】教育部學海計畫（大學交換）</a:t>
             </a:r>
           </a:p>
           <a:p>
@@ -7766,7 +7766,7 @@
               </a:defRPr>
             </a:pPr>
             <a:r>
-              <a:t>🎓 赴捷克短期進修獎學金（我的案例）</a:t>
+              <a:t>【B】赴捷克短期進修獎學金（我的案例）</a:t>
             </a:r>
           </a:p>
           <a:p>
@@ -7826,34 +7826,34 @@
               </a:defRPr>
             </a:pPr>
             <a:r>
-              <a:t>   • ⚠️ 風險：台灣錄取 ≠ 捷克最終核准</a:t>
-            </a:r>
-          </a:p>
-          <a:p>
-            <a:pPr>
-              <a:spcBef>
-                <a:spcPts val="1200"/>
-              </a:spcBef>
-              <a:defRPr sz="1800">
-                <a:solidFill>
-                  <a:srgbClr val="2C3E50"/>
-                </a:solidFill>
-              </a:defRPr>
-            </a:pPr>
-          </a:p>
-          <a:p>
-            <a:pPr>
-              <a:spcBef>
-                <a:spcPts val="1200"/>
-              </a:spcBef>
-              <a:defRPr sz="1800">
-                <a:solidFill>
-                  <a:srgbClr val="2C3E50"/>
-                </a:solidFill>
-              </a:defRPr>
-            </a:pPr>
-            <a:r>
-              <a:t>🎓 其他選項</a:t>
+              <a:t>   • 注意：台灣錄取 ≠ 捷克最終核准</a:t>
+            </a:r>
+          </a:p>
+          <a:p>
+            <a:pPr>
+              <a:spcBef>
+                <a:spcPts val="1200"/>
+              </a:spcBef>
+              <a:defRPr sz="1800">
+                <a:solidFill>
+                  <a:srgbClr val="2C3E50"/>
+                </a:solidFill>
+              </a:defRPr>
+            </a:pPr>
+          </a:p>
+          <a:p>
+            <a:pPr>
+              <a:spcBef>
+                <a:spcPts val="1200"/>
+              </a:spcBef>
+              <a:defRPr sz="1800">
+                <a:solidFill>
+                  <a:srgbClr val="2C3E50"/>
+                </a:solidFill>
+              </a:defRPr>
+            </a:pPr>
+            <a:r>
+              <a:t>【C】其他選項</a:t>
             </a:r>
           </a:p>
           <a:p>
@@ -8017,166 +8017,166 @@
               </a:defRPr>
             </a:pPr>
             <a:r>
-              <a:t>🌍 考量因素清單：</a:t>
-            </a:r>
-          </a:p>
-          <a:p>
-            <a:pPr>
-              <a:spcBef>
-                <a:spcPts val="1200"/>
-              </a:spcBef>
-              <a:defRPr sz="1800">
-                <a:solidFill>
-                  <a:srgbClr val="2C3E50"/>
-                </a:solidFill>
-              </a:defRPr>
-            </a:pPr>
-          </a:p>
-          <a:p>
-            <a:pPr>
-              <a:spcBef>
-                <a:spcPts val="1200"/>
-              </a:spcBef>
-              <a:defRPr sz="1800">
-                <a:solidFill>
-                  <a:srgbClr val="2C3E50"/>
-                </a:solidFill>
-              </a:defRPr>
-            </a:pPr>
-            <a:r>
-              <a:t>✓ 生活成本（東歐&lt;西歐&lt;北美）</a:t>
-            </a:r>
-          </a:p>
-          <a:p>
-            <a:pPr>
-              <a:spcBef>
-                <a:spcPts val="1200"/>
-              </a:spcBef>
-              <a:defRPr sz="1800">
-                <a:solidFill>
-                  <a:srgbClr val="2C3E50"/>
-                </a:solidFill>
-              </a:defRPr>
-            </a:pPr>
-            <a:r>
-              <a:t>✓ 交通便利性（旅遊需求）</a:t>
-            </a:r>
-          </a:p>
-          <a:p>
-            <a:pPr>
-              <a:spcBef>
-                <a:spcPts val="1200"/>
-              </a:spcBef>
-              <a:defRPr sz="1800">
-                <a:solidFill>
-                  <a:srgbClr val="2C3E50"/>
-                </a:solidFill>
-              </a:defRPr>
-            </a:pPr>
-            <a:r>
-              <a:t>✓ 學術資源（進修需求）</a:t>
-            </a:r>
-          </a:p>
-          <a:p>
-            <a:pPr>
-              <a:spcBef>
-                <a:spcPts val="1200"/>
-              </a:spcBef>
-              <a:defRPr sz="1800">
-                <a:solidFill>
-                  <a:srgbClr val="2C3E50"/>
-                </a:solidFill>
-              </a:defRPr>
-            </a:pPr>
-            <a:r>
-              <a:t>✓ 語言障礙程度（英語普及度）</a:t>
-            </a:r>
-          </a:p>
-          <a:p>
-            <a:pPr>
-              <a:spcBef>
-                <a:spcPts val="1200"/>
-              </a:spcBef>
-              <a:defRPr sz="1800">
-                <a:solidFill>
-                  <a:srgbClr val="2C3E50"/>
-                </a:solidFill>
-              </a:defRPr>
-            </a:pPr>
-            <a:r>
-              <a:t>✓ 行政效率（歐洲普遍較慢，需心理準備）</a:t>
-            </a:r>
-          </a:p>
-          <a:p>
-            <a:pPr>
-              <a:spcBef>
-                <a:spcPts val="1200"/>
-              </a:spcBef>
-              <a:defRPr sz="1800">
-                <a:solidFill>
-                  <a:srgbClr val="2C3E50"/>
-                </a:solidFill>
-              </a:defRPr>
-            </a:pPr>
-            <a:r>
-              <a:t>✓ 地緣關係（未來就業考量）</a:t>
-            </a:r>
-          </a:p>
-          <a:p>
-            <a:pPr>
-              <a:spcBef>
-                <a:spcPts val="1200"/>
-              </a:spcBef>
-              <a:defRPr sz="1800">
-                <a:solidFill>
-                  <a:srgbClr val="2C3E50"/>
-                </a:solidFill>
-              </a:defRPr>
-            </a:pPr>
-            <a:r>
-              <a:t>✓ 氣候與日照（11月後歐洲4點天黑，易憂鬱）</a:t>
-            </a:r>
-          </a:p>
-          <a:p>
-            <a:pPr>
-              <a:spcBef>
-                <a:spcPts val="1200"/>
-              </a:spcBef>
-              <a:defRPr sz="1800">
-                <a:solidFill>
-                  <a:srgbClr val="2C3E50"/>
-                </a:solidFill>
-              </a:defRPr>
-            </a:pPr>
-            <a:r>
-              <a:t>✓ 簽證難度（德國2個月 vs 日本3天）</a:t>
-            </a:r>
-          </a:p>
-          <a:p>
-            <a:pPr>
-              <a:spcBef>
-                <a:spcPts val="1200"/>
-              </a:spcBef>
-              <a:defRPr sz="1800">
-                <a:solidFill>
-                  <a:srgbClr val="2C3E50"/>
-                </a:solidFill>
-              </a:defRPr>
-            </a:pPr>
-          </a:p>
-          <a:p>
-            <a:pPr>
-              <a:spcBef>
-                <a:spcPts val="1200"/>
-              </a:spcBef>
-              <a:defRPr sz="1800">
-                <a:solidFill>
-                  <a:srgbClr val="2C3E50"/>
-                </a:solidFill>
-              </a:defRPr>
-            </a:pPr>
-            <a:r>
-              <a:t>💡 特殊領域提醒：</a:t>
+              <a:t>考量因素清單：</a:t>
+            </a:r>
+          </a:p>
+          <a:p>
+            <a:pPr>
+              <a:spcBef>
+                <a:spcPts val="1200"/>
+              </a:spcBef>
+              <a:defRPr sz="1800">
+                <a:solidFill>
+                  <a:srgbClr val="2C3E50"/>
+                </a:solidFill>
+              </a:defRPr>
+            </a:pPr>
+          </a:p>
+          <a:p>
+            <a:pPr>
+              <a:spcBef>
+                <a:spcPts val="1200"/>
+              </a:spcBef>
+              <a:defRPr sz="1800">
+                <a:solidFill>
+                  <a:srgbClr val="2C3E50"/>
+                </a:solidFill>
+              </a:defRPr>
+            </a:pPr>
+            <a:r>
+              <a:t>• 生活成本（東歐&lt;西歐&lt;北美）</a:t>
+            </a:r>
+          </a:p>
+          <a:p>
+            <a:pPr>
+              <a:spcBef>
+                <a:spcPts val="1200"/>
+              </a:spcBef>
+              <a:defRPr sz="1800">
+                <a:solidFill>
+                  <a:srgbClr val="2C3E50"/>
+                </a:solidFill>
+              </a:defRPr>
+            </a:pPr>
+            <a:r>
+              <a:t>• 交通便利性（旅遊需求）</a:t>
+            </a:r>
+          </a:p>
+          <a:p>
+            <a:pPr>
+              <a:spcBef>
+                <a:spcPts val="1200"/>
+              </a:spcBef>
+              <a:defRPr sz="1800">
+                <a:solidFill>
+                  <a:srgbClr val="2C3E50"/>
+                </a:solidFill>
+              </a:defRPr>
+            </a:pPr>
+            <a:r>
+              <a:t>• 學術資源（進修需求）</a:t>
+            </a:r>
+          </a:p>
+          <a:p>
+            <a:pPr>
+              <a:spcBef>
+                <a:spcPts val="1200"/>
+              </a:spcBef>
+              <a:defRPr sz="1800">
+                <a:solidFill>
+                  <a:srgbClr val="2C3E50"/>
+                </a:solidFill>
+              </a:defRPr>
+            </a:pPr>
+            <a:r>
+              <a:t>• 語言障礙程度（英語普及度）</a:t>
+            </a:r>
+          </a:p>
+          <a:p>
+            <a:pPr>
+              <a:spcBef>
+                <a:spcPts val="1200"/>
+              </a:spcBef>
+              <a:defRPr sz="1800">
+                <a:solidFill>
+                  <a:srgbClr val="2C3E50"/>
+                </a:solidFill>
+              </a:defRPr>
+            </a:pPr>
+            <a:r>
+              <a:t>• 行政效率（歐洲普遍較慢，需心理準備）</a:t>
+            </a:r>
+          </a:p>
+          <a:p>
+            <a:pPr>
+              <a:spcBef>
+                <a:spcPts val="1200"/>
+              </a:spcBef>
+              <a:defRPr sz="1800">
+                <a:solidFill>
+                  <a:srgbClr val="2C3E50"/>
+                </a:solidFill>
+              </a:defRPr>
+            </a:pPr>
+            <a:r>
+              <a:t>• 地緣關係（未來就業考量）</a:t>
+            </a:r>
+          </a:p>
+          <a:p>
+            <a:pPr>
+              <a:spcBef>
+                <a:spcPts val="1200"/>
+              </a:spcBef>
+              <a:defRPr sz="1800">
+                <a:solidFill>
+                  <a:srgbClr val="2C3E50"/>
+                </a:solidFill>
+              </a:defRPr>
+            </a:pPr>
+            <a:r>
+              <a:t>• 氣候與日照（11月後歐洲4點天黑，易憂鬱）</a:t>
+            </a:r>
+          </a:p>
+          <a:p>
+            <a:pPr>
+              <a:spcBef>
+                <a:spcPts val="1200"/>
+              </a:spcBef>
+              <a:defRPr sz="1800">
+                <a:solidFill>
+                  <a:srgbClr val="2C3E50"/>
+                </a:solidFill>
+              </a:defRPr>
+            </a:pPr>
+            <a:r>
+              <a:t>• 簽證難度（德國2個月 vs 日本3天）</a:t>
+            </a:r>
+          </a:p>
+          <a:p>
+            <a:pPr>
+              <a:spcBef>
+                <a:spcPts val="1200"/>
+              </a:spcBef>
+              <a:defRPr sz="1800">
+                <a:solidFill>
+                  <a:srgbClr val="2C3E50"/>
+                </a:solidFill>
+              </a:defRPr>
+            </a:pPr>
+          </a:p>
+          <a:p>
+            <a:pPr>
+              <a:spcBef>
+                <a:spcPts val="1200"/>
+              </a:spcBef>
+              <a:defRPr sz="1800">
+                <a:solidFill>
+                  <a:srgbClr val="2C3E50"/>
+                </a:solidFill>
+              </a:defRPr>
+            </a:pPr>
+            <a:r>
+              <a:t>特殊領域提醒：</a:t>
             </a:r>
           </a:p>
           <a:p>
@@ -8294,7 +8294,7 @@
               </a:defRPr>
             </a:pPr>
             <a:r>
-              <a:t>📄 必備項目</a:t>
+              <a:t>必備項目</a:t>
             </a:r>
           </a:p>
         </p:txBody>
@@ -8332,7 +8332,7 @@
               </a:defRPr>
             </a:pPr>
             <a:r>
-              <a:t>📋 文件類</a:t>
+              <a:t>【文件類】</a:t>
             </a:r>
           </a:p>
           <a:p>
@@ -8347,7 +8347,7 @@
               </a:defRPr>
             </a:pPr>
             <a:r>
-              <a:t>✓ 簽證（提早2-3個月辦理）</a:t>
+              <a:t>• 簽證（提早2-3個月辦理）</a:t>
             </a:r>
           </a:p>
           <a:p>
@@ -8362,7 +8362,7 @@
               </a:defRPr>
             </a:pPr>
             <a:r>
-              <a:t>✓ 護照效期（需超過6個月）</a:t>
+              <a:t>• 護照效期（需超過6個月）</a:t>
             </a:r>
           </a:p>
           <a:p>
@@ -8377,7 +8377,7 @@
               </a:defRPr>
             </a:pPr>
             <a:r>
-              <a:t>✓ 國際學生證 ISIC（歐洲很好用）</a:t>
+              <a:t>• 國際學生證 ISIC（歐洲很好用）</a:t>
             </a:r>
           </a:p>
           <a:p>
@@ -8392,7 +8392,7 @@
               </a:defRPr>
             </a:pPr>
             <a:r>
-              <a:t>✓ 英文版成績單、在學證明</a:t>
+              <a:t>• 英文版成績單、在學證明</a:t>
             </a:r>
           </a:p>
           <a:p>
@@ -8419,7 +8419,7 @@
               </a:defRPr>
             </a:pPr>
             <a:r>
-              <a:t>💰 財務類</a:t>
+              <a:t>【財務類】</a:t>
             </a:r>
           </a:p>
           <a:p>
@@ -8434,7 +8434,7 @@
               </a:defRPr>
             </a:pPr>
             <a:r>
-              <a:t>✓ 至少2張信用卡（備援）</a:t>
+              <a:t>• 至少2張信用卡（備援）</a:t>
             </a:r>
           </a:p>
           <a:p>
@@ -8449,7 +8449,7 @@
               </a:defRPr>
             </a:pPr>
             <a:r>
-              <a:t>✓ 了解ATM提款機制</a:t>
+              <a:t>• 了解ATM提款機制</a:t>
             </a:r>
           </a:p>
           <a:p>
@@ -8464,7 +8464,7 @@
               </a:defRPr>
             </a:pPr>
             <a:r>
-              <a:t>✓ 換一些現金在身上</a:t>
+              <a:t>• 換一些現金在身上</a:t>
             </a:r>
           </a:p>
           <a:p>
@@ -8479,7 +8479,7 @@
               </a:defRPr>
             </a:pPr>
             <a:r>
-              <a:t>✓ 保險（醫療費用超貴！）</a:t>
+              <a:t>• 保險（醫療費用超貴！）</a:t>
             </a:r>
           </a:p>
         </p:txBody>
@@ -8514,7 +8514,7 @@
               </a:defRPr>
             </a:pPr>
             <a:r>
-              <a:t>🔧 實用工具</a:t>
+              <a:t>實用工具</a:t>
             </a:r>
           </a:p>
         </p:txBody>
@@ -8552,7 +8552,7 @@
               </a:defRPr>
             </a:pPr>
             <a:r>
-              <a:t>📱 生活類</a:t>
+              <a:t>【生活類】</a:t>
             </a:r>
           </a:p>
           <a:p>
@@ -8567,7 +8567,7 @@
               </a:defRPr>
             </a:pPr>
             <a:r>
-              <a:t>✓ 網卡/SIM卡（必備！）</a:t>
+              <a:t>• 網卡/SIM卡（必備！）</a:t>
             </a:r>
           </a:p>
           <a:p>
@@ -8582,7 +8582,7 @@
               </a:defRPr>
             </a:pPr>
             <a:r>
-              <a:t>✓ 翻譯軟體（非英語系國家）</a:t>
+              <a:t>• 翻譯軟體（非英語系國家）</a:t>
             </a:r>
           </a:p>
           <a:p>
@@ -8597,7 +8597,7 @@
               </a:defRPr>
             </a:pPr>
             <a:r>
-              <a:t>✓ 正裝西裝（歐洲考試/活動需要）</a:t>
+              <a:t>• 正裝西裝（歐洲考試/活動需要）</a:t>
             </a:r>
           </a:p>
           <a:p>
@@ -8612,7 +8612,7 @@
               </a:defRPr>
             </a:pPr>
             <a:r>
-              <a:t>✓ 消費電子產品在台灣買（歐洲VAT 15-19%）</a:t>
+              <a:t>• 消費電子產品在台灣買（歐洲VAT 15-19%）</a:t>
             </a:r>
           </a:p>
           <a:p>
@@ -8639,7 +8639,7 @@
               </a:defRPr>
             </a:pPr>
             <a:r>
-              <a:t>📚 行政類</a:t>
+              <a:t>【行政類】</a:t>
             </a:r>
           </a:p>
           <a:p>
@@ -8654,7 +8654,7 @@
               </a:defRPr>
             </a:pPr>
             <a:r>
-              <a:t>✓ 確認選課與住宿</a:t>
+              <a:t>• 確認選課與住宿</a:t>
             </a:r>
           </a:p>
           <a:p>
@@ -8669,7 +8669,7 @@
               </a:defRPr>
             </a:pPr>
             <a:r>
-              <a:t>✓ 查詢國定假日（避免落地遇假期）</a:t>
+              <a:t>• 查詢國定假日（避免落地遇假期）</a:t>
             </a:r>
           </a:p>
           <a:p>
@@ -8684,7 +8684,7 @@
               </a:defRPr>
             </a:pPr>
             <a:r>
-              <a:t>✓ 了解「銀行週」時間</a:t>
+              <a:t>• 了解「銀行週」時間</a:t>
             </a:r>
           </a:p>
           <a:p>
@@ -8699,7 +8699,7 @@
               </a:defRPr>
             </a:pPr>
             <a:r>
-              <a:t>✓ 加入當地留學生社團（FB/Line）</a:t>
+              <a:t>• 加入當地留學生社團（FB/Line）</a:t>
             </a:r>
           </a:p>
         </p:txBody>
@@ -8833,196 +8833,196 @@
               </a:defRPr>
             </a:pPr>
             <a:r>
-              <a:t>💡 省錢策略：</a:t>
-            </a:r>
-          </a:p>
-          <a:p>
-            <a:pPr>
-              <a:spcBef>
-                <a:spcPts val="1200"/>
-              </a:spcBef>
-              <a:defRPr sz="1800">
-                <a:solidFill>
-                  <a:srgbClr val="2C3E50"/>
-                </a:solidFill>
-              </a:defRPr>
-            </a:pPr>
-            <a:r>
-              <a:t>✓ 歐洲VAT高（15-19%），貴重3C在台灣買（相機、耳機、GoPro）</a:t>
-            </a:r>
-          </a:p>
-          <a:p>
-            <a:pPr>
-              <a:spcBef>
-                <a:spcPts val="1200"/>
-              </a:spcBef>
-              <a:defRPr sz="1800">
-                <a:solidFill>
-                  <a:srgbClr val="2C3E50"/>
-                </a:solidFill>
-              </a:defRPr>
-            </a:pPr>
-            <a:r>
-              <a:t>✓ 使用AI工具時掛VPN回台灣刷卡（避免歐盟VAT）</a:t>
-            </a:r>
-          </a:p>
-          <a:p>
-            <a:pPr>
-              <a:spcBef>
-                <a:spcPts val="1200"/>
-              </a:spcBef>
-              <a:defRPr sz="1800">
-                <a:solidFill>
-                  <a:srgbClr val="2C3E50"/>
-                </a:solidFill>
-              </a:defRPr>
-            </a:pPr>
-            <a:r>
-              <a:t>✓ 了解各國退稅門檻與流程</a:t>
-            </a:r>
-          </a:p>
-          <a:p>
-            <a:pPr>
-              <a:spcBef>
-                <a:spcPts val="1200"/>
-              </a:spcBef>
-              <a:defRPr sz="1800">
-                <a:solidFill>
-                  <a:srgbClr val="2C3E50"/>
-                </a:solidFill>
-              </a:defRPr>
-            </a:pPr>
-            <a:r>
-              <a:t>✓ 學會煮飯（外食比台北貴）</a:t>
-            </a:r>
-          </a:p>
-          <a:p>
-            <a:pPr>
-              <a:spcBef>
-                <a:spcPts val="1200"/>
-              </a:spcBef>
-              <a:defRPr sz="1800">
-                <a:solidFill>
-                  <a:srgbClr val="2C3E50"/>
-                </a:solidFill>
-              </a:defRPr>
-            </a:pPr>
-            <a:r>
-              <a:t>✓ 購買月票/季票（德國49歐月票超划算）</a:t>
-            </a:r>
-          </a:p>
-          <a:p>
-            <a:pPr>
-              <a:spcBef>
-                <a:spcPts val="1200"/>
-              </a:spcBef>
-              <a:defRPr sz="1800">
-                <a:solidFill>
-                  <a:srgbClr val="2C3E50"/>
-                </a:solidFill>
-              </a:defRPr>
-            </a:pPr>
-          </a:p>
-          <a:p>
-            <a:pPr>
-              <a:spcBef>
-                <a:spcPts val="1200"/>
-              </a:spcBef>
-              <a:defRPr sz="1800">
-                <a:solidFill>
-                  <a:srgbClr val="2C3E50"/>
-                </a:solidFill>
-              </a:defRPr>
-            </a:pPr>
-            <a:r>
-              <a:t>⚠️ 常見陷阱：</a:t>
-            </a:r>
-          </a:p>
-          <a:p>
-            <a:pPr>
-              <a:spcBef>
-                <a:spcPts val="1200"/>
-              </a:spcBef>
-              <a:defRPr sz="1800">
-                <a:solidFill>
-                  <a:srgbClr val="2C3E50"/>
-                </a:solidFill>
-              </a:defRPr>
-            </a:pPr>
-            <a:r>
-              <a:t>✗ 一次付清代辦費（建議分期，信用卡付款可追回）</a:t>
-            </a:r>
-          </a:p>
-          <a:p>
-            <a:pPr>
-              <a:spcBef>
-                <a:spcPts val="1200"/>
-              </a:spcBef>
-              <a:defRPr sz="1800">
-                <a:solidFill>
-                  <a:srgbClr val="2C3E50"/>
-                </a:solidFill>
-              </a:defRPr>
-            </a:pPr>
-            <a:r>
-              <a:t>✗ 沒買保險（國外醫療費天價）</a:t>
-            </a:r>
-          </a:p>
-          <a:p>
-            <a:pPr>
-              <a:spcBef>
-                <a:spcPts val="1200"/>
-              </a:spcBef>
-              <a:defRPr sz="1800">
-                <a:solidFill>
-                  <a:srgbClr val="2C3E50"/>
-                </a:solidFill>
-              </a:defRPr>
-            </a:pPr>
-            <a:r>
-              <a:t>✗ 護照「Republic of China」問題（建議遮China或強調Taiwan）</a:t>
-            </a:r>
-          </a:p>
-          <a:p>
-            <a:pPr>
-              <a:spcBef>
-                <a:spcPts val="1200"/>
-              </a:spcBef>
-              <a:defRPr sz="1800">
-                <a:solidFill>
-                  <a:srgbClr val="2C3E50"/>
-                </a:solidFill>
-              </a:defRPr>
-            </a:pPr>
-            <a:r>
-              <a:t>✗ 被當中國人收保證金（辦電信時）</a:t>
-            </a:r>
-          </a:p>
-          <a:p>
-            <a:pPr>
-              <a:spcBef>
-                <a:spcPts val="1200"/>
-              </a:spcBef>
-              <a:defRPr sz="1800">
-                <a:solidFill>
-                  <a:srgbClr val="2C3E50"/>
-                </a:solidFill>
-              </a:defRPr>
-            </a:pPr>
-          </a:p>
-          <a:p>
-            <a:pPr>
-              <a:spcBef>
-                <a:spcPts val="1200"/>
-              </a:spcBef>
-              <a:defRPr sz="1800">
-                <a:solidFill>
-                  <a:srgbClr val="2C3E50"/>
-                </a:solidFill>
-              </a:defRPr>
-            </a:pPr>
-            <a:r>
-              <a:t>📞 申訴管道：台灣1950 / 國外找駐外機構</a:t>
+              <a:t>【省錢策略】</a:t>
+            </a:r>
+          </a:p>
+          <a:p>
+            <a:pPr>
+              <a:spcBef>
+                <a:spcPts val="1200"/>
+              </a:spcBef>
+              <a:defRPr sz="1800">
+                <a:solidFill>
+                  <a:srgbClr val="2C3E50"/>
+                </a:solidFill>
+              </a:defRPr>
+            </a:pPr>
+            <a:r>
+              <a:t>• 歐洲VAT高（15-19%），貴重3C在台灣買（相機、耳機、GoPro）</a:t>
+            </a:r>
+          </a:p>
+          <a:p>
+            <a:pPr>
+              <a:spcBef>
+                <a:spcPts val="1200"/>
+              </a:spcBef>
+              <a:defRPr sz="1800">
+                <a:solidFill>
+                  <a:srgbClr val="2C3E50"/>
+                </a:solidFill>
+              </a:defRPr>
+            </a:pPr>
+            <a:r>
+              <a:t>• 使用AI工具時掛VPN回台灣刷卡（避免歐盟VAT）</a:t>
+            </a:r>
+          </a:p>
+          <a:p>
+            <a:pPr>
+              <a:spcBef>
+                <a:spcPts val="1200"/>
+              </a:spcBef>
+              <a:defRPr sz="1800">
+                <a:solidFill>
+                  <a:srgbClr val="2C3E50"/>
+                </a:solidFill>
+              </a:defRPr>
+            </a:pPr>
+            <a:r>
+              <a:t>• 了解各國退稅門檻與流程</a:t>
+            </a:r>
+          </a:p>
+          <a:p>
+            <a:pPr>
+              <a:spcBef>
+                <a:spcPts val="1200"/>
+              </a:spcBef>
+              <a:defRPr sz="1800">
+                <a:solidFill>
+                  <a:srgbClr val="2C3E50"/>
+                </a:solidFill>
+              </a:defRPr>
+            </a:pPr>
+            <a:r>
+              <a:t>• 學會煮飯（外食比台北貴）</a:t>
+            </a:r>
+          </a:p>
+          <a:p>
+            <a:pPr>
+              <a:spcBef>
+                <a:spcPts val="1200"/>
+              </a:spcBef>
+              <a:defRPr sz="1800">
+                <a:solidFill>
+                  <a:srgbClr val="2C3E50"/>
+                </a:solidFill>
+              </a:defRPr>
+            </a:pPr>
+            <a:r>
+              <a:t>• 購買月票/季票（德國49歐月票超划算）</a:t>
+            </a:r>
+          </a:p>
+          <a:p>
+            <a:pPr>
+              <a:spcBef>
+                <a:spcPts val="1200"/>
+              </a:spcBef>
+              <a:defRPr sz="1800">
+                <a:solidFill>
+                  <a:srgbClr val="2C3E50"/>
+                </a:solidFill>
+              </a:defRPr>
+            </a:pPr>
+          </a:p>
+          <a:p>
+            <a:pPr>
+              <a:spcBef>
+                <a:spcPts val="1200"/>
+              </a:spcBef>
+              <a:defRPr sz="1800">
+                <a:solidFill>
+                  <a:srgbClr val="2C3E50"/>
+                </a:solidFill>
+              </a:defRPr>
+            </a:pPr>
+            <a:r>
+              <a:t>【常見陷阱】</a:t>
+            </a:r>
+          </a:p>
+          <a:p>
+            <a:pPr>
+              <a:spcBef>
+                <a:spcPts val="1200"/>
+              </a:spcBef>
+              <a:defRPr sz="1800">
+                <a:solidFill>
+                  <a:srgbClr val="2C3E50"/>
+                </a:solidFill>
+              </a:defRPr>
+            </a:pPr>
+            <a:r>
+              <a:t>• 一次付清代辦費（建議分期，信用卡付款可追回）</a:t>
+            </a:r>
+          </a:p>
+          <a:p>
+            <a:pPr>
+              <a:spcBef>
+                <a:spcPts val="1200"/>
+              </a:spcBef>
+              <a:defRPr sz="1800">
+                <a:solidFill>
+                  <a:srgbClr val="2C3E50"/>
+                </a:solidFill>
+              </a:defRPr>
+            </a:pPr>
+            <a:r>
+              <a:t>• 沒買保險（國外醫療費天價）</a:t>
+            </a:r>
+          </a:p>
+          <a:p>
+            <a:pPr>
+              <a:spcBef>
+                <a:spcPts val="1200"/>
+              </a:spcBef>
+              <a:defRPr sz="1800">
+                <a:solidFill>
+                  <a:srgbClr val="2C3E50"/>
+                </a:solidFill>
+              </a:defRPr>
+            </a:pPr>
+            <a:r>
+              <a:t>• 護照「Republic of China」問題（建議遮China或強調Taiwan）</a:t>
+            </a:r>
+          </a:p>
+          <a:p>
+            <a:pPr>
+              <a:spcBef>
+                <a:spcPts val="1200"/>
+              </a:spcBef>
+              <a:defRPr sz="1800">
+                <a:solidFill>
+                  <a:srgbClr val="2C3E50"/>
+                </a:solidFill>
+              </a:defRPr>
+            </a:pPr>
+            <a:r>
+              <a:t>• 被當中國人收保證金（辦電信時）</a:t>
+            </a:r>
+          </a:p>
+          <a:p>
+            <a:pPr>
+              <a:spcBef>
+                <a:spcPts val="1200"/>
+              </a:spcBef>
+              <a:defRPr sz="1800">
+                <a:solidFill>
+                  <a:srgbClr val="2C3E50"/>
+                </a:solidFill>
+              </a:defRPr>
+            </a:pPr>
+          </a:p>
+          <a:p>
+            <a:pPr>
+              <a:spcBef>
+                <a:spcPts val="1200"/>
+              </a:spcBef>
+              <a:defRPr sz="1800">
+                <a:solidFill>
+                  <a:srgbClr val="2C3E50"/>
+                </a:solidFill>
+              </a:defRPr>
+            </a:pPr>
+            <a:r>
+              <a:t>【申訴管道】台灣1950 / 國外找駐外機構</a:t>
             </a:r>
           </a:p>
         </p:txBody>

--- a/交換經驗分享會_蔡秀吉_百川學程.pptx
+++ b/交換經驗分享會_蔡秀吉_百川學程.pptx
@@ -3159,7 +3159,7 @@
         <p:spPr>
           <a:xfrm>
             <a:off x="914400" y="2286000"/>
-            <a:ext cx="10362895" cy="1371600"/>
+            <a:ext cx="10362895" cy="1097280"/>
           </a:xfrm>
           <a:prstGeom prst="rect">
             <a:avLst/>
@@ -3173,7 +3173,7 @@
           <a:lstStyle/>
           <a:p>
             <a:pPr algn="ctr">
-              <a:defRPr sz="5400" b="1">
+              <a:defRPr sz="4800" b="1">
                 <a:solidFill>
                   <a:srgbClr val="FFFFFF"/>
                 </a:solidFill>
@@ -3193,8 +3193,8 @@
         </p:nvSpPr>
         <p:spPr>
           <a:xfrm>
-            <a:off x="914400" y="3840480"/>
-            <a:ext cx="10362895" cy="731520"/>
+            <a:off x="1371600" y="3657600"/>
+            <a:ext cx="9448495" cy="914400"/>
           </a:xfrm>
           <a:prstGeom prst="rect">
             <a:avLst/>
@@ -3202,13 +3202,13 @@
           <a:noFill/>
         </p:spPr>
         <p:txBody>
-          <a:bodyPr wrap="none">
+          <a:bodyPr wrap="square">
             <a:spAutoFit/>
           </a:bodyPr>
           <a:lstStyle/>
           <a:p>
             <a:pPr algn="ctr">
-              <a:defRPr sz="2800">
+              <a:defRPr sz="2200">
                 <a:solidFill>
                   <a:srgbClr val="3B82F6"/>
                 </a:solidFill>
@@ -3228,8 +3228,8 @@
         </p:nvSpPr>
         <p:spPr>
           <a:xfrm>
-            <a:off x="4267504" y="5029200"/>
-            <a:ext cx="3657600" cy="73152"/>
+            <a:off x="4724704" y="5029200"/>
+            <a:ext cx="2743200" cy="73152"/>
           </a:xfrm>
           <a:prstGeom prst="rect">
             <a:avLst/>
@@ -3289,8 +3289,8 @@
         </p:nvSpPr>
         <p:spPr>
           <a:xfrm>
-            <a:off x="731520" y="548640"/>
-            <a:ext cx="10728655" cy="822960"/>
+            <a:off x="914400" y="457200"/>
+            <a:ext cx="10362895" cy="640080"/>
           </a:xfrm>
           <a:prstGeom prst="rect">
             <a:avLst/>
@@ -3298,20 +3298,20 @@
           <a:noFill/>
         </p:spPr>
         <p:txBody>
-          <a:bodyPr wrap="none">
+          <a:bodyPr wrap="square">
             <a:spAutoFit/>
           </a:bodyPr>
           <a:lstStyle/>
           <a:p>
             <a:pPr algn="ctr">
-              <a:defRPr sz="3600" b="1">
+              <a:defRPr sz="3200" b="1">
                 <a:solidFill>
                   <a:srgbClr val="1E3A8A"/>
                 </a:solidFill>
               </a:defRPr>
             </a:pPr>
             <a:r>
-              <a:t>財務智慧：省錢策略與陷阱</a:t>
+              <a:t>財務智慧</a:t>
             </a:r>
           </a:p>
         </p:txBody>
@@ -3324,8 +3324,8 @@
         </p:nvSpPr>
         <p:spPr>
           <a:xfrm>
-            <a:off x="4724704" y="1371600"/>
-            <a:ext cx="2743200" cy="45720"/>
+            <a:off x="5181904" y="1097280"/>
+            <a:ext cx="1828800" cy="36576"/>
           </a:xfrm>
           <a:prstGeom prst="rect">
             <a:avLst/>
@@ -3367,8 +3367,8 @@
         </p:nvSpPr>
         <p:spPr>
           <a:xfrm>
-            <a:off x="1371600" y="2011680"/>
-            <a:ext cx="9448495" cy="4389120"/>
+            <a:off x="1371600" y="1463040"/>
+            <a:ext cx="9448495" cy="5029200"/>
           </a:xfrm>
           <a:prstGeom prst="rect">
             <a:avLst/>
@@ -3376,22 +3376,22 @@
           <a:noFill/>
         </p:spPr>
         <p:txBody>
-          <a:bodyPr wrap="square" anchor="t">
+          <a:bodyPr wrap="square">
             <a:spAutoFit/>
           </a:bodyPr>
           <a:lstStyle/>
           <a:p>
             <a:pPr>
               <a:lnSpc>
-                <a:spcPct val="140000"/>
-              </a:lnSpc>
-              <a:spcBef>
-                <a:spcPts val="0"/>
-              </a:spcBef>
-              <a:spcAft>
-                <a:spcPts val="1000"/>
-              </a:spcAft>
-              <a:defRPr sz="2200" b="1">
+                <a:spcPct val="120000"/>
+              </a:lnSpc>
+              <a:spcBef>
+                <a:spcPts val="600"/>
+              </a:spcBef>
+              <a:spcAft>
+                <a:spcPts val="600"/>
+              </a:spcAft>
+              <a:defRPr sz="1800" b="1">
                 <a:solidFill>
                   <a:srgbClr val="1E3A8A"/>
                 </a:solidFill>
@@ -3404,57 +3404,57 @@
           <a:p>
             <a:pPr>
               <a:lnSpc>
-                <a:spcPct val="140000"/>
-              </a:lnSpc>
-              <a:spcBef>
-                <a:spcPts val="1000"/>
-              </a:spcBef>
-              <a:spcAft>
-                <a:spcPts val="1000"/>
-              </a:spcAft>
-              <a:defRPr sz="2000">
-                <a:solidFill>
-                  <a:srgbClr val="0F172A"/>
-                </a:solidFill>
-              </a:defRPr>
-            </a:pPr>
-            <a:r>
-              <a:t>• 歐洲VAT高（15-19%），貴重3C在台灣買（相機、耳機、GoPro）</a:t>
-            </a:r>
-          </a:p>
-          <a:p>
-            <a:pPr>
-              <a:lnSpc>
-                <a:spcPct val="140000"/>
-              </a:lnSpc>
-              <a:spcBef>
-                <a:spcPts val="1000"/>
-              </a:spcBef>
-              <a:spcAft>
-                <a:spcPts val="1000"/>
-              </a:spcAft>
-              <a:defRPr sz="2000">
-                <a:solidFill>
-                  <a:srgbClr val="0F172A"/>
-                </a:solidFill>
-              </a:defRPr>
-            </a:pPr>
-            <a:r>
-              <a:t>• 使用AI工具時掛VPN回台灣刷卡（避免歐盟VAT）</a:t>
-            </a:r>
-          </a:p>
-          <a:p>
-            <a:pPr>
-              <a:lnSpc>
-                <a:spcPct val="140000"/>
-              </a:lnSpc>
-              <a:spcBef>
-                <a:spcPts val="1000"/>
-              </a:spcBef>
-              <a:spcAft>
-                <a:spcPts val="1000"/>
-              </a:spcAft>
-              <a:defRPr sz="2000">
+                <a:spcPct val="120000"/>
+              </a:lnSpc>
+              <a:spcBef>
+                <a:spcPts val="600"/>
+              </a:spcBef>
+              <a:spcAft>
+                <a:spcPts val="600"/>
+              </a:spcAft>
+              <a:defRPr sz="1600">
+                <a:solidFill>
+                  <a:srgbClr val="0F172A"/>
+                </a:solidFill>
+              </a:defRPr>
+            </a:pPr>
+            <a:r>
+              <a:t>• 歐洲VAT高（15-19%），貴重3C在台灣買</a:t>
+            </a:r>
+          </a:p>
+          <a:p>
+            <a:pPr>
+              <a:lnSpc>
+                <a:spcPct val="120000"/>
+              </a:lnSpc>
+              <a:spcBef>
+                <a:spcPts val="600"/>
+              </a:spcBef>
+              <a:spcAft>
+                <a:spcPts val="600"/>
+              </a:spcAft>
+              <a:defRPr sz="1600">
+                <a:solidFill>
+                  <a:srgbClr val="0F172A"/>
+                </a:solidFill>
+              </a:defRPr>
+            </a:pPr>
+            <a:r>
+              <a:t>• 使用AI工具時掛VPN回台灣刷卡（避免VAT）</a:t>
+            </a:r>
+          </a:p>
+          <a:p>
+            <a:pPr>
+              <a:lnSpc>
+                <a:spcPct val="120000"/>
+              </a:lnSpc>
+              <a:spcBef>
+                <a:spcPts val="600"/>
+              </a:spcBef>
+              <a:spcAft>
+                <a:spcPts val="600"/>
+              </a:spcAft>
+              <a:defRPr sz="1600">
                 <a:solidFill>
                   <a:srgbClr val="0F172A"/>
                 </a:solidFill>
@@ -3467,15 +3467,15 @@
           <a:p>
             <a:pPr>
               <a:lnSpc>
-                <a:spcPct val="140000"/>
-              </a:lnSpc>
-              <a:spcBef>
-                <a:spcPts val="1000"/>
-              </a:spcBef>
-              <a:spcAft>
-                <a:spcPts val="1000"/>
-              </a:spcAft>
-              <a:defRPr sz="2000">
+                <a:spcPct val="120000"/>
+              </a:lnSpc>
+              <a:spcBef>
+                <a:spcPts val="600"/>
+              </a:spcBef>
+              <a:spcAft>
+                <a:spcPts val="600"/>
+              </a:spcAft>
+              <a:defRPr sz="1600">
                 <a:solidFill>
                   <a:srgbClr val="0F172A"/>
                 </a:solidFill>
@@ -3488,15 +3488,15 @@
           <a:p>
             <a:pPr>
               <a:lnSpc>
-                <a:spcPct val="140000"/>
-              </a:lnSpc>
-              <a:spcBef>
-                <a:spcPts val="1000"/>
-              </a:spcBef>
-              <a:spcAft>
-                <a:spcPts val="1000"/>
-              </a:spcAft>
-              <a:defRPr sz="2000">
+                <a:spcPct val="120000"/>
+              </a:lnSpc>
+              <a:spcBef>
+                <a:spcPts val="600"/>
+              </a:spcBef>
+              <a:spcAft>
+                <a:spcPts val="600"/>
+              </a:spcAft>
+              <a:defRPr sz="1600">
                 <a:solidFill>
                   <a:srgbClr val="0F172A"/>
                 </a:solidFill>
@@ -3509,33 +3509,33 @@
           <a:p>
             <a:pPr>
               <a:lnSpc>
-                <a:spcPct val="140000"/>
-              </a:lnSpc>
-              <a:spcBef>
-                <a:spcPts val="1000"/>
-              </a:spcBef>
-              <a:spcAft>
-                <a:spcPts val="1000"/>
-              </a:spcAft>
-              <a:defRPr sz="2000">
-                <a:solidFill>
-                  <a:srgbClr val="0F172A"/>
-                </a:solidFill>
-              </a:defRPr>
-            </a:pPr>
-          </a:p>
-          <a:p>
-            <a:pPr>
-              <a:lnSpc>
-                <a:spcPct val="140000"/>
-              </a:lnSpc>
-              <a:spcBef>
-                <a:spcPts val="1000"/>
-              </a:spcBef>
-              <a:spcAft>
-                <a:spcPts val="1000"/>
-              </a:spcAft>
-              <a:defRPr sz="2200" b="1">
+                <a:spcPct val="120000"/>
+              </a:lnSpc>
+              <a:spcBef>
+                <a:spcPts val="600"/>
+              </a:spcBef>
+              <a:spcAft>
+                <a:spcPts val="600"/>
+              </a:spcAft>
+              <a:defRPr sz="1600">
+                <a:solidFill>
+                  <a:srgbClr val="0F172A"/>
+                </a:solidFill>
+              </a:defRPr>
+            </a:pPr>
+          </a:p>
+          <a:p>
+            <a:pPr>
+              <a:lnSpc>
+                <a:spcPct val="120000"/>
+              </a:lnSpc>
+              <a:spcBef>
+                <a:spcPts val="600"/>
+              </a:spcBef>
+              <a:spcAft>
+                <a:spcPts val="600"/>
+              </a:spcAft>
+              <a:defRPr sz="1800" b="1">
                 <a:solidFill>
                   <a:srgbClr val="1E3A8A"/>
                 </a:solidFill>
@@ -3548,15 +3548,15 @@
           <a:p>
             <a:pPr>
               <a:lnSpc>
-                <a:spcPct val="140000"/>
-              </a:lnSpc>
-              <a:spcBef>
-                <a:spcPts val="1000"/>
-              </a:spcBef>
-              <a:spcAft>
-                <a:spcPts val="1000"/>
-              </a:spcAft>
-              <a:defRPr sz="2000">
+                <a:spcPct val="120000"/>
+              </a:lnSpc>
+              <a:spcBef>
+                <a:spcPts val="600"/>
+              </a:spcBef>
+              <a:spcAft>
+                <a:spcPts val="600"/>
+              </a:spcAft>
+              <a:defRPr sz="1600">
                 <a:solidFill>
                   <a:srgbClr val="0F172A"/>
                 </a:solidFill>
@@ -3569,15 +3569,15 @@
           <a:p>
             <a:pPr>
               <a:lnSpc>
-                <a:spcPct val="140000"/>
-              </a:lnSpc>
-              <a:spcBef>
-                <a:spcPts val="1000"/>
-              </a:spcBef>
-              <a:spcAft>
-                <a:spcPts val="1000"/>
-              </a:spcAft>
-              <a:defRPr sz="2000">
+                <a:spcPct val="120000"/>
+              </a:lnSpc>
+              <a:spcBef>
+                <a:spcPts val="600"/>
+              </a:spcBef>
+              <a:spcAft>
+                <a:spcPts val="600"/>
+              </a:spcAft>
+              <a:defRPr sz="1600">
                 <a:solidFill>
                   <a:srgbClr val="0F172A"/>
                 </a:solidFill>
@@ -3590,75 +3590,54 @@
           <a:p>
             <a:pPr>
               <a:lnSpc>
-                <a:spcPct val="140000"/>
-              </a:lnSpc>
-              <a:spcBef>
-                <a:spcPts val="1000"/>
-              </a:spcBef>
-              <a:spcAft>
-                <a:spcPts val="1000"/>
-              </a:spcAft>
-              <a:defRPr sz="2000">
-                <a:solidFill>
-                  <a:srgbClr val="0F172A"/>
-                </a:solidFill>
-              </a:defRPr>
-            </a:pPr>
-            <a:r>
-              <a:t>• 護照「Republic of China」問題（建議遮China或強調Taiwan）</a:t>
-            </a:r>
-          </a:p>
-          <a:p>
-            <a:pPr>
-              <a:lnSpc>
-                <a:spcPct val="140000"/>
-              </a:lnSpc>
-              <a:spcBef>
-                <a:spcPts val="1000"/>
-              </a:spcBef>
-              <a:spcAft>
-                <a:spcPts val="1000"/>
-              </a:spcAft>
-              <a:defRPr sz="2000">
-                <a:solidFill>
-                  <a:srgbClr val="0F172A"/>
-                </a:solidFill>
-              </a:defRPr>
-            </a:pPr>
-            <a:r>
-              <a:t>• 被當中國人收保證金（辦電信時）</a:t>
-            </a:r>
-          </a:p>
-          <a:p>
-            <a:pPr>
-              <a:lnSpc>
-                <a:spcPct val="140000"/>
-              </a:lnSpc>
-              <a:spcBef>
-                <a:spcPts val="1000"/>
-              </a:spcBef>
-              <a:spcAft>
-                <a:spcPts val="1000"/>
-              </a:spcAft>
-              <a:defRPr sz="2000">
-                <a:solidFill>
-                  <a:srgbClr val="0F172A"/>
-                </a:solidFill>
-              </a:defRPr>
-            </a:pPr>
-          </a:p>
-          <a:p>
-            <a:pPr>
-              <a:lnSpc>
-                <a:spcPct val="140000"/>
-              </a:lnSpc>
-              <a:spcBef>
-                <a:spcPts val="1000"/>
-              </a:spcBef>
-              <a:spcAft>
-                <a:spcPts val="1000"/>
-              </a:spcAft>
-              <a:defRPr sz="2200" b="1">
+                <a:spcPct val="120000"/>
+              </a:lnSpc>
+              <a:spcBef>
+                <a:spcPts val="600"/>
+              </a:spcBef>
+              <a:spcAft>
+                <a:spcPts val="600"/>
+              </a:spcAft>
+              <a:defRPr sz="1600">
+                <a:solidFill>
+                  <a:srgbClr val="0F172A"/>
+                </a:solidFill>
+              </a:defRPr>
+            </a:pPr>
+            <a:r>
+              <a:t>• 護照「Republic of China」問題（建議遮China）</a:t>
+            </a:r>
+          </a:p>
+          <a:p>
+            <a:pPr>
+              <a:lnSpc>
+                <a:spcPct val="120000"/>
+              </a:lnSpc>
+              <a:spcBef>
+                <a:spcPts val="600"/>
+              </a:spcBef>
+              <a:spcAft>
+                <a:spcPts val="600"/>
+              </a:spcAft>
+              <a:defRPr sz="1600">
+                <a:solidFill>
+                  <a:srgbClr val="0F172A"/>
+                </a:solidFill>
+              </a:defRPr>
+            </a:pPr>
+          </a:p>
+          <a:p>
+            <a:pPr>
+              <a:lnSpc>
+                <a:spcPct val="120000"/>
+              </a:lnSpc>
+              <a:spcBef>
+                <a:spcPts val="600"/>
+              </a:spcBef>
+              <a:spcAft>
+                <a:spcPts val="600"/>
+              </a:spcAft>
+              <a:defRPr sz="1800" b="1">
                 <a:solidFill>
                   <a:srgbClr val="1E3A8A"/>
                 </a:solidFill>
@@ -3696,8 +3675,8 @@
         </p:nvSpPr>
         <p:spPr>
           <a:xfrm>
-            <a:off x="731520" y="548640"/>
-            <a:ext cx="10728655" cy="822960"/>
+            <a:off x="914400" y="457200"/>
+            <a:ext cx="10362895" cy="640080"/>
           </a:xfrm>
           <a:prstGeom prst="rect">
             <a:avLst/>
@@ -3705,20 +3684,20 @@
           <a:noFill/>
         </p:spPr>
         <p:txBody>
-          <a:bodyPr wrap="none">
+          <a:bodyPr wrap="square">
             <a:spAutoFit/>
           </a:bodyPr>
           <a:lstStyle/>
           <a:p>
             <a:pPr algn="ctr">
-              <a:defRPr sz="3600" b="1">
+              <a:defRPr sz="3200" b="1">
                 <a:solidFill>
                   <a:srgbClr val="1E3A8A"/>
                 </a:solidFill>
               </a:defRPr>
             </a:pPr>
             <a:r>
-              <a:t>抵達後48小時：生存檢查清單</a:t>
+              <a:t>抵達後48小時檢查清單</a:t>
             </a:r>
           </a:p>
         </p:txBody>
@@ -3731,8 +3710,8 @@
         </p:nvSpPr>
         <p:spPr>
           <a:xfrm>
-            <a:off x="4724704" y="1371600"/>
-            <a:ext cx="2743200" cy="45720"/>
+            <a:off x="5181904" y="1097280"/>
+            <a:ext cx="1828800" cy="36576"/>
           </a:xfrm>
           <a:prstGeom prst="rect">
             <a:avLst/>
@@ -3774,8 +3753,8 @@
         </p:nvSpPr>
         <p:spPr>
           <a:xfrm>
-            <a:off x="1371600" y="2011680"/>
-            <a:ext cx="9448495" cy="4389120"/>
+            <a:off x="1371600" y="1463040"/>
+            <a:ext cx="9448495" cy="5029200"/>
           </a:xfrm>
           <a:prstGeom prst="rect">
             <a:avLst/>
@@ -3783,22 +3762,22 @@
           <a:noFill/>
         </p:spPr>
         <p:txBody>
-          <a:bodyPr wrap="square" anchor="t">
+          <a:bodyPr wrap="square">
             <a:spAutoFit/>
           </a:bodyPr>
           <a:lstStyle/>
           <a:p>
             <a:pPr>
               <a:lnSpc>
-                <a:spcPct val="140000"/>
-              </a:lnSpc>
-              <a:spcBef>
-                <a:spcPts val="0"/>
-              </a:spcBef>
-              <a:spcAft>
-                <a:spcPts val="1000"/>
-              </a:spcAft>
-              <a:defRPr sz="2200" b="1">
+                <a:spcPct val="120000"/>
+              </a:lnSpc>
+              <a:spcBef>
+                <a:spcPts val="600"/>
+              </a:spcBef>
+              <a:spcAft>
+                <a:spcPts val="600"/>
+              </a:spcAft>
+              <a:defRPr sz="1800" b="1">
                 <a:solidFill>
                   <a:srgbClr val="1E3A8A"/>
                 </a:solidFill>
@@ -3811,15 +3790,15 @@
           <a:p>
             <a:pPr>
               <a:lnSpc>
-                <a:spcPct val="140000"/>
-              </a:lnSpc>
-              <a:spcBef>
-                <a:spcPts val="1000"/>
-              </a:spcBef>
-              <a:spcAft>
-                <a:spcPts val="1000"/>
-              </a:spcAft>
-              <a:defRPr sz="2000">
+                <a:spcPct val="120000"/>
+              </a:lnSpc>
+              <a:spcBef>
+                <a:spcPts val="600"/>
+              </a:spcBef>
+              <a:spcAft>
+                <a:spcPts val="600"/>
+              </a:spcAft>
+              <a:defRPr sz="1600">
                 <a:solidFill>
                   <a:srgbClr val="0F172A"/>
                 </a:solidFill>
@@ -3832,15 +3811,15 @@
           <a:p>
             <a:pPr>
               <a:lnSpc>
-                <a:spcPct val="140000"/>
-              </a:lnSpc>
-              <a:spcBef>
-                <a:spcPts val="1000"/>
-              </a:spcBef>
-              <a:spcAft>
-                <a:spcPts val="1000"/>
-              </a:spcAft>
-              <a:defRPr sz="2000">
+                <a:spcPct val="120000"/>
+              </a:lnSpc>
+              <a:spcBef>
+                <a:spcPts val="600"/>
+              </a:spcBef>
+              <a:spcAft>
+                <a:spcPts val="600"/>
+              </a:spcAft>
+              <a:defRPr sz="1600">
                 <a:solidFill>
                   <a:srgbClr val="0F172A"/>
                 </a:solidFill>
@@ -3853,15 +3832,15 @@
           <a:p>
             <a:pPr>
               <a:lnSpc>
-                <a:spcPct val="140000"/>
-              </a:lnSpc>
-              <a:spcBef>
-                <a:spcPts val="1000"/>
-              </a:spcBef>
-              <a:spcAft>
-                <a:spcPts val="1000"/>
-              </a:spcAft>
-              <a:defRPr sz="2000">
+                <a:spcPct val="120000"/>
+              </a:lnSpc>
+              <a:spcBef>
+                <a:spcPts val="600"/>
+              </a:spcBef>
+              <a:spcAft>
+                <a:spcPts val="600"/>
+              </a:spcAft>
+              <a:defRPr sz="1600">
                 <a:solidFill>
                   <a:srgbClr val="0F172A"/>
                 </a:solidFill>
@@ -3874,15 +3853,15 @@
           <a:p>
             <a:pPr>
               <a:lnSpc>
-                <a:spcPct val="140000"/>
-              </a:lnSpc>
-              <a:spcBef>
-                <a:spcPts val="1000"/>
-              </a:spcBef>
-              <a:spcAft>
-                <a:spcPts val="1000"/>
-              </a:spcAft>
-              <a:defRPr sz="2000">
+                <a:spcPct val="120000"/>
+              </a:lnSpc>
+              <a:spcBef>
+                <a:spcPts val="600"/>
+              </a:spcBef>
+              <a:spcAft>
+                <a:spcPts val="600"/>
+              </a:spcAft>
+              <a:defRPr sz="1600">
                 <a:solidFill>
                   <a:srgbClr val="0F172A"/>
                 </a:solidFill>
@@ -3895,33 +3874,33 @@
           <a:p>
             <a:pPr>
               <a:lnSpc>
-                <a:spcPct val="140000"/>
-              </a:lnSpc>
-              <a:spcBef>
-                <a:spcPts val="1000"/>
-              </a:spcBef>
-              <a:spcAft>
-                <a:spcPts val="1000"/>
-              </a:spcAft>
-              <a:defRPr sz="2000">
-                <a:solidFill>
-                  <a:srgbClr val="0F172A"/>
-                </a:solidFill>
-              </a:defRPr>
-            </a:pPr>
-          </a:p>
-          <a:p>
-            <a:pPr>
-              <a:lnSpc>
-                <a:spcPct val="140000"/>
-              </a:lnSpc>
-              <a:spcBef>
-                <a:spcPts val="1000"/>
-              </a:spcBef>
-              <a:spcAft>
-                <a:spcPts val="1000"/>
-              </a:spcAft>
-              <a:defRPr sz="2200" b="1">
+                <a:spcPct val="120000"/>
+              </a:lnSpc>
+              <a:spcBef>
+                <a:spcPts val="600"/>
+              </a:spcBef>
+              <a:spcAft>
+                <a:spcPts val="600"/>
+              </a:spcAft>
+              <a:defRPr sz="1600">
+                <a:solidFill>
+                  <a:srgbClr val="0F172A"/>
+                </a:solidFill>
+              </a:defRPr>
+            </a:pPr>
+          </a:p>
+          <a:p>
+            <a:pPr>
+              <a:lnSpc>
+                <a:spcPct val="120000"/>
+              </a:lnSpc>
+              <a:spcBef>
+                <a:spcPts val="600"/>
+              </a:spcBef>
+              <a:spcAft>
+                <a:spcPts val="600"/>
+              </a:spcAft>
+              <a:defRPr sz="1800" b="1">
                 <a:solidFill>
                   <a:srgbClr val="1E3A8A"/>
                 </a:solidFill>
@@ -3934,15 +3913,15 @@
           <a:p>
             <a:pPr>
               <a:lnSpc>
-                <a:spcPct val="140000"/>
-              </a:lnSpc>
-              <a:spcBef>
-                <a:spcPts val="1000"/>
-              </a:spcBef>
-              <a:spcAft>
-                <a:spcPts val="1000"/>
-              </a:spcAft>
-              <a:defRPr sz="2000">
+                <a:spcPct val="120000"/>
+              </a:lnSpc>
+              <a:spcBef>
+                <a:spcPts val="600"/>
+              </a:spcBef>
+              <a:spcAft>
+                <a:spcPts val="600"/>
+              </a:spcAft>
+              <a:defRPr sz="1600">
                 <a:solidFill>
                   <a:srgbClr val="0F172A"/>
                 </a:solidFill>
@@ -3955,15 +3934,15 @@
           <a:p>
             <a:pPr>
               <a:lnSpc>
-                <a:spcPct val="140000"/>
-              </a:lnSpc>
-              <a:spcBef>
-                <a:spcPts val="1000"/>
-              </a:spcBef>
-              <a:spcAft>
-                <a:spcPts val="1000"/>
-              </a:spcAft>
-              <a:defRPr sz="2000">
+                <a:spcPct val="120000"/>
+              </a:lnSpc>
+              <a:spcBef>
+                <a:spcPts val="600"/>
+              </a:spcBef>
+              <a:spcAft>
+                <a:spcPts val="600"/>
+              </a:spcAft>
+              <a:defRPr sz="1600">
                 <a:solidFill>
                   <a:srgbClr val="0F172A"/>
                 </a:solidFill>
@@ -3976,15 +3955,15 @@
           <a:p>
             <a:pPr>
               <a:lnSpc>
-                <a:spcPct val="140000"/>
-              </a:lnSpc>
-              <a:spcBef>
-                <a:spcPts val="1000"/>
-              </a:spcBef>
-              <a:spcAft>
-                <a:spcPts val="1000"/>
-              </a:spcAft>
-              <a:defRPr sz="2000">
+                <a:spcPct val="120000"/>
+              </a:lnSpc>
+              <a:spcBef>
+                <a:spcPts val="600"/>
+              </a:spcBef>
+              <a:spcAft>
+                <a:spcPts val="600"/>
+              </a:spcAft>
+              <a:defRPr sz="1600">
                 <a:solidFill>
                   <a:srgbClr val="0F172A"/>
                 </a:solidFill>
@@ -3997,36 +3976,36 @@
           <a:p>
             <a:pPr>
               <a:lnSpc>
-                <a:spcPct val="140000"/>
-              </a:lnSpc>
-              <a:spcBef>
-                <a:spcPts val="1000"/>
-              </a:spcBef>
-              <a:spcAft>
-                <a:spcPts val="1000"/>
-              </a:spcAft>
-              <a:defRPr sz="2000">
-                <a:solidFill>
-                  <a:srgbClr val="0F172A"/>
-                </a:solidFill>
-              </a:defRPr>
-            </a:pPr>
-            <a:r>
-              <a:t>• 確認教室位置（提前踩點！門牌難找）</a:t>
-            </a:r>
-          </a:p>
-          <a:p>
-            <a:pPr>
-              <a:lnSpc>
-                <a:spcPct val="140000"/>
-              </a:lnSpc>
-              <a:spcBef>
-                <a:spcPts val="1000"/>
-              </a:spcBef>
-              <a:spcAft>
-                <a:spcPts val="1000"/>
-              </a:spcAft>
-              <a:defRPr sz="2000">
+                <a:spcPct val="120000"/>
+              </a:lnSpc>
+              <a:spcBef>
+                <a:spcPts val="600"/>
+              </a:spcBef>
+              <a:spcAft>
+                <a:spcPts val="600"/>
+              </a:spcAft>
+              <a:defRPr sz="1600">
+                <a:solidFill>
+                  <a:srgbClr val="0F172A"/>
+                </a:solidFill>
+              </a:defRPr>
+            </a:pPr>
+            <a:r>
+              <a:t>• 確認教室位置（提前踩點，門牌難找）</a:t>
+            </a:r>
+          </a:p>
+          <a:p>
+            <a:pPr>
+              <a:lnSpc>
+                <a:spcPct val="120000"/>
+              </a:lnSpc>
+              <a:spcBef>
+                <a:spcPts val="600"/>
+              </a:spcBef>
+              <a:spcAft>
+                <a:spcPts val="600"/>
+              </a:spcAft>
+              <a:defRPr sz="1600">
                 <a:solidFill>
                   <a:srgbClr val="0F172A"/>
                 </a:solidFill>
@@ -4039,61 +4018,40 @@
           <a:p>
             <a:pPr>
               <a:lnSpc>
-                <a:spcPct val="140000"/>
-              </a:lnSpc>
-              <a:spcBef>
-                <a:spcPts val="1000"/>
-              </a:spcBef>
-              <a:spcAft>
-                <a:spcPts val="1000"/>
-              </a:spcAft>
-              <a:defRPr sz="2000">
-                <a:solidFill>
-                  <a:srgbClr val="0F172A"/>
-                </a:solidFill>
-              </a:defRPr>
-            </a:pPr>
-          </a:p>
-          <a:p>
-            <a:pPr>
-              <a:lnSpc>
-                <a:spcPct val="140000"/>
-              </a:lnSpc>
-              <a:spcBef>
-                <a:spcPts val="1000"/>
-              </a:spcBef>
-              <a:spcAft>
-                <a:spcPts val="1000"/>
-              </a:spcAft>
-              <a:defRPr sz="2200" b="1">
+                <a:spcPct val="120000"/>
+              </a:lnSpc>
+              <a:spcBef>
+                <a:spcPts val="600"/>
+              </a:spcBef>
+              <a:spcAft>
+                <a:spcPts val="600"/>
+              </a:spcAft>
+              <a:defRPr sz="1600">
+                <a:solidFill>
+                  <a:srgbClr val="0F172A"/>
+                </a:solidFill>
+              </a:defRPr>
+            </a:pPr>
+          </a:p>
+          <a:p>
+            <a:pPr>
+              <a:lnSpc>
+                <a:spcPct val="120000"/>
+              </a:lnSpc>
+              <a:spcBef>
+                <a:spcPts val="600"/>
+              </a:spcBef>
+              <a:spcAft>
+                <a:spcPts val="600"/>
+              </a:spcAft>
+              <a:defRPr sz="1800" b="1">
                 <a:solidFill>
                   <a:srgbClr val="1E3A8A"/>
                 </a:solidFill>
               </a:defRPr>
             </a:pPr>
             <a:r>
-              <a:t>【重要提醒】歐洲行政效率慢，辦事可能需3個工作日</a:t>
-            </a:r>
-          </a:p>
-          <a:p>
-            <a:pPr>
-              <a:lnSpc>
-                <a:spcPct val="140000"/>
-              </a:lnSpc>
-              <a:spcBef>
-                <a:spcPts val="1000"/>
-              </a:spcBef>
-              <a:spcAft>
-                <a:spcPts val="1000"/>
-              </a:spcAft>
-              <a:defRPr sz="2000">
-                <a:solidFill>
-                  <a:srgbClr val="0F172A"/>
-                </a:solidFill>
-              </a:defRPr>
-            </a:pPr>
-            <a:r>
-              <a:t>            建議在「銀行週」前抵達，一次辦完所有行政事務</a:t>
+              <a:t>【提醒】歐洲行政效率慢，建議在「銀行週」前抵達</a:t>
             </a:r>
           </a:p>
         </p:txBody>
@@ -4168,7 +4126,7 @@
         <p:spPr>
           <a:xfrm>
             <a:off x="914400" y="2743200"/>
-            <a:ext cx="10362895" cy="1371600"/>
+            <a:ext cx="10362895" cy="1097280"/>
           </a:xfrm>
           <a:prstGeom prst="rect">
             <a:avLst/>
@@ -4176,13 +4134,13 @@
           <a:noFill/>
         </p:spPr>
         <p:txBody>
-          <a:bodyPr wrap="none" anchor="ctr">
+          <a:bodyPr wrap="square">
             <a:spAutoFit/>
           </a:bodyPr>
           <a:lstStyle/>
           <a:p>
             <a:pPr algn="ctr">
-              <a:defRPr sz="4400" b="1">
+              <a:defRPr sz="3800" b="1">
                 <a:solidFill>
                   <a:srgbClr val="FFFFFF"/>
                 </a:solidFill>
@@ -4202,7 +4160,7 @@
         </p:nvSpPr>
         <p:spPr>
           <a:xfrm>
-            <a:off x="914400" y="4114800"/>
+            <a:off x="914400" y="3931920"/>
             <a:ext cx="10362895" cy="548640"/>
           </a:xfrm>
           <a:prstGeom prst="rect">
@@ -4217,7 +4175,7 @@
           <a:lstStyle/>
           <a:p>
             <a:pPr algn="ctr">
-              <a:defRPr sz="2000">
+              <a:defRPr sz="1800">
                 <a:solidFill>
                   <a:srgbClr val="3B82F6"/>
                 </a:solidFill>
@@ -4255,8 +4213,8 @@
         </p:nvSpPr>
         <p:spPr>
           <a:xfrm>
-            <a:off x="731520" y="457200"/>
-            <a:ext cx="10728655" cy="731520"/>
+            <a:off x="914400" y="365760"/>
+            <a:ext cx="10362895" cy="548640"/>
           </a:xfrm>
           <a:prstGeom prst="rect">
             <a:avLst/>
@@ -4264,13 +4222,13 @@
           <a:noFill/>
         </p:spPr>
         <p:txBody>
-          <a:bodyPr wrap="none">
+          <a:bodyPr wrap="square">
             <a:spAutoFit/>
           </a:bodyPr>
           <a:lstStyle/>
           <a:p>
             <a:pPr algn="ctr">
-              <a:defRPr sz="3200" b="1">
+              <a:defRPr sz="2800" b="1">
                 <a:solidFill>
                   <a:srgbClr val="1E3A8A"/>
                 </a:solidFill>
@@ -4290,8 +4248,8 @@
         </p:nvSpPr>
         <p:spPr>
           <a:xfrm>
-            <a:off x="6096304" y="1371600"/>
-            <a:ext cx="27432" cy="5029200"/>
+            <a:off x="6096304" y="1188720"/>
+            <a:ext cx="18288" cy="5303520"/>
           </a:xfrm>
           <a:prstGeom prst="rect">
             <a:avLst/>
@@ -4333,8 +4291,8 @@
         </p:nvSpPr>
         <p:spPr>
           <a:xfrm>
-            <a:off x="731520" y="1371600"/>
-            <a:ext cx="5029200" cy="457200"/>
+            <a:off x="914400" y="1097280"/>
+            <a:ext cx="4846320" cy="365760"/>
           </a:xfrm>
           <a:prstGeom prst="rect">
             <a:avLst/>
@@ -4348,14 +4306,14 @@
           <a:lstStyle/>
           <a:p>
             <a:pPr algn="ctr">
-              <a:defRPr sz="2400" b="1">
+              <a:defRPr sz="2000" b="1">
                 <a:solidFill>
                   <a:srgbClr val="3B82F6"/>
                 </a:solidFill>
               </a:defRPr>
             </a:pPr>
             <a:r>
-              <a:t>優勢面向</a:t>
+              <a:t>優勢</a:t>
             </a:r>
           </a:p>
         </p:txBody>
@@ -4368,8 +4326,8 @@
         </p:nvSpPr>
         <p:spPr>
           <a:xfrm>
-            <a:off x="731520" y="2011680"/>
-            <a:ext cx="5029200" cy="4572000"/>
+            <a:off x="914400" y="1554480"/>
+            <a:ext cx="4846320" cy="4937760"/>
           </a:xfrm>
           <a:prstGeom prst="rect">
             <a:avLst/>
@@ -4384,48 +4342,57 @@
           <a:p>
             <a:pPr>
               <a:lnSpc>
-                <a:spcPct val="130000"/>
-              </a:lnSpc>
-              <a:spcBef>
-                <a:spcPts val="800"/>
-              </a:spcBef>
-              <a:defRPr sz="2000" b="1">
+                <a:spcPct val="120000"/>
+              </a:lnSpc>
+              <a:spcBef>
+                <a:spcPts val="400"/>
+              </a:spcBef>
+              <a:spcAft>
+                <a:spcPts val="400"/>
+              </a:spcAft>
+              <a:defRPr sz="1600" b="1">
                 <a:solidFill>
                   <a:srgbClr val="1E3A8A"/>
                 </a:solidFill>
               </a:defRPr>
             </a:pPr>
             <a:r>
-              <a:t>【正面文化差異】</a:t>
-            </a:r>
-          </a:p>
-          <a:p>
-            <a:pPr>
-              <a:lnSpc>
-                <a:spcPct val="130000"/>
-              </a:lnSpc>
-              <a:spcBef>
-                <a:spcPts val="800"/>
-              </a:spcBef>
-              <a:defRPr sz="1800">
-                <a:solidFill>
-                  <a:srgbClr val="0F172A"/>
-                </a:solidFill>
-              </a:defRPr>
-            </a:pPr>
-            <a:r>
-              <a:t>• 學生支援完善（國際學生社團）</a:t>
-            </a:r>
-          </a:p>
-          <a:p>
-            <a:pPr>
-              <a:lnSpc>
-                <a:spcPct val="130000"/>
-              </a:lnSpc>
-              <a:spcBef>
-                <a:spcPts val="800"/>
-              </a:spcBef>
-              <a:defRPr sz="1800">
+              <a:t>【正面差異】</a:t>
+            </a:r>
+          </a:p>
+          <a:p>
+            <a:pPr>
+              <a:lnSpc>
+                <a:spcPct val="120000"/>
+              </a:lnSpc>
+              <a:spcBef>
+                <a:spcPts val="400"/>
+              </a:spcBef>
+              <a:spcAft>
+                <a:spcPts val="400"/>
+              </a:spcAft>
+              <a:defRPr sz="1500">
+                <a:solidFill>
+                  <a:srgbClr val="0F172A"/>
+                </a:solidFill>
+              </a:defRPr>
+            </a:pPr>
+            <a:r>
+              <a:t>• 學生支援完善</a:t>
+            </a:r>
+          </a:p>
+          <a:p>
+            <a:pPr>
+              <a:lnSpc>
+                <a:spcPct val="120000"/>
+              </a:lnSpc>
+              <a:spcBef>
+                <a:spcPts val="400"/>
+              </a:spcBef>
+              <a:spcAft>
+                <a:spcPts val="400"/>
+              </a:spcAft>
+              <a:defRPr sz="1500">
                 <a:solidFill>
                   <a:srgbClr val="0F172A"/>
                 </a:solidFill>
@@ -4438,12 +4405,15 @@
           <a:p>
             <a:pPr>
               <a:lnSpc>
-                <a:spcPct val="130000"/>
-              </a:lnSpc>
-              <a:spcBef>
-                <a:spcPts val="800"/>
-              </a:spcBef>
-              <a:defRPr sz="1800">
+                <a:spcPct val="120000"/>
+              </a:lnSpc>
+              <a:spcBef>
+                <a:spcPts val="400"/>
+              </a:spcBef>
+              <a:spcAft>
+                <a:spcPts val="400"/>
+              </a:spcAft>
+              <a:defRPr sz="1500">
                 <a:solidFill>
                   <a:srgbClr val="0F172A"/>
                 </a:solidFill>
@@ -4456,12 +4426,15 @@
           <a:p>
             <a:pPr>
               <a:lnSpc>
-                <a:spcPct val="130000"/>
-              </a:lnSpc>
-              <a:spcBef>
-                <a:spcPts val="800"/>
-              </a:spcBef>
-              <a:defRPr sz="1800">
+                <a:spcPct val="120000"/>
+              </a:lnSpc>
+              <a:spcBef>
+                <a:spcPts val="400"/>
+              </a:spcBef>
+              <a:spcAft>
+                <a:spcPts val="400"/>
+              </a:spcAft>
+              <a:defRPr sz="1500">
                 <a:solidFill>
                   <a:srgbClr val="0F172A"/>
                 </a:solidFill>
@@ -4474,45 +4447,33 @@
           <a:p>
             <a:pPr>
               <a:lnSpc>
-                <a:spcPct val="130000"/>
-              </a:lnSpc>
-              <a:spcBef>
-                <a:spcPts val="800"/>
-              </a:spcBef>
-              <a:defRPr sz="1800">
-                <a:solidFill>
-                  <a:srgbClr val="0F172A"/>
-                </a:solidFill>
-              </a:defRPr>
-            </a:pPr>
-            <a:r>
-              <a:t>• 法律/宗教/藝術治療諮商</a:t>
-            </a:r>
-          </a:p>
-          <a:p>
-            <a:pPr>
-              <a:lnSpc>
-                <a:spcPct val="130000"/>
-              </a:lnSpc>
-              <a:spcBef>
-                <a:spcPts val="800"/>
-              </a:spcBef>
-              <a:defRPr sz="1800">
-                <a:solidFill>
-                  <a:srgbClr val="0F172A"/>
-                </a:solidFill>
-              </a:defRPr>
-            </a:pPr>
-          </a:p>
-          <a:p>
-            <a:pPr>
-              <a:lnSpc>
-                <a:spcPct val="130000"/>
-              </a:lnSpc>
-              <a:spcBef>
-                <a:spcPts val="800"/>
-              </a:spcBef>
-              <a:defRPr sz="2000" b="1">
+                <a:spcPct val="120000"/>
+              </a:lnSpc>
+              <a:spcBef>
+                <a:spcPts val="400"/>
+              </a:spcBef>
+              <a:spcAft>
+                <a:spcPts val="400"/>
+              </a:spcAft>
+              <a:defRPr sz="1500">
+                <a:solidFill>
+                  <a:srgbClr val="0F172A"/>
+                </a:solidFill>
+              </a:defRPr>
+            </a:pPr>
+          </a:p>
+          <a:p>
+            <a:pPr>
+              <a:lnSpc>
+                <a:spcPct val="120000"/>
+              </a:lnSpc>
+              <a:spcBef>
+                <a:spcPts val="400"/>
+              </a:spcBef>
+              <a:spcAft>
+                <a:spcPts val="400"/>
+              </a:spcAft>
+              <a:defRPr sz="1600" b="1">
                 <a:solidFill>
                   <a:srgbClr val="1E3A8A"/>
                 </a:solidFill>
@@ -4525,30 +4486,36 @@
           <a:p>
             <a:pPr>
               <a:lnSpc>
-                <a:spcPct val="130000"/>
-              </a:lnSpc>
-              <a:spcBef>
-                <a:spcPts val="800"/>
-              </a:spcBef>
-              <a:defRPr sz="1800">
-                <a:solidFill>
-                  <a:srgbClr val="0F172A"/>
-                </a:solidFill>
-              </a:defRPr>
-            </a:pPr>
-            <a:r>
-              <a:t>• 老師「放牛吃草」（需自立自強）</a:t>
-            </a:r>
-          </a:p>
-          <a:p>
-            <a:pPr>
-              <a:lnSpc>
-                <a:spcPct val="130000"/>
-              </a:lnSpc>
-              <a:spcBef>
-                <a:spcPts val="800"/>
-              </a:spcBef>
-              <a:defRPr sz="1800">
+                <a:spcPct val="120000"/>
+              </a:lnSpc>
+              <a:spcBef>
+                <a:spcPts val="400"/>
+              </a:spcBef>
+              <a:spcAft>
+                <a:spcPts val="400"/>
+              </a:spcAft>
+              <a:defRPr sz="1500">
+                <a:solidFill>
+                  <a:srgbClr val="0F172A"/>
+                </a:solidFill>
+              </a:defRPr>
+            </a:pPr>
+            <a:r>
+              <a:t>• 老師「放牛吃草」</a:t>
+            </a:r>
+          </a:p>
+          <a:p>
+            <a:pPr>
+              <a:lnSpc>
+                <a:spcPct val="120000"/>
+              </a:lnSpc>
+              <a:spcBef>
+                <a:spcPts val="400"/>
+              </a:spcBef>
+              <a:spcAft>
+                <a:spcPts val="400"/>
+              </a:spcAft>
+              <a:defRPr sz="1500">
                 <a:solidFill>
                   <a:srgbClr val="0F172A"/>
                 </a:solidFill>
@@ -4561,12 +4528,15 @@
           <a:p>
             <a:pPr>
               <a:lnSpc>
-                <a:spcPct val="130000"/>
-              </a:lnSpc>
-              <a:spcBef>
-                <a:spcPts val="800"/>
-              </a:spcBef>
-              <a:defRPr sz="1800">
+                <a:spcPct val="120000"/>
+              </a:lnSpc>
+              <a:spcBef>
+                <a:spcPts val="400"/>
+              </a:spcBef>
+              <a:spcAft>
+                <a:spcPts val="400"/>
+              </a:spcAft>
+              <a:defRPr sz="1500">
                 <a:solidFill>
                   <a:srgbClr val="0F172A"/>
                 </a:solidFill>
@@ -4579,12 +4549,15 @@
           <a:p>
             <a:pPr>
               <a:lnSpc>
-                <a:spcPct val="130000"/>
-              </a:lnSpc>
-              <a:spcBef>
-                <a:spcPts val="800"/>
-              </a:spcBef>
-              <a:defRPr sz="1800">
+                <a:spcPct val="120000"/>
+              </a:lnSpc>
+              <a:spcBef>
+                <a:spcPts val="400"/>
+              </a:spcBef>
+              <a:spcAft>
+                <a:spcPts val="400"/>
+              </a:spcAft>
+              <a:defRPr sz="1500">
                 <a:solidFill>
                   <a:srgbClr val="0F172A"/>
                 </a:solidFill>
@@ -4604,8 +4577,8 @@
         </p:nvSpPr>
         <p:spPr>
           <a:xfrm>
-            <a:off x="6430975" y="1371600"/>
-            <a:ext cx="5029200" cy="457200"/>
+            <a:off x="6430975" y="1097280"/>
+            <a:ext cx="4846320" cy="365760"/>
           </a:xfrm>
           <a:prstGeom prst="rect">
             <a:avLst/>
@@ -4619,14 +4592,14 @@
           <a:lstStyle/>
           <a:p>
             <a:pPr algn="ctr">
-              <a:defRPr sz="2400" b="1">
+              <a:defRPr sz="2000" b="1">
                 <a:solidFill>
                   <a:srgbClr val="EF4444"/>
                 </a:solidFill>
               </a:defRPr>
             </a:pPr>
             <a:r>
-              <a:t>挑戰面向</a:t>
+              <a:t>挑戰</a:t>
             </a:r>
           </a:p>
         </p:txBody>
@@ -4639,8 +4612,8 @@
         </p:nvSpPr>
         <p:spPr>
           <a:xfrm>
-            <a:off x="6430975" y="2011680"/>
-            <a:ext cx="5029200" cy="4572000"/>
+            <a:off x="6430975" y="1554480"/>
+            <a:ext cx="4846320" cy="4937760"/>
           </a:xfrm>
           <a:prstGeom prst="rect">
             <a:avLst/>
@@ -4655,30 +4628,36 @@
           <a:p>
             <a:pPr>
               <a:lnSpc>
-                <a:spcPct val="130000"/>
-              </a:lnSpc>
-              <a:spcBef>
-                <a:spcPts val="800"/>
-              </a:spcBef>
-              <a:defRPr sz="2000" b="1">
+                <a:spcPct val="120000"/>
+              </a:lnSpc>
+              <a:spcBef>
+                <a:spcPts val="400"/>
+              </a:spcBef>
+              <a:spcAft>
+                <a:spcPts val="400"/>
+              </a:spcAft>
+              <a:defRPr sz="1600" b="1">
                 <a:solidFill>
                   <a:srgbClr val="1E3A8A"/>
                 </a:solidFill>
               </a:defRPr>
             </a:pPr>
             <a:r>
-              <a:t>【可能遇到的挑戰】</a:t>
-            </a:r>
-          </a:p>
-          <a:p>
-            <a:pPr>
-              <a:lnSpc>
-                <a:spcPct val="130000"/>
-              </a:lnSpc>
-              <a:spcBef>
-                <a:spcPts val="800"/>
-              </a:spcBef>
-              <a:defRPr sz="1800">
+              <a:t>【可能挑戰】</a:t>
+            </a:r>
+          </a:p>
+          <a:p>
+            <a:pPr>
+              <a:lnSpc>
+                <a:spcPct val="120000"/>
+              </a:lnSpc>
+              <a:spcBef>
+                <a:spcPts val="400"/>
+              </a:spcBef>
+              <a:spcAft>
+                <a:spcPts val="400"/>
+              </a:spcAft>
+              <a:defRPr sz="1500">
                 <a:solidFill>
                   <a:srgbClr val="0F172A"/>
                 </a:solidFill>
@@ -4691,12 +4670,15 @@
           <a:p>
             <a:pPr>
               <a:lnSpc>
-                <a:spcPct val="130000"/>
-              </a:lnSpc>
-              <a:spcBef>
-                <a:spcPts val="800"/>
-              </a:spcBef>
-              <a:defRPr sz="1800">
+                <a:spcPct val="120000"/>
+              </a:lnSpc>
+              <a:spcBef>
+                <a:spcPts val="400"/>
+              </a:spcBef>
+              <a:spcAft>
+                <a:spcPts val="400"/>
+              </a:spcAft>
+              <a:defRPr sz="1500">
                 <a:solidFill>
                   <a:srgbClr val="0F172A"/>
                 </a:solidFill>
@@ -4709,30 +4691,36 @@
           <a:p>
             <a:pPr>
               <a:lnSpc>
-                <a:spcPct val="130000"/>
-              </a:lnSpc>
-              <a:spcBef>
-                <a:spcPts val="800"/>
-              </a:spcBef>
-              <a:defRPr sz="1800">
-                <a:solidFill>
-                  <a:srgbClr val="0F172A"/>
-                </a:solidFill>
-              </a:defRPr>
-            </a:pPr>
-            <a:r>
-              <a:t>• 語言障礙（即使在英語國家）</a:t>
-            </a:r>
-          </a:p>
-          <a:p>
-            <a:pPr>
-              <a:lnSpc>
-                <a:spcPct val="130000"/>
-              </a:lnSpc>
-              <a:spcBef>
-                <a:spcPts val="800"/>
-              </a:spcBef>
-              <a:defRPr sz="1800">
+                <a:spcPct val="120000"/>
+              </a:lnSpc>
+              <a:spcBef>
+                <a:spcPts val="400"/>
+              </a:spcBef>
+              <a:spcAft>
+                <a:spcPts val="400"/>
+              </a:spcAft>
+              <a:defRPr sz="1500">
+                <a:solidFill>
+                  <a:srgbClr val="0F172A"/>
+                </a:solidFill>
+              </a:defRPr>
+            </a:pPr>
+            <a:r>
+              <a:t>• 語言障礙</a:t>
+            </a:r>
+          </a:p>
+          <a:p>
+            <a:pPr>
+              <a:lnSpc>
+                <a:spcPct val="120000"/>
+              </a:lnSpc>
+              <a:spcBef>
+                <a:spcPts val="400"/>
+              </a:spcBef>
+              <a:spcAft>
+                <a:spcPts val="400"/>
+              </a:spcAft>
+              <a:defRPr sz="1500">
                 <a:solidFill>
                   <a:srgbClr val="0F172A"/>
                 </a:solidFill>
@@ -4745,63 +4733,33 @@
           <a:p>
             <a:pPr>
               <a:lnSpc>
-                <a:spcPct val="130000"/>
-              </a:lnSpc>
-              <a:spcBef>
-                <a:spcPts val="800"/>
-              </a:spcBef>
-              <a:defRPr sz="1800">
-                <a:solidFill>
-                  <a:srgbClr val="0F172A"/>
-                </a:solidFill>
-              </a:defRPr>
-            </a:pPr>
-            <a:r>
-              <a:t>• 宿舍條件差（跳蚤、設備壞）</a:t>
-            </a:r>
-          </a:p>
-          <a:p>
-            <a:pPr>
-              <a:lnSpc>
-                <a:spcPct val="130000"/>
-              </a:lnSpc>
-              <a:spcBef>
-                <a:spcPts val="800"/>
-              </a:spcBef>
-              <a:defRPr sz="1800">
-                <a:solidFill>
-                  <a:srgbClr val="0F172A"/>
-                </a:solidFill>
-              </a:defRPr>
-            </a:pPr>
-            <a:r>
-              <a:t>• 校園、街上普遍抽菸</a:t>
-            </a:r>
-          </a:p>
-          <a:p>
-            <a:pPr>
-              <a:lnSpc>
-                <a:spcPct val="130000"/>
-              </a:lnSpc>
-              <a:spcBef>
-                <a:spcPts val="800"/>
-              </a:spcBef>
-              <a:defRPr sz="1800">
-                <a:solidFill>
-                  <a:srgbClr val="0F172A"/>
-                </a:solidFill>
-              </a:defRPr>
-            </a:pPr>
-          </a:p>
-          <a:p>
-            <a:pPr>
-              <a:lnSpc>
-                <a:spcPct val="130000"/>
-              </a:lnSpc>
-              <a:spcBef>
-                <a:spcPts val="800"/>
-              </a:spcBef>
-              <a:defRPr sz="2000" b="1">
+                <a:spcPct val="120000"/>
+              </a:lnSpc>
+              <a:spcBef>
+                <a:spcPts val="400"/>
+              </a:spcBef>
+              <a:spcAft>
+                <a:spcPts val="400"/>
+              </a:spcAft>
+              <a:defRPr sz="1500">
+                <a:solidFill>
+                  <a:srgbClr val="0F172A"/>
+                </a:solidFill>
+              </a:defRPr>
+            </a:pPr>
+          </a:p>
+          <a:p>
+            <a:pPr>
+              <a:lnSpc>
+                <a:spcPct val="120000"/>
+              </a:lnSpc>
+              <a:spcBef>
+                <a:spcPts val="400"/>
+              </a:spcBef>
+              <a:spcAft>
+                <a:spcPts val="400"/>
+              </a:spcAft>
+              <a:defRPr sz="1600" b="1">
                 <a:solidFill>
                   <a:srgbClr val="1E3A8A"/>
                 </a:solidFill>
@@ -4814,12 +4772,15 @@
           <a:p>
             <a:pPr>
               <a:lnSpc>
-                <a:spcPct val="130000"/>
-              </a:lnSpc>
-              <a:spcBef>
-                <a:spcPts val="800"/>
-              </a:spcBef>
-              <a:defRPr sz="1800">
+                <a:spcPct val="120000"/>
+              </a:lnSpc>
+              <a:spcBef>
+                <a:spcPts val="400"/>
+              </a:spcBef>
+              <a:spcAft>
+                <a:spcPts val="400"/>
+              </a:spcAft>
+              <a:defRPr sz="1500">
                 <a:solidFill>
                   <a:srgbClr val="0F172A"/>
                 </a:solidFill>
@@ -4832,30 +4793,36 @@
           <a:p>
             <a:pPr>
               <a:lnSpc>
-                <a:spcPct val="130000"/>
-              </a:lnSpc>
-              <a:spcBef>
-                <a:spcPts val="800"/>
-              </a:spcBef>
-              <a:defRPr sz="1800">
-                <a:solidFill>
-                  <a:srgbClr val="0F172A"/>
-                </a:solidFill>
-              </a:defRPr>
-            </a:pPr>
-            <a:r>
-              <a:t>• 保持禮貌，讓對方產生虧欠感</a:t>
-            </a:r>
-          </a:p>
-          <a:p>
-            <a:pPr>
-              <a:lnSpc>
-                <a:spcPct val="130000"/>
-              </a:lnSpc>
-              <a:spcBef>
-                <a:spcPts val="800"/>
-              </a:spcBef>
-              <a:defRPr sz="1800">
+                <a:spcPct val="120000"/>
+              </a:lnSpc>
+              <a:spcBef>
+                <a:spcPts val="400"/>
+              </a:spcBef>
+              <a:spcAft>
+                <a:spcPts val="400"/>
+              </a:spcAft>
+              <a:defRPr sz="1500">
+                <a:solidFill>
+                  <a:srgbClr val="0F172A"/>
+                </a:solidFill>
+              </a:defRPr>
+            </a:pPr>
+            <a:r>
+              <a:t>• 保持禮貌</a:t>
+            </a:r>
+          </a:p>
+          <a:p>
+            <a:pPr>
+              <a:lnSpc>
+                <a:spcPct val="120000"/>
+              </a:lnSpc>
+              <a:spcBef>
+                <a:spcPts val="400"/>
+              </a:spcBef>
+              <a:spcAft>
+                <a:spcPts val="400"/>
+              </a:spcAft>
+              <a:defRPr sz="1500">
                 <a:solidFill>
                   <a:srgbClr val="0F172A"/>
                 </a:solidFill>
@@ -4868,19 +4835,22 @@
           <a:p>
             <a:pPr>
               <a:lnSpc>
-                <a:spcPct val="130000"/>
-              </a:lnSpc>
-              <a:spcBef>
-                <a:spcPts val="800"/>
-              </a:spcBef>
-              <a:defRPr sz="1800">
-                <a:solidFill>
-                  <a:srgbClr val="0F172A"/>
-                </a:solidFill>
-              </a:defRPr>
-            </a:pPr>
-            <a:r>
-              <a:t>• 服用退黑激素調節（需懂生理學）</a:t>
+                <a:spcPct val="120000"/>
+              </a:lnSpc>
+              <a:spcBef>
+                <a:spcPts val="400"/>
+              </a:spcBef>
+              <a:spcAft>
+                <a:spcPts val="400"/>
+              </a:spcAft>
+              <a:defRPr sz="1500">
+                <a:solidFill>
+                  <a:srgbClr val="0F172A"/>
+                </a:solidFill>
+              </a:defRPr>
+            </a:pPr>
+            <a:r>
+              <a:t>• 服用退黑激素調節</a:t>
             </a:r>
           </a:p>
         </p:txBody>
@@ -4911,8 +4881,8 @@
         </p:nvSpPr>
         <p:spPr>
           <a:xfrm>
-            <a:off x="731520" y="548640"/>
-            <a:ext cx="10728655" cy="822960"/>
+            <a:off x="914400" y="457200"/>
+            <a:ext cx="10362895" cy="640080"/>
           </a:xfrm>
           <a:prstGeom prst="rect">
             <a:avLst/>
@@ -4920,13 +4890,13 @@
           <a:noFill/>
         </p:spPr>
         <p:txBody>
-          <a:bodyPr wrap="none">
+          <a:bodyPr wrap="square">
             <a:spAutoFit/>
           </a:bodyPr>
           <a:lstStyle/>
           <a:p>
             <a:pPr algn="ctr">
-              <a:defRPr sz="3600" b="1">
+              <a:defRPr sz="3200" b="1">
                 <a:solidFill>
                   <a:srgbClr val="1E3A8A"/>
                 </a:solidFill>
@@ -4946,8 +4916,8 @@
         </p:nvSpPr>
         <p:spPr>
           <a:xfrm>
-            <a:off x="4724704" y="1371600"/>
-            <a:ext cx="2743200" cy="45720"/>
+            <a:off x="5181904" y="1097280"/>
+            <a:ext cx="1828800" cy="36576"/>
           </a:xfrm>
           <a:prstGeom prst="rect">
             <a:avLst/>
@@ -4989,8 +4959,8 @@
         </p:nvSpPr>
         <p:spPr>
           <a:xfrm>
-            <a:off x="1371600" y="2011680"/>
-            <a:ext cx="9448495" cy="4389120"/>
+            <a:off x="1371600" y="1463040"/>
+            <a:ext cx="9448495" cy="5029200"/>
           </a:xfrm>
           <a:prstGeom prst="rect">
             <a:avLst/>
@@ -4998,22 +4968,22 @@
           <a:noFill/>
         </p:spPr>
         <p:txBody>
-          <a:bodyPr wrap="square" anchor="t">
+          <a:bodyPr wrap="square">
             <a:spAutoFit/>
           </a:bodyPr>
           <a:lstStyle/>
           <a:p>
             <a:pPr>
               <a:lnSpc>
-                <a:spcPct val="140000"/>
-              </a:lnSpc>
-              <a:spcBef>
-                <a:spcPts val="0"/>
-              </a:spcBef>
-              <a:spcAft>
-                <a:spcPts val="1000"/>
-              </a:spcAft>
-              <a:defRPr sz="2200" b="1">
+                <a:spcPct val="120000"/>
+              </a:lnSpc>
+              <a:spcBef>
+                <a:spcPts val="600"/>
+              </a:spcBef>
+              <a:spcAft>
+                <a:spcPts val="600"/>
+              </a:spcAft>
+              <a:defRPr sz="1800" b="1">
                 <a:solidFill>
                   <a:srgbClr val="1E3A8A"/>
                 </a:solidFill>
@@ -5026,15 +4996,15 @@
           <a:p>
             <a:pPr>
               <a:lnSpc>
-                <a:spcPct val="140000"/>
-              </a:lnSpc>
-              <a:spcBef>
-                <a:spcPts val="1000"/>
-              </a:spcBef>
-              <a:spcAft>
-                <a:spcPts val="1000"/>
-              </a:spcAft>
-              <a:defRPr sz="2000">
+                <a:spcPct val="120000"/>
+              </a:lnSpc>
+              <a:spcBef>
+                <a:spcPts val="600"/>
+              </a:spcBef>
+              <a:spcAft>
+                <a:spcPts val="600"/>
+              </a:spcAft>
+              <a:defRPr sz="1600">
                 <a:solidFill>
                   <a:srgbClr val="0F172A"/>
                 </a:solidFill>
@@ -5047,15 +5017,15 @@
           <a:p>
             <a:pPr>
               <a:lnSpc>
-                <a:spcPct val="140000"/>
-              </a:lnSpc>
-              <a:spcBef>
-                <a:spcPts val="1000"/>
-              </a:spcBef>
-              <a:spcAft>
-                <a:spcPts val="1000"/>
-              </a:spcAft>
-              <a:defRPr sz="2000">
+                <a:spcPct val="120000"/>
+              </a:lnSpc>
+              <a:spcBef>
+                <a:spcPts val="600"/>
+              </a:spcBef>
+              <a:spcAft>
+                <a:spcPts val="600"/>
+              </a:spcAft>
+              <a:defRPr sz="1600">
                 <a:solidFill>
                   <a:srgbClr val="0F172A"/>
                 </a:solidFill>
@@ -5068,15 +5038,15 @@
           <a:p>
             <a:pPr>
               <a:lnSpc>
-                <a:spcPct val="140000"/>
-              </a:lnSpc>
-              <a:spcBef>
-                <a:spcPts val="1000"/>
-              </a:spcBef>
-              <a:spcAft>
-                <a:spcPts val="1000"/>
-              </a:spcAft>
-              <a:defRPr sz="2000">
+                <a:spcPct val="120000"/>
+              </a:lnSpc>
+              <a:spcBef>
+                <a:spcPts val="600"/>
+              </a:spcBef>
+              <a:spcAft>
+                <a:spcPts val="600"/>
+              </a:spcAft>
+              <a:defRPr sz="1600">
                 <a:solidFill>
                   <a:srgbClr val="0F172A"/>
                 </a:solidFill>
@@ -5089,33 +5059,33 @@
           <a:p>
             <a:pPr>
               <a:lnSpc>
-                <a:spcPct val="140000"/>
-              </a:lnSpc>
-              <a:spcBef>
-                <a:spcPts val="1000"/>
-              </a:spcBef>
-              <a:spcAft>
-                <a:spcPts val="1000"/>
-              </a:spcAft>
-              <a:defRPr sz="2000">
-                <a:solidFill>
-                  <a:srgbClr val="0F172A"/>
-                </a:solidFill>
-              </a:defRPr>
-            </a:pPr>
-          </a:p>
-          <a:p>
-            <a:pPr>
-              <a:lnSpc>
-                <a:spcPct val="140000"/>
-              </a:lnSpc>
-              <a:spcBef>
-                <a:spcPts val="1000"/>
-              </a:spcBef>
-              <a:spcAft>
-                <a:spcPts val="1000"/>
-              </a:spcAft>
-              <a:defRPr sz="2200" b="1">
+                <a:spcPct val="120000"/>
+              </a:lnSpc>
+              <a:spcBef>
+                <a:spcPts val="600"/>
+              </a:spcBef>
+              <a:spcAft>
+                <a:spcPts val="600"/>
+              </a:spcAft>
+              <a:defRPr sz="1600">
+                <a:solidFill>
+                  <a:srgbClr val="0F172A"/>
+                </a:solidFill>
+              </a:defRPr>
+            </a:pPr>
+          </a:p>
+          <a:p>
+            <a:pPr>
+              <a:lnSpc>
+                <a:spcPct val="120000"/>
+              </a:lnSpc>
+              <a:spcBef>
+                <a:spcPts val="600"/>
+              </a:spcBef>
+              <a:spcAft>
+                <a:spcPts val="600"/>
+              </a:spcAft>
+              <a:defRPr sz="1800" b="1">
                 <a:solidFill>
                   <a:srgbClr val="1E3A8A"/>
                 </a:solidFill>
@@ -5128,15 +5098,15 @@
           <a:p>
             <a:pPr>
               <a:lnSpc>
-                <a:spcPct val="140000"/>
-              </a:lnSpc>
-              <a:spcBef>
-                <a:spcPts val="1000"/>
-              </a:spcBef>
-              <a:spcAft>
-                <a:spcPts val="1000"/>
-              </a:spcAft>
-              <a:defRPr sz="2000">
+                <a:spcPct val="120000"/>
+              </a:lnSpc>
+              <a:spcBef>
+                <a:spcPts val="600"/>
+              </a:spcBef>
+              <a:spcAft>
+                <a:spcPts val="600"/>
+              </a:spcAft>
+              <a:defRPr sz="1600">
                 <a:solidFill>
                   <a:srgbClr val="0F172A"/>
                 </a:solidFill>
@@ -5149,54 +5119,33 @@
           <a:p>
             <a:pPr>
               <a:lnSpc>
-                <a:spcPct val="140000"/>
-              </a:lnSpc>
-              <a:spcBef>
-                <a:spcPts val="1000"/>
-              </a:spcBef>
-              <a:spcAft>
-                <a:spcPts val="1000"/>
-              </a:spcAft>
-              <a:defRPr sz="2000">
-                <a:solidFill>
-                  <a:srgbClr val="0F172A"/>
-                </a:solidFill>
-              </a:defRPr>
-            </a:pPr>
-            <a:r>
-              <a:t>• 準備一些台灣小吃/音樂介紹</a:t>
-            </a:r>
-          </a:p>
-          <a:p>
-            <a:pPr>
-              <a:lnSpc>
-                <a:spcPct val="140000"/>
-              </a:lnSpc>
-              <a:spcBef>
-                <a:spcPts val="1000"/>
-              </a:spcBef>
-              <a:spcAft>
-                <a:spcPts val="1000"/>
-              </a:spcAft>
-              <a:defRPr sz="2000">
-                <a:solidFill>
-                  <a:srgbClr val="0F172A"/>
-                </a:solidFill>
-              </a:defRPr>
-            </a:pPr>
-          </a:p>
-          <a:p>
-            <a:pPr>
-              <a:lnSpc>
-                <a:spcPct val="140000"/>
-              </a:lnSpc>
-              <a:spcBef>
-                <a:spcPts val="1000"/>
-              </a:spcBef>
-              <a:spcAft>
-                <a:spcPts val="1000"/>
-              </a:spcAft>
-              <a:defRPr sz="2200" b="1">
+                <a:spcPct val="120000"/>
+              </a:lnSpc>
+              <a:spcBef>
+                <a:spcPts val="600"/>
+              </a:spcBef>
+              <a:spcAft>
+                <a:spcPts val="600"/>
+              </a:spcAft>
+              <a:defRPr sz="1600">
+                <a:solidFill>
+                  <a:srgbClr val="0F172A"/>
+                </a:solidFill>
+              </a:defRPr>
+            </a:pPr>
+          </a:p>
+          <a:p>
+            <a:pPr>
+              <a:lnSpc>
+                <a:spcPct val="120000"/>
+              </a:lnSpc>
+              <a:spcBef>
+                <a:spcPts val="600"/>
+              </a:spcBef>
+              <a:spcAft>
+                <a:spcPts val="600"/>
+              </a:spcAft>
+              <a:defRPr sz="1800" b="1">
                 <a:solidFill>
                   <a:srgbClr val="1E3A8A"/>
                 </a:solidFill>
@@ -5209,15 +5158,15 @@
           <a:p>
             <a:pPr>
               <a:lnSpc>
-                <a:spcPct val="140000"/>
-              </a:lnSpc>
-              <a:spcBef>
-                <a:spcPts val="1000"/>
-              </a:spcBef>
-              <a:spcAft>
-                <a:spcPts val="1000"/>
-              </a:spcAft>
-              <a:defRPr sz="2000">
+                <a:spcPct val="120000"/>
+              </a:lnSpc>
+              <a:spcBef>
+                <a:spcPts val="600"/>
+              </a:spcBef>
+              <a:spcAft>
+                <a:spcPts val="600"/>
+              </a:spcAft>
+              <a:defRPr sz="1600">
                 <a:solidFill>
                   <a:srgbClr val="0F172A"/>
                 </a:solidFill>
@@ -5230,15 +5179,15 @@
           <a:p>
             <a:pPr>
               <a:lnSpc>
-                <a:spcPct val="140000"/>
-              </a:lnSpc>
-              <a:spcBef>
-                <a:spcPts val="1000"/>
-              </a:spcBef>
-              <a:spcAft>
-                <a:spcPts val="1000"/>
-              </a:spcAft>
-              <a:defRPr sz="2000">
+                <a:spcPct val="120000"/>
+              </a:lnSpc>
+              <a:spcBef>
+                <a:spcPts val="600"/>
+              </a:spcBef>
+              <a:spcAft>
+                <a:spcPts val="600"/>
+              </a:spcAft>
+              <a:defRPr sz="1600">
                 <a:solidFill>
                   <a:srgbClr val="0F172A"/>
                 </a:solidFill>
@@ -5251,54 +5200,33 @@
           <a:p>
             <a:pPr>
               <a:lnSpc>
-                <a:spcPct val="140000"/>
-              </a:lnSpc>
-              <a:spcBef>
-                <a:spcPts val="1000"/>
-              </a:spcBef>
-              <a:spcAft>
-                <a:spcPts val="1000"/>
-              </a:spcAft>
-              <a:defRPr sz="2000">
-                <a:solidFill>
-                  <a:srgbClr val="0F172A"/>
-                </a:solidFill>
-              </a:defRPr>
-            </a:pPr>
-            <a:r>
-              <a:t>• 例：不擅長光學但擅長養細胞 → 以此合作</a:t>
-            </a:r>
-          </a:p>
-          <a:p>
-            <a:pPr>
-              <a:lnSpc>
-                <a:spcPct val="140000"/>
-              </a:lnSpc>
-              <a:spcBef>
-                <a:spcPts val="1000"/>
-              </a:spcBef>
-              <a:spcAft>
-                <a:spcPts val="1000"/>
-              </a:spcAft>
-              <a:defRPr sz="2000">
-                <a:solidFill>
-                  <a:srgbClr val="0F172A"/>
-                </a:solidFill>
-              </a:defRPr>
-            </a:pPr>
-          </a:p>
-          <a:p>
-            <a:pPr>
-              <a:lnSpc>
-                <a:spcPct val="140000"/>
-              </a:lnSpc>
-              <a:spcBef>
-                <a:spcPts val="1000"/>
-              </a:spcBef>
-              <a:spcAft>
-                <a:spcPts val="1000"/>
-              </a:spcAft>
-              <a:defRPr sz="2200" b="1">
+                <a:spcPct val="120000"/>
+              </a:lnSpc>
+              <a:spcBef>
+                <a:spcPts val="600"/>
+              </a:spcBef>
+              <a:spcAft>
+                <a:spcPts val="600"/>
+              </a:spcAft>
+              <a:defRPr sz="1600">
+                <a:solidFill>
+                  <a:srgbClr val="0F172A"/>
+                </a:solidFill>
+              </a:defRPr>
+            </a:pPr>
+          </a:p>
+          <a:p>
+            <a:pPr>
+              <a:lnSpc>
+                <a:spcPct val="120000"/>
+              </a:lnSpc>
+              <a:spcBef>
+                <a:spcPts val="600"/>
+              </a:spcBef>
+              <a:spcAft>
+                <a:spcPts val="600"/>
+              </a:spcAft>
+              <a:defRPr sz="1800" b="1">
                 <a:solidFill>
                   <a:srgbClr val="1E3A8A"/>
                 </a:solidFill>
@@ -5311,36 +5239,36 @@
           <a:p>
             <a:pPr>
               <a:lnSpc>
-                <a:spcPct val="140000"/>
-              </a:lnSpc>
-              <a:spcBef>
-                <a:spcPts val="1000"/>
-              </a:spcBef>
-              <a:spcAft>
-                <a:spcPts val="1000"/>
-              </a:spcAft>
-              <a:defRPr sz="2000">
-                <a:solidFill>
-                  <a:srgbClr val="0F172A"/>
-                </a:solidFill>
-              </a:defRPr>
-            </a:pPr>
-            <a:r>
-              <a:t>• 台灣 = 高語境文化（high context）+ 集體主義</a:t>
-            </a:r>
-          </a:p>
-          <a:p>
-            <a:pPr>
-              <a:lnSpc>
-                <a:spcPct val="140000"/>
-              </a:lnSpc>
-              <a:spcBef>
-                <a:spcPts val="1000"/>
-              </a:spcBef>
-              <a:spcAft>
-                <a:spcPts val="1000"/>
-              </a:spcAft>
-              <a:defRPr sz="2000">
+                <a:spcPct val="120000"/>
+              </a:lnSpc>
+              <a:spcBef>
+                <a:spcPts val="600"/>
+              </a:spcBef>
+              <a:spcAft>
+                <a:spcPts val="600"/>
+              </a:spcAft>
+              <a:defRPr sz="1600">
+                <a:solidFill>
+                  <a:srgbClr val="0F172A"/>
+                </a:solidFill>
+              </a:defRPr>
+            </a:pPr>
+            <a:r>
+              <a:t>• 台灣 = 高語境文化 + 集體主義</a:t>
+            </a:r>
+          </a:p>
+          <a:p>
+            <a:pPr>
+              <a:lnSpc>
+                <a:spcPct val="120000"/>
+              </a:lnSpc>
+              <a:spcBef>
+                <a:spcPts val="600"/>
+              </a:spcBef>
+              <a:spcAft>
+                <a:spcPts val="600"/>
+              </a:spcAft>
+              <a:defRPr sz="1600">
                 <a:solidFill>
                   <a:srgbClr val="0F172A"/>
                 </a:solidFill>
@@ -5378,8 +5306,8 @@
         </p:nvSpPr>
         <p:spPr>
           <a:xfrm>
-            <a:off x="731520" y="548640"/>
-            <a:ext cx="10728655" cy="822960"/>
+            <a:off x="914400" y="457200"/>
+            <a:ext cx="10362895" cy="640080"/>
           </a:xfrm>
           <a:prstGeom prst="rect">
             <a:avLst/>
@@ -5387,20 +5315,20 @@
           <a:noFill/>
         </p:spPr>
         <p:txBody>
-          <a:bodyPr wrap="none">
+          <a:bodyPr wrap="square">
             <a:spAutoFit/>
           </a:bodyPr>
           <a:lstStyle/>
           <a:p>
             <a:pPr algn="ctr">
-              <a:defRPr sz="3600" b="1">
+              <a:defRPr sz="3200" b="1">
                 <a:solidFill>
                   <a:srgbClr val="1E3A8A"/>
                 </a:solidFill>
               </a:defRPr>
             </a:pPr>
             <a:r>
-              <a:t>心態調整：從舒適圈到成長區</a:t>
+              <a:t>心態調整</a:t>
             </a:r>
           </a:p>
         </p:txBody>
@@ -5413,8 +5341,8 @@
         </p:nvSpPr>
         <p:spPr>
           <a:xfrm>
-            <a:off x="4724704" y="1371600"/>
-            <a:ext cx="2743200" cy="45720"/>
+            <a:off x="5181904" y="1097280"/>
+            <a:ext cx="1828800" cy="36576"/>
           </a:xfrm>
           <a:prstGeom prst="rect">
             <a:avLst/>
@@ -5456,8 +5384,8 @@
         </p:nvSpPr>
         <p:spPr>
           <a:xfrm>
-            <a:off x="1371600" y="2011680"/>
-            <a:ext cx="9448495" cy="4389120"/>
+            <a:off x="1371600" y="1463040"/>
+            <a:ext cx="9448495" cy="5029200"/>
           </a:xfrm>
           <a:prstGeom prst="rect">
             <a:avLst/>
@@ -5465,22 +5393,22 @@
           <a:noFill/>
         </p:spPr>
         <p:txBody>
-          <a:bodyPr wrap="square" anchor="t">
+          <a:bodyPr wrap="square">
             <a:spAutoFit/>
           </a:bodyPr>
           <a:lstStyle/>
           <a:p>
             <a:pPr>
               <a:lnSpc>
-                <a:spcPct val="140000"/>
-              </a:lnSpc>
-              <a:spcBef>
-                <a:spcPts val="0"/>
-              </a:spcBef>
-              <a:spcAft>
-                <a:spcPts val="1000"/>
-              </a:spcAft>
-              <a:defRPr sz="2200" b="1">
+                <a:spcPct val="120000"/>
+              </a:lnSpc>
+              <a:spcBef>
+                <a:spcPts val="600"/>
+              </a:spcBef>
+              <a:spcAft>
+                <a:spcPts val="600"/>
+              </a:spcAft>
+              <a:defRPr sz="1800" b="1">
                 <a:solidFill>
                   <a:srgbClr val="1E3A8A"/>
                 </a:solidFill>
@@ -5493,15 +5421,15 @@
           <a:p>
             <a:pPr>
               <a:lnSpc>
-                <a:spcPct val="140000"/>
-              </a:lnSpc>
-              <a:spcBef>
-                <a:spcPts val="1000"/>
-              </a:spcBef>
-              <a:spcAft>
-                <a:spcPts val="1000"/>
-              </a:spcAft>
-              <a:defRPr sz="2000">
+                <a:spcPct val="120000"/>
+              </a:lnSpc>
+              <a:spcBef>
+                <a:spcPts val="600"/>
+              </a:spcBef>
+              <a:spcAft>
+                <a:spcPts val="600"/>
+              </a:spcAft>
+              <a:defRPr sz="1600">
                 <a:solidFill>
                   <a:srgbClr val="0F172A"/>
                 </a:solidFill>
@@ -5514,15 +5442,15 @@
           <a:p>
             <a:pPr>
               <a:lnSpc>
-                <a:spcPct val="140000"/>
-              </a:lnSpc>
-              <a:spcBef>
-                <a:spcPts val="1000"/>
-              </a:spcBef>
-              <a:spcAft>
-                <a:spcPts val="1000"/>
-              </a:spcAft>
-              <a:defRPr sz="2000">
+                <a:spcPct val="120000"/>
+              </a:lnSpc>
+              <a:spcBef>
+                <a:spcPts val="600"/>
+              </a:spcBef>
+              <a:spcAft>
+                <a:spcPts val="600"/>
+              </a:spcAft>
+              <a:defRPr sz="1600">
                 <a:solidFill>
                   <a:srgbClr val="0F172A"/>
                 </a:solidFill>
@@ -5535,54 +5463,33 @@
           <a:p>
             <a:pPr>
               <a:lnSpc>
-                <a:spcPct val="140000"/>
-              </a:lnSpc>
-              <a:spcBef>
-                <a:spcPts val="1000"/>
-              </a:spcBef>
-              <a:spcAft>
-                <a:spcPts val="1000"/>
-              </a:spcAft>
-              <a:defRPr sz="2000">
-                <a:solidFill>
-                  <a:srgbClr val="0F172A"/>
-                </a:solidFill>
-              </a:defRPr>
-            </a:pPr>
-            <a:r>
-              <a:t>• 避免浪費假期在宿舍</a:t>
-            </a:r>
-          </a:p>
-          <a:p>
-            <a:pPr>
-              <a:lnSpc>
-                <a:spcPct val="140000"/>
-              </a:lnSpc>
-              <a:spcBef>
-                <a:spcPts val="1000"/>
-              </a:spcBef>
-              <a:spcAft>
-                <a:spcPts val="1000"/>
-              </a:spcAft>
-              <a:defRPr sz="2000">
-                <a:solidFill>
-                  <a:srgbClr val="0F172A"/>
-                </a:solidFill>
-              </a:defRPr>
-            </a:pPr>
-          </a:p>
-          <a:p>
-            <a:pPr>
-              <a:lnSpc>
-                <a:spcPct val="140000"/>
-              </a:lnSpc>
-              <a:spcBef>
-                <a:spcPts val="1000"/>
-              </a:spcBef>
-              <a:spcAft>
-                <a:spcPts val="1000"/>
-              </a:spcAft>
-              <a:defRPr sz="2200" b="1">
+                <a:spcPct val="120000"/>
+              </a:lnSpc>
+              <a:spcBef>
+                <a:spcPts val="600"/>
+              </a:spcBef>
+              <a:spcAft>
+                <a:spcPts val="600"/>
+              </a:spcAft>
+              <a:defRPr sz="1600">
+                <a:solidFill>
+                  <a:srgbClr val="0F172A"/>
+                </a:solidFill>
+              </a:defRPr>
+            </a:pPr>
+          </a:p>
+          <a:p>
+            <a:pPr>
+              <a:lnSpc>
+                <a:spcPct val="120000"/>
+              </a:lnSpc>
+              <a:spcBef>
+                <a:spcPts val="600"/>
+              </a:spcBef>
+              <a:spcAft>
+                <a:spcPts val="600"/>
+              </a:spcAft>
+              <a:defRPr sz="1800" b="1">
                 <a:solidFill>
                   <a:srgbClr val="1E3A8A"/>
                 </a:solidFill>
@@ -5595,15 +5502,15 @@
           <a:p>
             <a:pPr>
               <a:lnSpc>
-                <a:spcPct val="140000"/>
-              </a:lnSpc>
-              <a:spcBef>
-                <a:spcPts val="1000"/>
-              </a:spcBef>
-              <a:spcAft>
-                <a:spcPts val="1000"/>
-              </a:spcAft>
-              <a:defRPr sz="2000">
+                <a:spcPct val="120000"/>
+              </a:lnSpc>
+              <a:spcBef>
+                <a:spcPts val="600"/>
+              </a:spcBef>
+              <a:spcAft>
+                <a:spcPts val="600"/>
+              </a:spcAft>
+              <a:defRPr sz="1600">
                 <a:solidFill>
                   <a:srgbClr val="0F172A"/>
                 </a:solidFill>
@@ -5616,15 +5523,15 @@
           <a:p>
             <a:pPr>
               <a:lnSpc>
-                <a:spcPct val="140000"/>
-              </a:lnSpc>
-              <a:spcBef>
-                <a:spcPts val="1000"/>
-              </a:spcBef>
-              <a:spcAft>
-                <a:spcPts val="1000"/>
-              </a:spcAft>
-              <a:defRPr sz="2000">
+                <a:spcPct val="120000"/>
+              </a:lnSpc>
+              <a:spcBef>
+                <a:spcPts val="600"/>
+              </a:spcBef>
+              <a:spcAft>
+                <a:spcPts val="600"/>
+              </a:spcAft>
+              <a:defRPr sz="1600">
                 <a:solidFill>
                   <a:srgbClr val="0F172A"/>
                 </a:solidFill>
@@ -5637,15 +5544,15 @@
           <a:p>
             <a:pPr>
               <a:lnSpc>
-                <a:spcPct val="140000"/>
-              </a:lnSpc>
-              <a:spcBef>
-                <a:spcPts val="1000"/>
-              </a:spcBef>
-              <a:spcAft>
-                <a:spcPts val="1000"/>
-              </a:spcAft>
-              <a:defRPr sz="2000">
+                <a:spcPct val="120000"/>
+              </a:lnSpc>
+              <a:spcBef>
+                <a:spcPts val="600"/>
+              </a:spcBef>
+              <a:spcAft>
+                <a:spcPts val="600"/>
+              </a:spcAft>
+              <a:defRPr sz="1600">
                 <a:solidFill>
                   <a:srgbClr val="0F172A"/>
                 </a:solidFill>
@@ -5658,33 +5565,33 @@
           <a:p>
             <a:pPr>
               <a:lnSpc>
-                <a:spcPct val="140000"/>
-              </a:lnSpc>
-              <a:spcBef>
-                <a:spcPts val="1000"/>
-              </a:spcBef>
-              <a:spcAft>
-                <a:spcPts val="1000"/>
-              </a:spcAft>
-              <a:defRPr sz="2000">
-                <a:solidFill>
-                  <a:srgbClr val="0F172A"/>
-                </a:solidFill>
-              </a:defRPr>
-            </a:pPr>
-          </a:p>
-          <a:p>
-            <a:pPr>
-              <a:lnSpc>
-                <a:spcPct val="140000"/>
-              </a:lnSpc>
-              <a:spcBef>
-                <a:spcPts val="1000"/>
-              </a:spcBef>
-              <a:spcAft>
-                <a:spcPts val="1000"/>
-              </a:spcAft>
-              <a:defRPr sz="2200" b="1">
+                <a:spcPct val="120000"/>
+              </a:lnSpc>
+              <a:spcBef>
+                <a:spcPts val="600"/>
+              </a:spcBef>
+              <a:spcAft>
+                <a:spcPts val="600"/>
+              </a:spcAft>
+              <a:defRPr sz="1600">
+                <a:solidFill>
+                  <a:srgbClr val="0F172A"/>
+                </a:solidFill>
+              </a:defRPr>
+            </a:pPr>
+          </a:p>
+          <a:p>
+            <a:pPr>
+              <a:lnSpc>
+                <a:spcPct val="120000"/>
+              </a:lnSpc>
+              <a:spcBef>
+                <a:spcPts val="600"/>
+              </a:spcBef>
+              <a:spcAft>
+                <a:spcPts val="600"/>
+              </a:spcAft>
+              <a:defRPr sz="1800" b="1">
                 <a:solidFill>
                   <a:srgbClr val="1E3A8A"/>
                 </a:solidFill>
@@ -5697,15 +5604,15 @@
           <a:p>
             <a:pPr>
               <a:lnSpc>
-                <a:spcPct val="140000"/>
-              </a:lnSpc>
-              <a:spcBef>
-                <a:spcPts val="1000"/>
-              </a:spcBef>
-              <a:spcAft>
-                <a:spcPts val="1000"/>
-              </a:spcAft>
-              <a:defRPr sz="2000">
+                <a:spcPct val="120000"/>
+              </a:lnSpc>
+              <a:spcBef>
+                <a:spcPts val="600"/>
+              </a:spcBef>
+              <a:spcAft>
+                <a:spcPts val="600"/>
+              </a:spcAft>
+              <a:defRPr sz="1600">
                 <a:solidFill>
                   <a:srgbClr val="0F172A"/>
                 </a:solidFill>
@@ -5718,36 +5625,15 @@
           <a:p>
             <a:pPr>
               <a:lnSpc>
-                <a:spcPct val="140000"/>
-              </a:lnSpc>
-              <a:spcBef>
-                <a:spcPts val="1000"/>
-              </a:spcBef>
-              <a:spcAft>
-                <a:spcPts val="1000"/>
-              </a:spcAft>
-              <a:defRPr sz="2000">
-                <a:solidFill>
-                  <a:srgbClr val="0F172A"/>
-                </a:solidFill>
-              </a:defRPr>
-            </a:pPr>
-            <a:r>
-              <a:t>• 避免「玩物喪志」</a:t>
-            </a:r>
-          </a:p>
-          <a:p>
-            <a:pPr>
-              <a:lnSpc>
-                <a:spcPct val="140000"/>
-              </a:lnSpc>
-              <a:spcBef>
-                <a:spcPts val="1000"/>
-              </a:spcBef>
-              <a:spcAft>
-                <a:spcPts val="1000"/>
-              </a:spcAft>
-              <a:defRPr sz="2000">
+                <a:spcPct val="120000"/>
+              </a:lnSpc>
+              <a:spcBef>
+                <a:spcPts val="600"/>
+              </a:spcBef>
+              <a:spcAft>
+                <a:spcPts val="600"/>
+              </a:spcAft>
+              <a:defRPr sz="1600">
                 <a:solidFill>
                   <a:srgbClr val="0F172A"/>
                 </a:solidFill>
@@ -5760,40 +5646,61 @@
           <a:p>
             <a:pPr>
               <a:lnSpc>
-                <a:spcPct val="140000"/>
-              </a:lnSpc>
-              <a:spcBef>
-                <a:spcPts val="1000"/>
-              </a:spcBef>
-              <a:spcAft>
-                <a:spcPts val="1000"/>
-              </a:spcAft>
-              <a:defRPr sz="2000">
-                <a:solidFill>
-                  <a:srgbClr val="0F172A"/>
-                </a:solidFill>
-              </a:defRPr>
-            </a:pPr>
-          </a:p>
-          <a:p>
-            <a:pPr>
-              <a:lnSpc>
-                <a:spcPct val="140000"/>
-              </a:lnSpc>
-              <a:spcBef>
-                <a:spcPts val="1000"/>
-              </a:spcBef>
-              <a:spcAft>
-                <a:spcPts val="1000"/>
-              </a:spcAft>
-              <a:defRPr sz="2200" b="1">
+                <a:spcPct val="120000"/>
+              </a:lnSpc>
+              <a:spcBef>
+                <a:spcPts val="600"/>
+              </a:spcBef>
+              <a:spcAft>
+                <a:spcPts val="600"/>
+              </a:spcAft>
+              <a:defRPr sz="1600">
+                <a:solidFill>
+                  <a:srgbClr val="0F172A"/>
+                </a:solidFill>
+              </a:defRPr>
+            </a:pPr>
+          </a:p>
+          <a:p>
+            <a:pPr>
+              <a:lnSpc>
+                <a:spcPct val="120000"/>
+              </a:lnSpc>
+              <a:spcBef>
+                <a:spcPts val="600"/>
+              </a:spcBef>
+              <a:spcAft>
+                <a:spcPts val="600"/>
+              </a:spcAft>
+              <a:defRPr sz="1800" b="1">
                 <a:solidFill>
                   <a:srgbClr val="1E3A8A"/>
                 </a:solidFill>
               </a:defRPr>
             </a:pPr>
             <a:r>
-              <a:t>【代表學校的責任】你代表台科大、代表台灣，把自己做好才能贏得尊重</a:t>
+              <a:t>【代表學校的責任】</a:t>
+            </a:r>
+          </a:p>
+          <a:p>
+            <a:pPr>
+              <a:lnSpc>
+                <a:spcPct val="120000"/>
+              </a:lnSpc>
+              <a:spcBef>
+                <a:spcPts val="600"/>
+              </a:spcBef>
+              <a:spcAft>
+                <a:spcPts val="600"/>
+              </a:spcAft>
+              <a:defRPr sz="1600">
+                <a:solidFill>
+                  <a:srgbClr val="0F172A"/>
+                </a:solidFill>
+              </a:defRPr>
+            </a:pPr>
+            <a:r>
+              <a:t>你代表台科大、代表台灣，把自己做好才能贏得尊重</a:t>
             </a:r>
           </a:p>
         </p:txBody>
@@ -5824,8 +5731,8 @@
         </p:nvSpPr>
         <p:spPr>
           <a:xfrm>
-            <a:off x="731520" y="548640"/>
-            <a:ext cx="10728655" cy="822960"/>
+            <a:off x="914400" y="457200"/>
+            <a:ext cx="10362895" cy="640080"/>
           </a:xfrm>
           <a:prstGeom prst="rect">
             <a:avLst/>
@@ -5833,20 +5740,20 @@
           <a:noFill/>
         </p:spPr>
         <p:txBody>
-          <a:bodyPr wrap="none">
+          <a:bodyPr wrap="square">
             <a:spAutoFit/>
           </a:bodyPr>
           <a:lstStyle/>
           <a:p>
             <a:pPr algn="ctr">
-              <a:defRPr sz="3600" b="1">
+              <a:defRPr sz="3200" b="1">
                 <a:solidFill>
                   <a:srgbClr val="1E3A8A"/>
                 </a:solidFill>
               </a:defRPr>
             </a:pPr>
             <a:r>
-              <a:t>時間管理：讀書與旅遊的平衡術</a:t>
+              <a:t>時間管理：讀書與旅遊的平衡</a:t>
             </a:r>
           </a:p>
         </p:txBody>
@@ -5859,8 +5766,8 @@
         </p:nvSpPr>
         <p:spPr>
           <a:xfrm>
-            <a:off x="4724704" y="1371600"/>
-            <a:ext cx="2743200" cy="45720"/>
+            <a:off x="5181904" y="1097280"/>
+            <a:ext cx="1828800" cy="36576"/>
           </a:xfrm>
           <a:prstGeom prst="rect">
             <a:avLst/>
@@ -5902,8 +5809,8 @@
         </p:nvSpPr>
         <p:spPr>
           <a:xfrm>
-            <a:off x="1371600" y="2011680"/>
-            <a:ext cx="9448495" cy="4389120"/>
+            <a:off x="1371600" y="1463040"/>
+            <a:ext cx="9448495" cy="5029200"/>
           </a:xfrm>
           <a:prstGeom prst="rect">
             <a:avLst/>
@@ -5911,22 +5818,22 @@
           <a:noFill/>
         </p:spPr>
         <p:txBody>
-          <a:bodyPr wrap="square" anchor="t">
+          <a:bodyPr wrap="square">
             <a:spAutoFit/>
           </a:bodyPr>
           <a:lstStyle/>
           <a:p>
             <a:pPr>
               <a:lnSpc>
-                <a:spcPct val="140000"/>
-              </a:lnSpc>
-              <a:spcBef>
-                <a:spcPts val="0"/>
-              </a:spcBef>
-              <a:spcAft>
-                <a:spcPts val="1000"/>
-              </a:spcAft>
-              <a:defRPr sz="2200" b="1">
+                <a:spcPct val="120000"/>
+              </a:lnSpc>
+              <a:spcBef>
+                <a:spcPts val="600"/>
+              </a:spcBef>
+              <a:spcAft>
+                <a:spcPts val="600"/>
+              </a:spcAft>
+              <a:defRPr sz="1800" b="1">
                 <a:solidFill>
                   <a:srgbClr val="1E3A8A"/>
                 </a:solidFill>
@@ -5939,54 +5846,54 @@
           <a:p>
             <a:pPr>
               <a:lnSpc>
-                <a:spcPct val="140000"/>
-              </a:lnSpc>
-              <a:spcBef>
-                <a:spcPts val="1000"/>
-              </a:spcBef>
-              <a:spcAft>
-                <a:spcPts val="1000"/>
-              </a:spcAft>
-              <a:defRPr sz="2000">
-                <a:solidFill>
-                  <a:srgbClr val="0F172A"/>
-                </a:solidFill>
-              </a:defRPr>
-            </a:pPr>
-          </a:p>
-          <a:p>
-            <a:pPr>
-              <a:lnSpc>
-                <a:spcPct val="140000"/>
-              </a:lnSpc>
-              <a:spcBef>
-                <a:spcPts val="1000"/>
-              </a:spcBef>
-              <a:spcAft>
-                <a:spcPts val="1000"/>
-              </a:spcAft>
-              <a:defRPr sz="2000">
-                <a:solidFill>
-                  <a:srgbClr val="0F172A"/>
-                </a:solidFill>
-              </a:defRPr>
-            </a:pPr>
-            <a:r>
-              <a:t>可行的平衡模式：</a:t>
-            </a:r>
-          </a:p>
-          <a:p>
-            <a:pPr>
-              <a:lnSpc>
-                <a:spcPct val="140000"/>
-              </a:lnSpc>
-              <a:spcBef>
-                <a:spcPts val="1000"/>
-              </a:spcBef>
-              <a:spcAft>
-                <a:spcPts val="1000"/>
-              </a:spcAft>
-              <a:defRPr sz="2000">
+                <a:spcPct val="120000"/>
+              </a:lnSpc>
+              <a:spcBef>
+                <a:spcPts val="600"/>
+              </a:spcBef>
+              <a:spcAft>
+                <a:spcPts val="600"/>
+              </a:spcAft>
+              <a:defRPr sz="1600">
+                <a:solidFill>
+                  <a:srgbClr val="0F172A"/>
+                </a:solidFill>
+              </a:defRPr>
+            </a:pPr>
+          </a:p>
+          <a:p>
+            <a:pPr>
+              <a:lnSpc>
+                <a:spcPct val="120000"/>
+              </a:lnSpc>
+              <a:spcBef>
+                <a:spcPts val="600"/>
+              </a:spcBef>
+              <a:spcAft>
+                <a:spcPts val="600"/>
+              </a:spcAft>
+              <a:defRPr sz="1800" b="1">
+                <a:solidFill>
+                  <a:srgbClr val="1E3A8A"/>
+                </a:solidFill>
+              </a:defRPr>
+            </a:pPr>
+            <a:r>
+              <a:t>【可行的平衡模式】</a:t>
+            </a:r>
+          </a:p>
+          <a:p>
+            <a:pPr>
+              <a:lnSpc>
+                <a:spcPct val="120000"/>
+              </a:lnSpc>
+              <a:spcBef>
+                <a:spcPts val="600"/>
+              </a:spcBef>
+              <a:spcAft>
+                <a:spcPts val="600"/>
+              </a:spcAft>
+              <a:defRPr sz="1600">
                 <a:solidFill>
                   <a:srgbClr val="0F172A"/>
                 </a:solidFill>
@@ -5999,15 +5906,15 @@
           <a:p>
             <a:pPr>
               <a:lnSpc>
-                <a:spcPct val="140000"/>
-              </a:lnSpc>
-              <a:spcBef>
-                <a:spcPts val="1000"/>
-              </a:spcBef>
-              <a:spcAft>
-                <a:spcPts val="1000"/>
-              </a:spcAft>
-              <a:defRPr sz="2000">
+                <a:spcPct val="120000"/>
+              </a:lnSpc>
+              <a:spcBef>
+                <a:spcPts val="600"/>
+              </a:spcBef>
+              <a:spcAft>
+                <a:spcPts val="600"/>
+              </a:spcAft>
+              <a:defRPr sz="1600">
                 <a:solidFill>
                   <a:srgbClr val="0F172A"/>
                 </a:solidFill>
@@ -6020,15 +5927,15 @@
           <a:p>
             <a:pPr>
               <a:lnSpc>
-                <a:spcPct val="140000"/>
-              </a:lnSpc>
-              <a:spcBef>
-                <a:spcPts val="1000"/>
-              </a:spcBef>
-              <a:spcAft>
-                <a:spcPts val="1000"/>
-              </a:spcAft>
-              <a:defRPr sz="2000">
+                <a:spcPct val="120000"/>
+              </a:lnSpc>
+              <a:spcBef>
+                <a:spcPts val="600"/>
+              </a:spcBef>
+              <a:spcAft>
+                <a:spcPts val="600"/>
+              </a:spcAft>
+              <a:defRPr sz="1600">
                 <a:solidFill>
                   <a:srgbClr val="0F172A"/>
                 </a:solidFill>
@@ -6041,75 +5948,54 @@
           <a:p>
             <a:pPr>
               <a:lnSpc>
-                <a:spcPct val="140000"/>
-              </a:lnSpc>
-              <a:spcBef>
-                <a:spcPts val="1000"/>
-              </a:spcBef>
-              <a:spcAft>
-                <a:spcPts val="1000"/>
-              </a:spcAft>
-              <a:defRPr sz="2000">
-                <a:solidFill>
-                  <a:srgbClr val="0F172A"/>
-                </a:solidFill>
-              </a:defRPr>
-            </a:pPr>
-            <a:r>
-              <a:t>• 提前在台灣列好想去的地點清單</a:t>
-            </a:r>
-          </a:p>
-          <a:p>
-            <a:pPr>
-              <a:lnSpc>
-                <a:spcPct val="140000"/>
-              </a:lnSpc>
-              <a:spcBef>
-                <a:spcPts val="1000"/>
-              </a:spcBef>
-              <a:spcAft>
-                <a:spcPts val="1000"/>
-              </a:spcAft>
-              <a:defRPr sz="2000">
-                <a:solidFill>
-                  <a:srgbClr val="0F172A"/>
-                </a:solidFill>
-              </a:defRPr>
-            </a:pPr>
-          </a:p>
-          <a:p>
-            <a:pPr>
-              <a:lnSpc>
-                <a:spcPct val="140000"/>
-              </a:lnSpc>
-              <a:spcBef>
-                <a:spcPts val="1000"/>
-              </a:spcBef>
-              <a:spcAft>
-                <a:spcPts val="1000"/>
-              </a:spcAft>
-              <a:defRPr sz="2000">
-                <a:solidFill>
-                  <a:srgbClr val="0F172A"/>
-                </a:solidFill>
-              </a:defRPr>
-            </a:pPr>
-            <a:r>
-              <a:t>避免的陷阱：</a:t>
-            </a:r>
-          </a:p>
-          <a:p>
-            <a:pPr>
-              <a:lnSpc>
-                <a:spcPct val="140000"/>
-              </a:lnSpc>
-              <a:spcBef>
-                <a:spcPts val="1000"/>
-              </a:spcBef>
-              <a:spcAft>
-                <a:spcPts val="1000"/>
-              </a:spcAft>
-              <a:defRPr sz="2000">
+                <a:spcPct val="120000"/>
+              </a:lnSpc>
+              <a:spcBef>
+                <a:spcPts val="600"/>
+              </a:spcBef>
+              <a:spcAft>
+                <a:spcPts val="600"/>
+              </a:spcAft>
+              <a:defRPr sz="1600">
+                <a:solidFill>
+                  <a:srgbClr val="0F172A"/>
+                </a:solidFill>
+              </a:defRPr>
+            </a:pPr>
+          </a:p>
+          <a:p>
+            <a:pPr>
+              <a:lnSpc>
+                <a:spcPct val="120000"/>
+              </a:lnSpc>
+              <a:spcBef>
+                <a:spcPts val="600"/>
+              </a:spcBef>
+              <a:spcAft>
+                <a:spcPts val="600"/>
+              </a:spcAft>
+              <a:defRPr sz="1800" b="1">
+                <a:solidFill>
+                  <a:srgbClr val="1E3A8A"/>
+                </a:solidFill>
+              </a:defRPr>
+            </a:pPr>
+            <a:r>
+              <a:t>【避免的陷阱】</a:t>
+            </a:r>
+          </a:p>
+          <a:p>
+            <a:pPr>
+              <a:lnSpc>
+                <a:spcPct val="120000"/>
+              </a:lnSpc>
+              <a:spcBef>
+                <a:spcPts val="600"/>
+              </a:spcBef>
+              <a:spcAft>
+                <a:spcPts val="600"/>
+              </a:spcAft>
+              <a:defRPr sz="1600">
                 <a:solidFill>
                   <a:srgbClr val="0F172A"/>
                 </a:solidFill>
@@ -6122,15 +6008,15 @@
           <a:p>
             <a:pPr>
               <a:lnSpc>
-                <a:spcPct val="140000"/>
-              </a:lnSpc>
-              <a:spcBef>
-                <a:spcPts val="1000"/>
-              </a:spcBef>
-              <a:spcAft>
-                <a:spcPts val="1000"/>
-              </a:spcAft>
-              <a:defRPr sz="2000">
+                <a:spcPct val="120000"/>
+              </a:lnSpc>
+              <a:spcBef>
+                <a:spcPts val="600"/>
+              </a:spcBef>
+              <a:spcAft>
+                <a:spcPts val="600"/>
+              </a:spcAft>
+              <a:defRPr sz="1600">
                 <a:solidFill>
                   <a:srgbClr val="0F172A"/>
                 </a:solidFill>
@@ -6143,103 +6029,61 @@
           <a:p>
             <a:pPr>
               <a:lnSpc>
-                <a:spcPct val="140000"/>
-              </a:lnSpc>
-              <a:spcBef>
-                <a:spcPts val="1000"/>
-              </a:spcBef>
-              <a:spcAft>
-                <a:spcPts val="1000"/>
-              </a:spcAft>
-              <a:defRPr sz="2000">
-                <a:solidFill>
-                  <a:srgbClr val="0F172A"/>
-                </a:solidFill>
-              </a:defRPr>
-            </a:pPr>
-            <a:r>
-              <a:t>• 臨時起意（機票住宿貴、時間浪費）</a:t>
-            </a:r>
-          </a:p>
-          <a:p>
-            <a:pPr>
-              <a:lnSpc>
-                <a:spcPct val="140000"/>
-              </a:lnSpc>
-              <a:spcBef>
-                <a:spcPts val="1000"/>
-              </a:spcBef>
-              <a:spcAft>
-                <a:spcPts val="1000"/>
-              </a:spcAft>
-              <a:defRPr sz="2000">
-                <a:solidFill>
-                  <a:srgbClr val="0F172A"/>
-                </a:solidFill>
-              </a:defRPr>
-            </a:pPr>
-          </a:p>
-          <a:p>
-            <a:pPr>
-              <a:lnSpc>
-                <a:spcPct val="140000"/>
-              </a:lnSpc>
-              <a:spcBef>
-                <a:spcPts val="1000"/>
-              </a:spcBef>
-              <a:spcAft>
-                <a:spcPts val="1000"/>
-              </a:spcAft>
-              <a:defRPr sz="2000">
-                <a:solidFill>
-                  <a:srgbClr val="0F172A"/>
-                </a:solidFill>
-              </a:defRPr>
-            </a:pPr>
-            <a:r>
-              <a:t>時間管理技巧：</a:t>
-            </a:r>
-          </a:p>
-          <a:p>
-            <a:pPr>
-              <a:lnSpc>
-                <a:spcPct val="140000"/>
-              </a:lnSpc>
-              <a:spcBef>
-                <a:spcPts val="1000"/>
-              </a:spcBef>
-              <a:spcAft>
-                <a:spcPts val="1000"/>
-              </a:spcAft>
-              <a:defRPr sz="2000">
-                <a:solidFill>
-                  <a:srgbClr val="0F172A"/>
-                </a:solidFill>
-              </a:defRPr>
-            </a:pPr>
-            <a:r>
-              <a:t>• 制定8天短期目標（研究/學習壓力大時）</a:t>
-            </a:r>
-          </a:p>
-          <a:p>
-            <a:pPr>
-              <a:lnSpc>
-                <a:spcPct val="140000"/>
-              </a:lnSpc>
-              <a:spcBef>
-                <a:spcPts val="1000"/>
-              </a:spcBef>
-              <a:spcAft>
-                <a:spcPts val="1000"/>
-              </a:spcAft>
-              <a:defRPr sz="2000">
-                <a:solidFill>
-                  <a:srgbClr val="0F172A"/>
-                </a:solidFill>
-              </a:defRPr>
-            </a:pPr>
-            <a:r>
-              <a:t>• 但要注意：11月後日照短，易心態炸裂</a:t>
+                <a:spcPct val="120000"/>
+              </a:lnSpc>
+              <a:spcBef>
+                <a:spcPts val="600"/>
+              </a:spcBef>
+              <a:spcAft>
+                <a:spcPts val="600"/>
+              </a:spcAft>
+              <a:defRPr sz="1600">
+                <a:solidFill>
+                  <a:srgbClr val="0F172A"/>
+                </a:solidFill>
+              </a:defRPr>
+            </a:pPr>
+            <a:r>
+              <a:t>• 臨時起意（機票住宿貴）</a:t>
+            </a:r>
+          </a:p>
+          <a:p>
+            <a:pPr>
+              <a:lnSpc>
+                <a:spcPct val="120000"/>
+              </a:lnSpc>
+              <a:spcBef>
+                <a:spcPts val="600"/>
+              </a:spcBef>
+              <a:spcAft>
+                <a:spcPts val="600"/>
+              </a:spcAft>
+              <a:defRPr sz="1600">
+                <a:solidFill>
+                  <a:srgbClr val="0F172A"/>
+                </a:solidFill>
+              </a:defRPr>
+            </a:pPr>
+          </a:p>
+          <a:p>
+            <a:pPr>
+              <a:lnSpc>
+                <a:spcPct val="120000"/>
+              </a:lnSpc>
+              <a:spcBef>
+                <a:spcPts val="600"/>
+              </a:spcBef>
+              <a:spcAft>
+                <a:spcPts val="600"/>
+              </a:spcAft>
+              <a:defRPr sz="1800" b="1">
+                <a:solidFill>
+                  <a:srgbClr val="1E3A8A"/>
+                </a:solidFill>
+              </a:defRPr>
+            </a:pPr>
+            <a:r>
+              <a:t>【技巧】制定8天短期目標，注意11月後日照短易心態炸裂</a:t>
             </a:r>
           </a:p>
         </p:txBody>
@@ -6270,8 +6114,8 @@
         </p:nvSpPr>
         <p:spPr>
           <a:xfrm>
-            <a:off x="731520" y="548640"/>
-            <a:ext cx="10728655" cy="822960"/>
+            <a:off x="914400" y="457200"/>
+            <a:ext cx="10362895" cy="640080"/>
           </a:xfrm>
           <a:prstGeom prst="rect">
             <a:avLst/>
@@ -6279,13 +6123,13 @@
           <a:noFill/>
         </p:spPr>
         <p:txBody>
-          <a:bodyPr wrap="none">
+          <a:bodyPr wrap="square">
             <a:spAutoFit/>
           </a:bodyPr>
           <a:lstStyle/>
           <a:p>
             <a:pPr algn="ctr">
-              <a:defRPr sz="3600" b="1">
+              <a:defRPr sz="3200" b="1">
                 <a:solidFill>
                   <a:srgbClr val="1E3A8A"/>
                 </a:solidFill>
@@ -6305,8 +6149,8 @@
         </p:nvSpPr>
         <p:spPr>
           <a:xfrm>
-            <a:off x="4724704" y="1371600"/>
-            <a:ext cx="2743200" cy="45720"/>
+            <a:off x="5181904" y="1097280"/>
+            <a:ext cx="1828800" cy="36576"/>
           </a:xfrm>
           <a:prstGeom prst="rect">
             <a:avLst/>
@@ -6348,8 +6192,8 @@
         </p:nvSpPr>
         <p:spPr>
           <a:xfrm>
-            <a:off x="1371600" y="2011680"/>
-            <a:ext cx="9448495" cy="4389120"/>
+            <a:off x="1371600" y="1463040"/>
+            <a:ext cx="9448495" cy="5029200"/>
           </a:xfrm>
           <a:prstGeom prst="rect">
             <a:avLst/>
@@ -6357,22 +6201,22 @@
           <a:noFill/>
         </p:spPr>
         <p:txBody>
-          <a:bodyPr wrap="square" anchor="t">
+          <a:bodyPr wrap="square">
             <a:spAutoFit/>
           </a:bodyPr>
           <a:lstStyle/>
           <a:p>
             <a:pPr>
               <a:lnSpc>
-                <a:spcPct val="140000"/>
-              </a:lnSpc>
-              <a:spcBef>
-                <a:spcPts val="0"/>
-              </a:spcBef>
-              <a:spcAft>
-                <a:spcPts val="1000"/>
-              </a:spcAft>
-              <a:defRPr sz="2200" b="1">
+                <a:spcPct val="120000"/>
+              </a:lnSpc>
+              <a:spcBef>
+                <a:spcPts val="600"/>
+              </a:spcBef>
+              <a:spcAft>
+                <a:spcPts val="600"/>
+              </a:spcAft>
+              <a:defRPr sz="1800" b="1">
                 <a:solidFill>
                   <a:srgbClr val="1E3A8A"/>
                 </a:solidFill>
@@ -6385,15 +6229,15 @@
           <a:p>
             <a:pPr>
               <a:lnSpc>
-                <a:spcPct val="140000"/>
-              </a:lnSpc>
-              <a:spcBef>
-                <a:spcPts val="1000"/>
-              </a:spcBef>
-              <a:spcAft>
-                <a:spcPts val="1000"/>
-              </a:spcAft>
-              <a:defRPr sz="2000">
+                <a:spcPct val="120000"/>
+              </a:lnSpc>
+              <a:spcBef>
+                <a:spcPts val="600"/>
+              </a:spcBef>
+              <a:spcAft>
+                <a:spcPts val="600"/>
+              </a:spcAft>
+              <a:defRPr sz="1600">
                 <a:solidFill>
                   <a:srgbClr val="0F172A"/>
                 </a:solidFill>
@@ -6406,15 +6250,15 @@
           <a:p>
             <a:pPr>
               <a:lnSpc>
-                <a:spcPct val="140000"/>
-              </a:lnSpc>
-              <a:spcBef>
-                <a:spcPts val="1000"/>
-              </a:spcBef>
-              <a:spcAft>
-                <a:spcPts val="1000"/>
-              </a:spcAft>
-              <a:defRPr sz="2000">
+                <a:spcPct val="120000"/>
+              </a:lnSpc>
+              <a:spcBef>
+                <a:spcPts val="600"/>
+              </a:spcBef>
+              <a:spcAft>
+                <a:spcPts val="600"/>
+              </a:spcAft>
+              <a:defRPr sz="1600">
                 <a:solidFill>
                   <a:srgbClr val="0F172A"/>
                 </a:solidFill>
@@ -6427,54 +6271,33 @@
           <a:p>
             <a:pPr>
               <a:lnSpc>
-                <a:spcPct val="140000"/>
-              </a:lnSpc>
-              <a:spcBef>
-                <a:spcPts val="1000"/>
-              </a:spcBef>
-              <a:spcAft>
-                <a:spcPts val="1000"/>
-              </a:spcAft>
-              <a:defRPr sz="2000">
-                <a:solidFill>
-                  <a:srgbClr val="0F172A"/>
-                </a:solidFill>
-              </a:defRPr>
-            </a:pPr>
-            <a:r>
-              <a:t>• 適合申請需要創新思維的計畫</a:t>
-            </a:r>
-          </a:p>
-          <a:p>
-            <a:pPr>
-              <a:lnSpc>
-                <a:spcPct val="140000"/>
-              </a:lnSpc>
-              <a:spcBef>
-                <a:spcPts val="1000"/>
-              </a:spcBef>
-              <a:spcAft>
-                <a:spcPts val="1000"/>
-              </a:spcAft>
-              <a:defRPr sz="2000">
-                <a:solidFill>
-                  <a:srgbClr val="0F172A"/>
-                </a:solidFill>
-              </a:defRPr>
-            </a:pPr>
-          </a:p>
-          <a:p>
-            <a:pPr>
-              <a:lnSpc>
-                <a:spcPct val="140000"/>
-              </a:lnSpc>
-              <a:spcBef>
-                <a:spcPts val="1000"/>
-              </a:spcBef>
-              <a:spcAft>
-                <a:spcPts val="1000"/>
-              </a:spcAft>
-              <a:defRPr sz="2200" b="1">
+                <a:spcPct val="120000"/>
+              </a:lnSpc>
+              <a:spcBef>
+                <a:spcPts val="600"/>
+              </a:spcBef>
+              <a:spcAft>
+                <a:spcPts val="600"/>
+              </a:spcAft>
+              <a:defRPr sz="1600">
+                <a:solidFill>
+                  <a:srgbClr val="0F172A"/>
+                </a:solidFill>
+              </a:defRPr>
+            </a:pPr>
+          </a:p>
+          <a:p>
+            <a:pPr>
+              <a:lnSpc>
+                <a:spcPct val="120000"/>
+              </a:lnSpc>
+              <a:spcBef>
+                <a:spcPts val="600"/>
+              </a:spcBef>
+              <a:spcAft>
+                <a:spcPts val="600"/>
+              </a:spcAft>
+              <a:defRPr sz="1800" b="1">
                 <a:solidFill>
                   <a:srgbClr val="1E3A8A"/>
                 </a:solidFill>
@@ -6487,15 +6310,15 @@
           <a:p>
             <a:pPr>
               <a:lnSpc>
-                <a:spcPct val="140000"/>
-              </a:lnSpc>
-              <a:spcBef>
-                <a:spcPts val="1000"/>
-              </a:spcBef>
-              <a:spcAft>
-                <a:spcPts val="1000"/>
-              </a:spcAft>
-              <a:defRPr sz="2000">
+                <a:spcPct val="120000"/>
+              </a:lnSpc>
+              <a:spcBef>
+                <a:spcPts val="600"/>
+              </a:spcBef>
+              <a:spcAft>
+                <a:spcPts val="600"/>
+              </a:spcAft>
+              <a:defRPr sz="1600">
                 <a:solidFill>
                   <a:srgbClr val="0F172A"/>
                 </a:solidFill>
@@ -6508,15 +6331,15 @@
           <a:p>
             <a:pPr>
               <a:lnSpc>
-                <a:spcPct val="140000"/>
-              </a:lnSpc>
-              <a:spcBef>
-                <a:spcPts val="1000"/>
-              </a:spcBef>
-              <a:spcAft>
-                <a:spcPts val="1000"/>
-              </a:spcAft>
-              <a:defRPr sz="2000">
+                <a:spcPct val="120000"/>
+              </a:lnSpc>
+              <a:spcBef>
+                <a:spcPts val="600"/>
+              </a:spcBef>
+              <a:spcAft>
+                <a:spcPts val="600"/>
+              </a:spcAft>
+              <a:defRPr sz="1600">
                 <a:solidFill>
                   <a:srgbClr val="0F172A"/>
                 </a:solidFill>
@@ -6529,15 +6352,15 @@
           <a:p>
             <a:pPr>
               <a:lnSpc>
-                <a:spcPct val="140000"/>
-              </a:lnSpc>
-              <a:spcBef>
-                <a:spcPts val="1000"/>
-              </a:spcBef>
-              <a:spcAft>
-                <a:spcPts val="1000"/>
-              </a:spcAft>
-              <a:defRPr sz="2000">
+                <a:spcPct val="120000"/>
+              </a:lnSpc>
+              <a:spcBef>
+                <a:spcPts val="600"/>
+              </a:spcBef>
+              <a:spcAft>
+                <a:spcPts val="600"/>
+              </a:spcAft>
+              <a:defRPr sz="1600">
                 <a:solidFill>
                   <a:srgbClr val="0F172A"/>
                 </a:solidFill>
@@ -6550,54 +6373,54 @@
           <a:p>
             <a:pPr>
               <a:lnSpc>
-                <a:spcPct val="140000"/>
-              </a:lnSpc>
-              <a:spcBef>
-                <a:spcPts val="1000"/>
-              </a:spcBef>
-              <a:spcAft>
-                <a:spcPts val="1000"/>
-              </a:spcAft>
-              <a:defRPr sz="2000">
-                <a:solidFill>
-                  <a:srgbClr val="0F172A"/>
-                </a:solidFill>
-              </a:defRPr>
-            </a:pPr>
-            <a:r>
-              <a:t>4. 參加國際競賽（如太空競賽）拓展人脈</a:t>
-            </a:r>
-          </a:p>
-          <a:p>
-            <a:pPr>
-              <a:lnSpc>
-                <a:spcPct val="140000"/>
-              </a:lnSpc>
-              <a:spcBef>
-                <a:spcPts val="1000"/>
-              </a:spcBef>
-              <a:spcAft>
-                <a:spcPts val="1000"/>
-              </a:spcAft>
-              <a:defRPr sz="2000">
-                <a:solidFill>
-                  <a:srgbClr val="0F172A"/>
-                </a:solidFill>
-              </a:defRPr>
-            </a:pPr>
-          </a:p>
-          <a:p>
-            <a:pPr>
-              <a:lnSpc>
-                <a:spcPct val="140000"/>
-              </a:lnSpc>
-              <a:spcBef>
-                <a:spcPts val="1000"/>
-              </a:spcBef>
-              <a:spcAft>
-                <a:spcPts val="1000"/>
-              </a:spcAft>
-              <a:defRPr sz="2200" b="1">
+                <a:spcPct val="120000"/>
+              </a:lnSpc>
+              <a:spcBef>
+                <a:spcPts val="600"/>
+              </a:spcBef>
+              <a:spcAft>
+                <a:spcPts val="600"/>
+              </a:spcAft>
+              <a:defRPr sz="1600">
+                <a:solidFill>
+                  <a:srgbClr val="0F172A"/>
+                </a:solidFill>
+              </a:defRPr>
+            </a:pPr>
+            <a:r>
+              <a:t>4. 參加國際競賽拓展人脈</a:t>
+            </a:r>
+          </a:p>
+          <a:p>
+            <a:pPr>
+              <a:lnSpc>
+                <a:spcPct val="120000"/>
+              </a:lnSpc>
+              <a:spcBef>
+                <a:spcPts val="600"/>
+              </a:spcBef>
+              <a:spcAft>
+                <a:spcPts val="600"/>
+              </a:spcAft>
+              <a:defRPr sz="1600">
+                <a:solidFill>
+                  <a:srgbClr val="0F172A"/>
+                </a:solidFill>
+              </a:defRPr>
+            </a:pPr>
+          </a:p>
+          <a:p>
+            <a:pPr>
+              <a:lnSpc>
+                <a:spcPct val="120000"/>
+              </a:lnSpc>
+              <a:spcBef>
+                <a:spcPts val="600"/>
+              </a:spcBef>
+              <a:spcAft>
+                <a:spcPts val="600"/>
+              </a:spcAft>
+              <a:defRPr sz="1800" b="1">
                 <a:solidFill>
                   <a:srgbClr val="1E3A8A"/>
                 </a:solidFill>
@@ -6610,61 +6433,124 @@
           <a:p>
             <a:pPr>
               <a:lnSpc>
-                <a:spcPct val="140000"/>
-              </a:lnSpc>
-              <a:spcBef>
-                <a:spcPts val="1000"/>
-              </a:spcBef>
-              <a:spcAft>
-                <a:spcPts val="1000"/>
-              </a:spcAft>
-              <a:defRPr sz="2000">
-                <a:solidFill>
-                  <a:srgbClr val="0F172A"/>
-                </a:solidFill>
-              </a:defRPr>
-            </a:pPr>
-            <a:r>
-              <a:t>• 準備英文版履歷、提升GPA、考英文檢定、找指導教授討論計畫</a:t>
-            </a:r>
-          </a:p>
-          <a:p>
-            <a:pPr>
-              <a:lnSpc>
-                <a:spcPct val="140000"/>
-              </a:lnSpc>
-              <a:spcBef>
-                <a:spcPts val="1000"/>
-              </a:spcBef>
-              <a:spcAft>
-                <a:spcPts val="1000"/>
-              </a:spcAft>
-              <a:defRPr sz="2000">
-                <a:solidFill>
-                  <a:srgbClr val="0F172A"/>
-                </a:solidFill>
-              </a:defRPr>
-            </a:pPr>
-          </a:p>
-          <a:p>
-            <a:pPr>
-              <a:lnSpc>
-                <a:spcPct val="140000"/>
-              </a:lnSpc>
-              <a:spcBef>
-                <a:spcPts val="1000"/>
-              </a:spcBef>
-              <a:spcAft>
-                <a:spcPts val="1000"/>
-              </a:spcAft>
-              <a:defRPr sz="2200" b="1">
-                <a:solidFill>
-                  <a:srgbClr val="1E3A8A"/>
-                </a:solidFill>
-              </a:defRPr>
-            </a:pPr>
-            <a:r>
-              <a:t>【備註】大五/畢業生也能申請（透過學校推薦）</a:t>
+                <a:spcPct val="120000"/>
+              </a:lnSpc>
+              <a:spcBef>
+                <a:spcPts val="600"/>
+              </a:spcBef>
+              <a:spcAft>
+                <a:spcPts val="600"/>
+              </a:spcAft>
+              <a:defRPr sz="1600">
+                <a:solidFill>
+                  <a:srgbClr val="0F172A"/>
+                </a:solidFill>
+              </a:defRPr>
+            </a:pPr>
+            <a:r>
+              <a:t>• 準備英文版履歷</a:t>
+            </a:r>
+          </a:p>
+          <a:p>
+            <a:pPr>
+              <a:lnSpc>
+                <a:spcPct val="120000"/>
+              </a:lnSpc>
+              <a:spcBef>
+                <a:spcPts val="600"/>
+              </a:spcBef>
+              <a:spcAft>
+                <a:spcPts val="600"/>
+              </a:spcAft>
+              <a:defRPr sz="1600">
+                <a:solidFill>
+                  <a:srgbClr val="0F172A"/>
+                </a:solidFill>
+              </a:defRPr>
+            </a:pPr>
+            <a:r>
+              <a:t>• 提升GPA</a:t>
+            </a:r>
+          </a:p>
+          <a:p>
+            <a:pPr>
+              <a:lnSpc>
+                <a:spcPct val="120000"/>
+              </a:lnSpc>
+              <a:spcBef>
+                <a:spcPts val="600"/>
+              </a:spcBef>
+              <a:spcAft>
+                <a:spcPts val="600"/>
+              </a:spcAft>
+              <a:defRPr sz="1600">
+                <a:solidFill>
+                  <a:srgbClr val="0F172A"/>
+                </a:solidFill>
+              </a:defRPr>
+            </a:pPr>
+            <a:r>
+              <a:t>• 考英文檢定</a:t>
+            </a:r>
+          </a:p>
+          <a:p>
+            <a:pPr>
+              <a:lnSpc>
+                <a:spcPct val="120000"/>
+              </a:lnSpc>
+              <a:spcBef>
+                <a:spcPts val="600"/>
+              </a:spcBef>
+              <a:spcAft>
+                <a:spcPts val="600"/>
+              </a:spcAft>
+              <a:defRPr sz="1600">
+                <a:solidFill>
+                  <a:srgbClr val="0F172A"/>
+                </a:solidFill>
+              </a:defRPr>
+            </a:pPr>
+            <a:r>
+              <a:t>• 找指導教授討論計畫</a:t>
+            </a:r>
+          </a:p>
+          <a:p>
+            <a:pPr>
+              <a:lnSpc>
+                <a:spcPct val="120000"/>
+              </a:lnSpc>
+              <a:spcBef>
+                <a:spcPts val="600"/>
+              </a:spcBef>
+              <a:spcAft>
+                <a:spcPts val="600"/>
+              </a:spcAft>
+              <a:defRPr sz="1600">
+                <a:solidFill>
+                  <a:srgbClr val="0F172A"/>
+                </a:solidFill>
+              </a:defRPr>
+            </a:pPr>
+          </a:p>
+          <a:p>
+            <a:pPr>
+              <a:lnSpc>
+                <a:spcPct val="120000"/>
+              </a:lnSpc>
+              <a:spcBef>
+                <a:spcPts val="600"/>
+              </a:spcBef>
+              <a:spcAft>
+                <a:spcPts val="600"/>
+              </a:spcAft>
+              <a:defRPr sz="1600">
+                <a:solidFill>
+                  <a:srgbClr val="0F172A"/>
+                </a:solidFill>
+              </a:defRPr>
+            </a:pPr>
+            <a:r>
+              <a:t>大五/畢業生也能申請（透過學校推薦）</a:t>
             </a:r>
           </a:p>
         </p:txBody>
@@ -6695,8 +6581,8 @@
         </p:nvSpPr>
         <p:spPr>
           <a:xfrm>
-            <a:off x="731520" y="548640"/>
-            <a:ext cx="10728655" cy="822960"/>
+            <a:off x="914400" y="457200"/>
+            <a:ext cx="10362895" cy="640080"/>
           </a:xfrm>
           <a:prstGeom prst="rect">
             <a:avLst/>
@@ -6704,13 +6590,13 @@
           <a:noFill/>
         </p:spPr>
         <p:txBody>
-          <a:bodyPr wrap="none">
+          <a:bodyPr wrap="square">
             <a:spAutoFit/>
           </a:bodyPr>
           <a:lstStyle/>
           <a:p>
             <a:pPr algn="ctr">
-              <a:defRPr sz="3600" b="1">
+              <a:defRPr sz="3200" b="1">
                 <a:solidFill>
                   <a:srgbClr val="1E3A8A"/>
                 </a:solidFill>
@@ -6730,8 +6616,8 @@
         </p:nvSpPr>
         <p:spPr>
           <a:xfrm>
-            <a:off x="4724704" y="1371600"/>
-            <a:ext cx="2743200" cy="45720"/>
+            <a:off x="5181904" y="1097280"/>
+            <a:ext cx="1828800" cy="36576"/>
           </a:xfrm>
           <a:prstGeom prst="rect">
             <a:avLst/>
@@ -6773,8 +6659,8 @@
         </p:nvSpPr>
         <p:spPr>
           <a:xfrm>
-            <a:off x="1371600" y="2011680"/>
-            <a:ext cx="9448495" cy="4389120"/>
+            <a:off x="1371600" y="1463040"/>
+            <a:ext cx="9448495" cy="5029200"/>
           </a:xfrm>
           <a:prstGeom prst="rect">
             <a:avLst/>
@@ -6782,22 +6668,22 @@
           <a:noFill/>
         </p:spPr>
         <p:txBody>
-          <a:bodyPr wrap="square" anchor="t">
+          <a:bodyPr wrap="square">
             <a:spAutoFit/>
           </a:bodyPr>
           <a:lstStyle/>
           <a:p>
             <a:pPr>
               <a:lnSpc>
-                <a:spcPct val="140000"/>
-              </a:lnSpc>
-              <a:spcBef>
-                <a:spcPts val="0"/>
-              </a:spcBef>
-              <a:spcAft>
-                <a:spcPts val="1000"/>
-              </a:spcAft>
-              <a:defRPr sz="2200" b="1">
+                <a:spcPct val="120000"/>
+              </a:lnSpc>
+              <a:spcBef>
+                <a:spcPts val="600"/>
+              </a:spcBef>
+              <a:spcAft>
+                <a:spcPts val="600"/>
+              </a:spcAft>
+              <a:defRPr sz="1800" b="1">
                 <a:solidFill>
                   <a:srgbClr val="1E3A8A"/>
                 </a:solidFill>
@@ -6810,33 +6696,33 @@
           <a:p>
             <a:pPr>
               <a:lnSpc>
-                <a:spcPct val="140000"/>
-              </a:lnSpc>
-              <a:spcBef>
-                <a:spcPts val="1000"/>
-              </a:spcBef>
-              <a:spcAft>
-                <a:spcPts val="1000"/>
-              </a:spcAft>
-              <a:defRPr sz="2000">
-                <a:solidFill>
-                  <a:srgbClr val="0F172A"/>
-                </a:solidFill>
-              </a:defRPr>
-            </a:pPr>
-          </a:p>
-          <a:p>
-            <a:pPr>
-              <a:lnSpc>
-                <a:spcPct val="140000"/>
-              </a:lnSpc>
-              <a:spcBef>
-                <a:spcPts val="1000"/>
-              </a:spcBef>
-              <a:spcAft>
-                <a:spcPts val="1000"/>
-              </a:spcAft>
-              <a:defRPr sz="2200" b="1">
+                <a:spcPct val="120000"/>
+              </a:lnSpc>
+              <a:spcBef>
+                <a:spcPts val="600"/>
+              </a:spcBef>
+              <a:spcAft>
+                <a:spcPts val="600"/>
+              </a:spcAft>
+              <a:defRPr sz="1600">
+                <a:solidFill>
+                  <a:srgbClr val="0F172A"/>
+                </a:solidFill>
+              </a:defRPr>
+            </a:pPr>
+          </a:p>
+          <a:p>
+            <a:pPr>
+              <a:lnSpc>
+                <a:spcPct val="120000"/>
+              </a:lnSpc>
+              <a:spcBef>
+                <a:spcPts val="600"/>
+              </a:spcBef>
+              <a:spcAft>
+                <a:spcPts val="600"/>
+              </a:spcAft>
+              <a:defRPr sz="1800" b="1">
                 <a:solidFill>
                   <a:srgbClr val="1E3A8A"/>
                 </a:solidFill>
@@ -6849,33 +6735,33 @@
           <a:p>
             <a:pPr>
               <a:lnSpc>
-                <a:spcPct val="140000"/>
-              </a:lnSpc>
-              <a:spcBef>
-                <a:spcPts val="1000"/>
-              </a:spcBef>
-              <a:spcAft>
-                <a:spcPts val="1000"/>
-              </a:spcAft>
-              <a:defRPr sz="2000">
-                <a:solidFill>
-                  <a:srgbClr val="0F172A"/>
-                </a:solidFill>
-              </a:defRPr>
-            </a:pPr>
-          </a:p>
-          <a:p>
-            <a:pPr>
-              <a:lnSpc>
-                <a:spcPct val="140000"/>
-              </a:lnSpc>
-              <a:spcBef>
-                <a:spcPts val="1000"/>
-              </a:spcBef>
-              <a:spcAft>
-                <a:spcPts val="1000"/>
-              </a:spcAft>
-              <a:defRPr sz="2200" b="1">
+                <a:spcPct val="120000"/>
+              </a:lnSpc>
+              <a:spcBef>
+                <a:spcPts val="600"/>
+              </a:spcBef>
+              <a:spcAft>
+                <a:spcPts val="600"/>
+              </a:spcAft>
+              <a:defRPr sz="1600">
+                <a:solidFill>
+                  <a:srgbClr val="0F172A"/>
+                </a:solidFill>
+              </a:defRPr>
+            </a:pPr>
+          </a:p>
+          <a:p>
+            <a:pPr>
+              <a:lnSpc>
+                <a:spcPct val="120000"/>
+              </a:lnSpc>
+              <a:spcBef>
+                <a:spcPts val="600"/>
+              </a:spcBef>
+              <a:spcAft>
+                <a:spcPts val="600"/>
+              </a:spcAft>
+              <a:defRPr sz="1800" b="1">
                 <a:solidFill>
                   <a:srgbClr val="1E3A8A"/>
                 </a:solidFill>
@@ -6888,33 +6774,33 @@
           <a:p>
             <a:pPr>
               <a:lnSpc>
-                <a:spcPct val="140000"/>
-              </a:lnSpc>
-              <a:spcBef>
-                <a:spcPts val="1000"/>
-              </a:spcBef>
-              <a:spcAft>
-                <a:spcPts val="1000"/>
-              </a:spcAft>
-              <a:defRPr sz="2000">
-                <a:solidFill>
-                  <a:srgbClr val="0F172A"/>
-                </a:solidFill>
-              </a:defRPr>
-            </a:pPr>
-          </a:p>
-          <a:p>
-            <a:pPr>
-              <a:lnSpc>
-                <a:spcPct val="140000"/>
-              </a:lnSpc>
-              <a:spcBef>
-                <a:spcPts val="1000"/>
-              </a:spcBef>
-              <a:spcAft>
-                <a:spcPts val="1000"/>
-              </a:spcAft>
-              <a:defRPr sz="2200" b="1">
+                <a:spcPct val="120000"/>
+              </a:lnSpc>
+              <a:spcBef>
+                <a:spcPts val="600"/>
+              </a:spcBef>
+              <a:spcAft>
+                <a:spcPts val="600"/>
+              </a:spcAft>
+              <a:defRPr sz="1600">
+                <a:solidFill>
+                  <a:srgbClr val="0F172A"/>
+                </a:solidFill>
+              </a:defRPr>
+            </a:pPr>
+          </a:p>
+          <a:p>
+            <a:pPr>
+              <a:lnSpc>
+                <a:spcPct val="120000"/>
+              </a:lnSpc>
+              <a:spcBef>
+                <a:spcPts val="600"/>
+              </a:spcBef>
+              <a:spcAft>
+                <a:spcPts val="600"/>
+              </a:spcAft>
+              <a:defRPr sz="1800" b="1">
                 <a:solidFill>
                   <a:srgbClr val="1E3A8A"/>
                 </a:solidFill>
@@ -6927,33 +6813,33 @@
           <a:p>
             <a:pPr>
               <a:lnSpc>
-                <a:spcPct val="140000"/>
-              </a:lnSpc>
-              <a:spcBef>
-                <a:spcPts val="1000"/>
-              </a:spcBef>
-              <a:spcAft>
-                <a:spcPts val="1000"/>
-              </a:spcAft>
-              <a:defRPr sz="2000">
-                <a:solidFill>
-                  <a:srgbClr val="0F172A"/>
-                </a:solidFill>
-              </a:defRPr>
-            </a:pPr>
-          </a:p>
-          <a:p>
-            <a:pPr>
-              <a:lnSpc>
-                <a:spcPct val="140000"/>
-              </a:lnSpc>
-              <a:spcBef>
-                <a:spcPts val="1000"/>
-              </a:spcBef>
-              <a:spcAft>
-                <a:spcPts val="1000"/>
-              </a:spcAft>
-              <a:defRPr sz="2200" b="1">
+                <a:spcPct val="120000"/>
+              </a:lnSpc>
+              <a:spcBef>
+                <a:spcPts val="600"/>
+              </a:spcBef>
+              <a:spcAft>
+                <a:spcPts val="600"/>
+              </a:spcAft>
+              <a:defRPr sz="1600">
+                <a:solidFill>
+                  <a:srgbClr val="0F172A"/>
+                </a:solidFill>
+              </a:defRPr>
+            </a:pPr>
+          </a:p>
+          <a:p>
+            <a:pPr>
+              <a:lnSpc>
+                <a:spcPct val="120000"/>
+              </a:lnSpc>
+              <a:spcBef>
+                <a:spcPts val="600"/>
+              </a:spcBef>
+              <a:spcAft>
+                <a:spcPts val="600"/>
+              </a:spcAft>
+              <a:defRPr sz="1800" b="1">
                 <a:solidFill>
                   <a:srgbClr val="1E3A8A"/>
                 </a:solidFill>
@@ -6966,33 +6852,33 @@
           <a:p>
             <a:pPr>
               <a:lnSpc>
-                <a:spcPct val="140000"/>
-              </a:lnSpc>
-              <a:spcBef>
-                <a:spcPts val="1000"/>
-              </a:spcBef>
-              <a:spcAft>
-                <a:spcPts val="1000"/>
-              </a:spcAft>
-              <a:defRPr sz="2000">
-                <a:solidFill>
-                  <a:srgbClr val="0F172A"/>
-                </a:solidFill>
-              </a:defRPr>
-            </a:pPr>
-          </a:p>
-          <a:p>
-            <a:pPr>
-              <a:lnSpc>
-                <a:spcPct val="140000"/>
-              </a:lnSpc>
-              <a:spcBef>
-                <a:spcPts val="1000"/>
-              </a:spcBef>
-              <a:spcAft>
-                <a:spcPts val="1000"/>
-              </a:spcAft>
-              <a:defRPr sz="2200" b="1">
+                <a:spcPct val="120000"/>
+              </a:lnSpc>
+              <a:spcBef>
+                <a:spcPts val="600"/>
+              </a:spcBef>
+              <a:spcAft>
+                <a:spcPts val="600"/>
+              </a:spcAft>
+              <a:defRPr sz="1600">
+                <a:solidFill>
+                  <a:srgbClr val="0F172A"/>
+                </a:solidFill>
+              </a:defRPr>
+            </a:pPr>
+          </a:p>
+          <a:p>
+            <a:pPr>
+              <a:lnSpc>
+                <a:spcPct val="120000"/>
+              </a:lnSpc>
+              <a:spcBef>
+                <a:spcPts val="600"/>
+              </a:spcBef>
+              <a:spcAft>
+                <a:spcPts val="600"/>
+              </a:spcAft>
+              <a:defRPr sz="1800" b="1">
                 <a:solidFill>
                   <a:srgbClr val="1E3A8A"/>
                 </a:solidFill>
@@ -7005,33 +6891,33 @@
           <a:p>
             <a:pPr>
               <a:lnSpc>
-                <a:spcPct val="140000"/>
-              </a:lnSpc>
-              <a:spcBef>
-                <a:spcPts val="1000"/>
-              </a:spcBef>
-              <a:spcAft>
-                <a:spcPts val="1000"/>
-              </a:spcAft>
-              <a:defRPr sz="2000">
-                <a:solidFill>
-                  <a:srgbClr val="0F172A"/>
-                </a:solidFill>
-              </a:defRPr>
-            </a:pPr>
-          </a:p>
-          <a:p>
-            <a:pPr>
-              <a:lnSpc>
-                <a:spcPct val="140000"/>
-              </a:lnSpc>
-              <a:spcBef>
-                <a:spcPts val="1000"/>
-              </a:spcBef>
-              <a:spcAft>
-                <a:spcPts val="1000"/>
-              </a:spcAft>
-              <a:defRPr sz="2200" b="1">
+                <a:spcPct val="120000"/>
+              </a:lnSpc>
+              <a:spcBef>
+                <a:spcPts val="600"/>
+              </a:spcBef>
+              <a:spcAft>
+                <a:spcPts val="600"/>
+              </a:spcAft>
+              <a:defRPr sz="1600">
+                <a:solidFill>
+                  <a:srgbClr val="0F172A"/>
+                </a:solidFill>
+              </a:defRPr>
+            </a:pPr>
+          </a:p>
+          <a:p>
+            <a:pPr>
+              <a:lnSpc>
+                <a:spcPct val="120000"/>
+              </a:lnSpc>
+              <a:spcBef>
+                <a:spcPts val="600"/>
+              </a:spcBef>
+              <a:spcAft>
+                <a:spcPts val="600"/>
+              </a:spcAft>
+              <a:defRPr sz="1800" b="1">
                 <a:solidFill>
                   <a:srgbClr val="1E3A8A"/>
                 </a:solidFill>
@@ -7044,33 +6930,33 @@
           <a:p>
             <a:pPr>
               <a:lnSpc>
-                <a:spcPct val="140000"/>
-              </a:lnSpc>
-              <a:spcBef>
-                <a:spcPts val="1000"/>
-              </a:spcBef>
-              <a:spcAft>
-                <a:spcPts val="1000"/>
-              </a:spcAft>
-              <a:defRPr sz="2000">
-                <a:solidFill>
-                  <a:srgbClr val="0F172A"/>
-                </a:solidFill>
-              </a:defRPr>
-            </a:pPr>
-          </a:p>
-          <a:p>
-            <a:pPr>
-              <a:lnSpc>
-                <a:spcPct val="140000"/>
-              </a:lnSpc>
-              <a:spcBef>
-                <a:spcPts val="1000"/>
-              </a:spcBef>
-              <a:spcAft>
-                <a:spcPts val="1000"/>
-              </a:spcAft>
-              <a:defRPr sz="2200" b="1">
+                <a:spcPct val="120000"/>
+              </a:lnSpc>
+              <a:spcBef>
+                <a:spcPts val="600"/>
+              </a:spcBef>
+              <a:spcAft>
+                <a:spcPts val="600"/>
+              </a:spcAft>
+              <a:defRPr sz="1600">
+                <a:solidFill>
+                  <a:srgbClr val="0F172A"/>
+                </a:solidFill>
+              </a:defRPr>
+            </a:pPr>
+          </a:p>
+          <a:p>
+            <a:pPr>
+              <a:lnSpc>
+                <a:spcPct val="120000"/>
+              </a:lnSpc>
+              <a:spcBef>
+                <a:spcPts val="600"/>
+              </a:spcBef>
+              <a:spcAft>
+                <a:spcPts val="600"/>
+              </a:spcAft>
+              <a:defRPr sz="1800" b="1">
                 <a:solidFill>
                   <a:srgbClr val="1E3A8A"/>
                 </a:solidFill>
@@ -7108,8 +6994,8 @@
         </p:nvSpPr>
         <p:spPr>
           <a:xfrm>
-            <a:off x="731520" y="548640"/>
-            <a:ext cx="10728655" cy="822960"/>
+            <a:off x="914400" y="457200"/>
+            <a:ext cx="10362895" cy="640080"/>
           </a:xfrm>
           <a:prstGeom prst="rect">
             <a:avLst/>
@@ -7117,13 +7003,13 @@
           <a:noFill/>
         </p:spPr>
         <p:txBody>
-          <a:bodyPr wrap="none">
+          <a:bodyPr wrap="square">
             <a:spAutoFit/>
           </a:bodyPr>
           <a:lstStyle/>
           <a:p>
             <a:pPr algn="ctr">
-              <a:defRPr sz="3600" b="1">
+              <a:defRPr sz="3200" b="1">
                 <a:solidFill>
                   <a:srgbClr val="1E3A8A"/>
                 </a:solidFill>
@@ -7143,8 +7029,8 @@
         </p:nvSpPr>
         <p:spPr>
           <a:xfrm>
-            <a:off x="4724704" y="1371600"/>
-            <a:ext cx="2743200" cy="45720"/>
+            <a:off x="5181904" y="1097280"/>
+            <a:ext cx="1828800" cy="36576"/>
           </a:xfrm>
           <a:prstGeom prst="rect">
             <a:avLst/>
@@ -7186,8 +7072,8 @@
         </p:nvSpPr>
         <p:spPr>
           <a:xfrm>
-            <a:off x="1371600" y="2011680"/>
-            <a:ext cx="9448495" cy="4389120"/>
+            <a:off x="1371600" y="1463040"/>
+            <a:ext cx="9448495" cy="5029200"/>
           </a:xfrm>
           <a:prstGeom prst="rect">
             <a:avLst/>
@@ -7195,22 +7081,22 @@
           <a:noFill/>
         </p:spPr>
         <p:txBody>
-          <a:bodyPr wrap="square" anchor="t">
+          <a:bodyPr wrap="square">
             <a:spAutoFit/>
           </a:bodyPr>
           <a:lstStyle/>
           <a:p>
             <a:pPr>
               <a:lnSpc>
-                <a:spcPct val="140000"/>
-              </a:lnSpc>
-              <a:spcBef>
-                <a:spcPts val="0"/>
-              </a:spcBef>
-              <a:spcAft>
-                <a:spcPts val="1000"/>
-              </a:spcAft>
-              <a:defRPr sz="2000">
+                <a:spcPct val="120000"/>
+              </a:lnSpc>
+              <a:spcBef>
+                <a:spcPts val="600"/>
+              </a:spcBef>
+              <a:spcAft>
+                <a:spcPts val="600"/>
+              </a:spcAft>
+              <a:defRPr sz="1600">
                 <a:solidFill>
                   <a:srgbClr val="0F172A"/>
                 </a:solidFill>
@@ -7223,54 +7109,54 @@
           <a:p>
             <a:pPr>
               <a:lnSpc>
-                <a:spcPct val="140000"/>
-              </a:lnSpc>
-              <a:spcBef>
-                <a:spcPts val="1000"/>
-              </a:spcBef>
-              <a:spcAft>
-                <a:spcPts val="1000"/>
-              </a:spcAft>
-              <a:defRPr sz="2000">
-                <a:solidFill>
-                  <a:srgbClr val="0F172A"/>
-                </a:solidFill>
-              </a:defRPr>
-            </a:pPr>
-            <a:r>
-              <a:t>A: 沒有絕對標準，但越高越好。學海計畫各校標準不同。</a:t>
-            </a:r>
-          </a:p>
-          <a:p>
-            <a:pPr>
-              <a:lnSpc>
-                <a:spcPct val="140000"/>
-              </a:lnSpc>
-              <a:spcBef>
-                <a:spcPts val="1000"/>
-              </a:spcBef>
-              <a:spcAft>
-                <a:spcPts val="1000"/>
-              </a:spcAft>
-              <a:defRPr sz="2000">
-                <a:solidFill>
-                  <a:srgbClr val="0F172A"/>
-                </a:solidFill>
-              </a:defRPr>
-            </a:pPr>
-          </a:p>
-          <a:p>
-            <a:pPr>
-              <a:lnSpc>
-                <a:spcPct val="140000"/>
-              </a:lnSpc>
-              <a:spcBef>
-                <a:spcPts val="1000"/>
-              </a:spcBef>
-              <a:spcAft>
-                <a:spcPts val="1000"/>
-              </a:spcAft>
-              <a:defRPr sz="2000">
+                <a:spcPct val="120000"/>
+              </a:lnSpc>
+              <a:spcBef>
+                <a:spcPts val="600"/>
+              </a:spcBef>
+              <a:spcAft>
+                <a:spcPts val="600"/>
+              </a:spcAft>
+              <a:defRPr sz="1600">
+                <a:solidFill>
+                  <a:srgbClr val="0F172A"/>
+                </a:solidFill>
+              </a:defRPr>
+            </a:pPr>
+            <a:r>
+              <a:t>A: 沒有絕對標準，但越高越好。各校標準不同。</a:t>
+            </a:r>
+          </a:p>
+          <a:p>
+            <a:pPr>
+              <a:lnSpc>
+                <a:spcPct val="120000"/>
+              </a:lnSpc>
+              <a:spcBef>
+                <a:spcPts val="600"/>
+              </a:spcBef>
+              <a:spcAft>
+                <a:spcPts val="600"/>
+              </a:spcAft>
+              <a:defRPr sz="1600">
+                <a:solidFill>
+                  <a:srgbClr val="0F172A"/>
+                </a:solidFill>
+              </a:defRPr>
+            </a:pPr>
+          </a:p>
+          <a:p>
+            <a:pPr>
+              <a:lnSpc>
+                <a:spcPct val="120000"/>
+              </a:lnSpc>
+              <a:spcBef>
+                <a:spcPts val="600"/>
+              </a:spcBef>
+              <a:spcAft>
+                <a:spcPts val="600"/>
+              </a:spcAft>
+              <a:defRPr sz="1600">
                 <a:solidFill>
                   <a:srgbClr val="0F172A"/>
                 </a:solidFill>
@@ -7283,15 +7169,15 @@
           <a:p>
             <a:pPr>
               <a:lnSpc>
-                <a:spcPct val="140000"/>
-              </a:lnSpc>
-              <a:spcBef>
-                <a:spcPts val="1000"/>
-              </a:spcBef>
-              <a:spcAft>
-                <a:spcPts val="1000"/>
-              </a:spcAft>
-              <a:defRPr sz="2000">
+                <a:spcPct val="120000"/>
+              </a:lnSpc>
+              <a:spcBef>
+                <a:spcPts val="600"/>
+              </a:spcBef>
+              <a:spcAft>
+                <a:spcPts val="600"/>
+              </a:spcAft>
+              <a:defRPr sz="1600">
                 <a:solidFill>
                   <a:srgbClr val="0F172A"/>
                 </a:solidFill>
@@ -7304,33 +7190,33 @@
           <a:p>
             <a:pPr>
               <a:lnSpc>
-                <a:spcPct val="140000"/>
-              </a:lnSpc>
-              <a:spcBef>
-                <a:spcPts val="1000"/>
-              </a:spcBef>
-              <a:spcAft>
-                <a:spcPts val="1000"/>
-              </a:spcAft>
-              <a:defRPr sz="2000">
-                <a:solidFill>
-                  <a:srgbClr val="0F172A"/>
-                </a:solidFill>
-              </a:defRPr>
-            </a:pPr>
-          </a:p>
-          <a:p>
-            <a:pPr>
-              <a:lnSpc>
-                <a:spcPct val="140000"/>
-              </a:lnSpc>
-              <a:spcBef>
-                <a:spcPts val="1000"/>
-              </a:spcBef>
-              <a:spcAft>
-                <a:spcPts val="1000"/>
-              </a:spcAft>
-              <a:defRPr sz="2000">
+                <a:spcPct val="120000"/>
+              </a:lnSpc>
+              <a:spcBef>
+                <a:spcPts val="600"/>
+              </a:spcBef>
+              <a:spcAft>
+                <a:spcPts val="600"/>
+              </a:spcAft>
+              <a:defRPr sz="1600">
+                <a:solidFill>
+                  <a:srgbClr val="0F172A"/>
+                </a:solidFill>
+              </a:defRPr>
+            </a:pPr>
+          </a:p>
+          <a:p>
+            <a:pPr>
+              <a:lnSpc>
+                <a:spcPct val="120000"/>
+              </a:lnSpc>
+              <a:spcBef>
+                <a:spcPts val="600"/>
+              </a:spcBef>
+              <a:spcAft>
+                <a:spcPts val="600"/>
+              </a:spcAft>
+              <a:defRPr sz="1600">
                 <a:solidFill>
                   <a:srgbClr val="0F172A"/>
                 </a:solidFill>
@@ -7343,15 +7229,15 @@
           <a:p>
             <a:pPr>
               <a:lnSpc>
-                <a:spcPct val="140000"/>
-              </a:lnSpc>
-              <a:spcBef>
-                <a:spcPts val="1000"/>
-              </a:spcBef>
-              <a:spcAft>
-                <a:spcPts val="1000"/>
-              </a:spcAft>
-              <a:defRPr sz="2000">
+                <a:spcPct val="120000"/>
+              </a:lnSpc>
+              <a:spcBef>
+                <a:spcPts val="600"/>
+              </a:spcBef>
+              <a:spcAft>
+                <a:spcPts val="600"/>
+              </a:spcAft>
+              <a:defRPr sz="1600">
                 <a:solidFill>
                   <a:srgbClr val="0F172A"/>
                 </a:solidFill>
@@ -7364,33 +7250,33 @@
           <a:p>
             <a:pPr>
               <a:lnSpc>
-                <a:spcPct val="140000"/>
-              </a:lnSpc>
-              <a:spcBef>
-                <a:spcPts val="1000"/>
-              </a:spcBef>
-              <a:spcAft>
-                <a:spcPts val="1000"/>
-              </a:spcAft>
-              <a:defRPr sz="2000">
-                <a:solidFill>
-                  <a:srgbClr val="0F172A"/>
-                </a:solidFill>
-              </a:defRPr>
-            </a:pPr>
-          </a:p>
-          <a:p>
-            <a:pPr>
-              <a:lnSpc>
-                <a:spcPct val="140000"/>
-              </a:lnSpc>
-              <a:spcBef>
-                <a:spcPts val="1000"/>
-              </a:spcBef>
-              <a:spcAft>
-                <a:spcPts val="1000"/>
-              </a:spcAft>
-              <a:defRPr sz="2000">
+                <a:spcPct val="120000"/>
+              </a:lnSpc>
+              <a:spcBef>
+                <a:spcPts val="600"/>
+              </a:spcBef>
+              <a:spcAft>
+                <a:spcPts val="600"/>
+              </a:spcAft>
+              <a:defRPr sz="1600">
+                <a:solidFill>
+                  <a:srgbClr val="0F172A"/>
+                </a:solidFill>
+              </a:defRPr>
+            </a:pPr>
+          </a:p>
+          <a:p>
+            <a:pPr>
+              <a:lnSpc>
+                <a:spcPct val="120000"/>
+              </a:lnSpc>
+              <a:spcBef>
+                <a:spcPts val="600"/>
+              </a:spcBef>
+              <a:spcAft>
+                <a:spcPts val="600"/>
+              </a:spcAft>
+              <a:defRPr sz="1600">
                 <a:solidFill>
                   <a:srgbClr val="0F172A"/>
                 </a:solidFill>
@@ -7403,54 +7289,54 @@
           <a:p>
             <a:pPr>
               <a:lnSpc>
-                <a:spcPct val="140000"/>
-              </a:lnSpc>
-              <a:spcBef>
-                <a:spcPts val="1000"/>
-              </a:spcBef>
-              <a:spcAft>
-                <a:spcPts val="1000"/>
-              </a:spcAft>
-              <a:defRPr sz="2000">
-                <a:solidFill>
-                  <a:srgbClr val="0F172A"/>
-                </a:solidFill>
-              </a:defRPr>
-            </a:pPr>
-            <a:r>
-              <a:t>A: 視國家而定。學海計畫補助5-30萬，弱勢優秀生可全額。</a:t>
-            </a:r>
-          </a:p>
-          <a:p>
-            <a:pPr>
-              <a:lnSpc>
-                <a:spcPct val="140000"/>
-              </a:lnSpc>
-              <a:spcBef>
-                <a:spcPts val="1000"/>
-              </a:spcBef>
-              <a:spcAft>
-                <a:spcPts val="1000"/>
-              </a:spcAft>
-              <a:defRPr sz="2000">
-                <a:solidFill>
-                  <a:srgbClr val="0F172A"/>
-                </a:solidFill>
-              </a:defRPr>
-            </a:pPr>
-          </a:p>
-          <a:p>
-            <a:pPr>
-              <a:lnSpc>
-                <a:spcPct val="140000"/>
-              </a:lnSpc>
-              <a:spcBef>
-                <a:spcPts val="1000"/>
-              </a:spcBef>
-              <a:spcAft>
-                <a:spcPts val="1000"/>
-              </a:spcAft>
-              <a:defRPr sz="2000">
+                <a:spcPct val="120000"/>
+              </a:lnSpc>
+              <a:spcBef>
+                <a:spcPts val="600"/>
+              </a:spcBef>
+              <a:spcAft>
+                <a:spcPts val="600"/>
+              </a:spcAft>
+              <a:defRPr sz="1600">
+                <a:solidFill>
+                  <a:srgbClr val="0F172A"/>
+                </a:solidFill>
+              </a:defRPr>
+            </a:pPr>
+            <a:r>
+              <a:t>A: 視國家而定。學海計畫補助5-30萬。</a:t>
+            </a:r>
+          </a:p>
+          <a:p>
+            <a:pPr>
+              <a:lnSpc>
+                <a:spcPct val="120000"/>
+              </a:lnSpc>
+              <a:spcBef>
+                <a:spcPts val="600"/>
+              </a:spcBef>
+              <a:spcAft>
+                <a:spcPts val="600"/>
+              </a:spcAft>
+              <a:defRPr sz="1600">
+                <a:solidFill>
+                  <a:srgbClr val="0F172A"/>
+                </a:solidFill>
+              </a:defRPr>
+            </a:pPr>
+          </a:p>
+          <a:p>
+            <a:pPr>
+              <a:lnSpc>
+                <a:spcPct val="120000"/>
+              </a:lnSpc>
+              <a:spcBef>
+                <a:spcPts val="600"/>
+              </a:spcBef>
+              <a:spcAft>
+                <a:spcPts val="600"/>
+              </a:spcAft>
+              <a:defRPr sz="1600">
                 <a:solidFill>
                   <a:srgbClr val="0F172A"/>
                 </a:solidFill>
@@ -7463,15 +7349,15 @@
           <a:p>
             <a:pPr>
               <a:lnSpc>
-                <a:spcPct val="140000"/>
-              </a:lnSpc>
-              <a:spcBef>
-                <a:spcPts val="1000"/>
-              </a:spcBef>
-              <a:spcAft>
-                <a:spcPts val="1000"/>
-              </a:spcAft>
-              <a:defRPr sz="2000">
+                <a:spcPct val="120000"/>
+              </a:lnSpc>
+              <a:spcBef>
+                <a:spcPts val="600"/>
+              </a:spcBef>
+              <a:spcAft>
+                <a:spcPts val="600"/>
+              </a:spcAft>
+              <a:defRPr sz="1600">
                 <a:solidFill>
                   <a:srgbClr val="0F172A"/>
                 </a:solidFill>
@@ -7553,7 +7439,7 @@
         <p:spPr>
           <a:xfrm>
             <a:off x="914400" y="2743200"/>
-            <a:ext cx="10362895" cy="1371600"/>
+            <a:ext cx="10362895" cy="1097280"/>
           </a:xfrm>
           <a:prstGeom prst="rect">
             <a:avLst/>
@@ -7561,13 +7447,13 @@
           <a:noFill/>
         </p:spPr>
         <p:txBody>
-          <a:bodyPr wrap="none" anchor="ctr">
+          <a:bodyPr wrap="square">
             <a:spAutoFit/>
           </a:bodyPr>
           <a:lstStyle/>
           <a:p>
             <a:pPr algn="ctr">
-              <a:defRPr sz="4400" b="1">
+              <a:defRPr sz="3800" b="1">
                 <a:solidFill>
                   <a:srgbClr val="FFFFFF"/>
                 </a:solidFill>
@@ -7587,7 +7473,7 @@
         </p:nvSpPr>
         <p:spPr>
           <a:xfrm>
-            <a:off x="914400" y="4114800"/>
+            <a:off x="914400" y="3931920"/>
             <a:ext cx="10362895" cy="548640"/>
           </a:xfrm>
           <a:prstGeom prst="rect">
@@ -7602,7 +7488,7 @@
           <a:lstStyle/>
           <a:p>
             <a:pPr algn="ctr">
-              <a:defRPr sz="2000">
+              <a:defRPr sz="1800">
                 <a:solidFill>
                   <a:srgbClr val="3B82F6"/>
                 </a:solidFill>
@@ -7683,8 +7569,8 @@
         </p:nvSpPr>
         <p:spPr>
           <a:xfrm>
-            <a:off x="914400" y="2286000"/>
-            <a:ext cx="10362895" cy="1371600"/>
+            <a:off x="1828800" y="2286000"/>
+            <a:ext cx="8534095" cy="1097280"/>
           </a:xfrm>
           <a:prstGeom prst="rect">
             <a:avLst/>
@@ -7698,7 +7584,7 @@
           <a:lstStyle/>
           <a:p>
             <a:pPr algn="ctr">
-              <a:defRPr sz="5400" b="1">
+              <a:defRPr sz="4800" b="1">
                 <a:solidFill>
                   <a:srgbClr val="FFFFFF"/>
                 </a:solidFill>
@@ -7718,8 +7604,8 @@
         </p:nvSpPr>
         <p:spPr>
           <a:xfrm>
-            <a:off x="914400" y="3840480"/>
-            <a:ext cx="10362895" cy="731520"/>
+            <a:off x="1828800" y="3657600"/>
+            <a:ext cx="8534095" cy="731520"/>
           </a:xfrm>
           <a:prstGeom prst="rect">
             <a:avLst/>
@@ -7733,7 +7619,7 @@
           <a:lstStyle/>
           <a:p>
             <a:pPr algn="ctr">
-              <a:defRPr sz="2800">
+              <a:defRPr sz="2400">
                 <a:solidFill>
                   <a:srgbClr val="3B82F6"/>
                 </a:solidFill>
@@ -7753,8 +7639,8 @@
         </p:nvSpPr>
         <p:spPr>
           <a:xfrm>
-            <a:off x="914400" y="5029200"/>
-            <a:ext cx="10362895" cy="548640"/>
+            <a:off x="1828800" y="4754880"/>
+            <a:ext cx="8534095" cy="548640"/>
           </a:xfrm>
           <a:prstGeom prst="rect">
             <a:avLst/>
@@ -7768,7 +7654,7 @@
           <a:lstStyle/>
           <a:p>
             <a:pPr algn="ctr">
-              <a:defRPr sz="2400" i="1">
+              <a:defRPr sz="2200" i="1">
                 <a:solidFill>
                   <a:srgbClr val="EF4444"/>
                 </a:solidFill>
@@ -7806,8 +7692,8 @@
         </p:nvSpPr>
         <p:spPr>
           <a:xfrm>
-            <a:off x="731520" y="548640"/>
-            <a:ext cx="10728655" cy="822960"/>
+            <a:off x="914400" y="457200"/>
+            <a:ext cx="10362895" cy="640080"/>
           </a:xfrm>
           <a:prstGeom prst="rect">
             <a:avLst/>
@@ -7815,13 +7701,13 @@
           <a:noFill/>
         </p:spPr>
         <p:txBody>
-          <a:bodyPr wrap="none">
+          <a:bodyPr wrap="square">
             <a:spAutoFit/>
           </a:bodyPr>
           <a:lstStyle/>
           <a:p>
             <a:pPr algn="ctr">
-              <a:defRPr sz="3600" b="1">
+              <a:defRPr sz="3200" b="1">
                 <a:solidFill>
                   <a:srgbClr val="1E3A8A"/>
                 </a:solidFill>
@@ -7841,8 +7727,8 @@
         </p:nvSpPr>
         <p:spPr>
           <a:xfrm>
-            <a:off x="4724704" y="1371600"/>
-            <a:ext cx="2743200" cy="45720"/>
+            <a:off x="5181904" y="1097280"/>
+            <a:ext cx="1828800" cy="36576"/>
           </a:xfrm>
           <a:prstGeom prst="rect">
             <a:avLst/>
@@ -7884,8 +7770,8 @@
         </p:nvSpPr>
         <p:spPr>
           <a:xfrm>
-            <a:off x="1371600" y="2011680"/>
-            <a:ext cx="9448495" cy="4389120"/>
+            <a:off x="1371600" y="1463040"/>
+            <a:ext cx="9448495" cy="5029200"/>
           </a:xfrm>
           <a:prstGeom prst="rect">
             <a:avLst/>
@@ -7893,22 +7779,22 @@
           <a:noFill/>
         </p:spPr>
         <p:txBody>
-          <a:bodyPr wrap="square" anchor="t">
+          <a:bodyPr wrap="square">
             <a:spAutoFit/>
           </a:bodyPr>
           <a:lstStyle/>
           <a:p>
             <a:pPr>
               <a:lnSpc>
-                <a:spcPct val="140000"/>
-              </a:lnSpc>
-              <a:spcBef>
-                <a:spcPts val="0"/>
-              </a:spcBef>
-              <a:spcAft>
-                <a:spcPts val="1000"/>
-              </a:spcAft>
-              <a:defRPr sz="2000">
+                <a:spcPct val="120000"/>
+              </a:lnSpc>
+              <a:spcBef>
+                <a:spcPts val="600"/>
+              </a:spcBef>
+              <a:spcAft>
+                <a:spcPts val="600"/>
+              </a:spcAft>
+              <a:defRPr sz="1600">
                 <a:solidFill>
                   <a:srgbClr val="0F172A"/>
                 </a:solidFill>
@@ -7921,33 +7807,33 @@
           <a:p>
             <a:pPr>
               <a:lnSpc>
-                <a:spcPct val="140000"/>
-              </a:lnSpc>
-              <a:spcBef>
-                <a:spcPts val="1000"/>
-              </a:spcBef>
-              <a:spcAft>
-                <a:spcPts val="1000"/>
-              </a:spcAft>
-              <a:defRPr sz="2000">
-                <a:solidFill>
-                  <a:srgbClr val="0F172A"/>
-                </a:solidFill>
-              </a:defRPr>
-            </a:pPr>
-          </a:p>
-          <a:p>
-            <a:pPr>
-              <a:lnSpc>
-                <a:spcPct val="140000"/>
-              </a:lnSpc>
-              <a:spcBef>
-                <a:spcPts val="1000"/>
-              </a:spcBef>
-              <a:spcAft>
-                <a:spcPts val="1000"/>
-              </a:spcAft>
-              <a:defRPr sz="2000">
+                <a:spcPct val="120000"/>
+              </a:lnSpc>
+              <a:spcBef>
+                <a:spcPts val="600"/>
+              </a:spcBef>
+              <a:spcAft>
+                <a:spcPts val="600"/>
+              </a:spcAft>
+              <a:defRPr sz="1600">
+                <a:solidFill>
+                  <a:srgbClr val="0F172A"/>
+                </a:solidFill>
+              </a:defRPr>
+            </a:pPr>
+          </a:p>
+          <a:p>
+            <a:pPr>
+              <a:lnSpc>
+                <a:spcPct val="120000"/>
+              </a:lnSpc>
+              <a:spcBef>
+                <a:spcPts val="600"/>
+              </a:spcBef>
+              <a:spcAft>
+                <a:spcPts val="600"/>
+              </a:spcAft>
+              <a:defRPr sz="1600">
                 <a:solidFill>
                   <a:srgbClr val="0F172A"/>
                 </a:solidFill>
@@ -7960,33 +7846,33 @@
           <a:p>
             <a:pPr>
               <a:lnSpc>
-                <a:spcPct val="140000"/>
-              </a:lnSpc>
-              <a:spcBef>
-                <a:spcPts val="1000"/>
-              </a:spcBef>
-              <a:spcAft>
-                <a:spcPts val="1000"/>
-              </a:spcAft>
-              <a:defRPr sz="2000">
-                <a:solidFill>
-                  <a:srgbClr val="0F172A"/>
-                </a:solidFill>
-              </a:defRPr>
-            </a:pPr>
-          </a:p>
-          <a:p>
-            <a:pPr>
-              <a:lnSpc>
-                <a:spcPct val="140000"/>
-              </a:lnSpc>
-              <a:spcBef>
-                <a:spcPts val="1000"/>
-              </a:spcBef>
-              <a:spcAft>
-                <a:spcPts val="1000"/>
-              </a:spcAft>
-              <a:defRPr sz="2000">
+                <a:spcPct val="120000"/>
+              </a:lnSpc>
+              <a:spcBef>
+                <a:spcPts val="600"/>
+              </a:spcBef>
+              <a:spcAft>
+                <a:spcPts val="600"/>
+              </a:spcAft>
+              <a:defRPr sz="1600">
+                <a:solidFill>
+                  <a:srgbClr val="0F172A"/>
+                </a:solidFill>
+              </a:defRPr>
+            </a:pPr>
+          </a:p>
+          <a:p>
+            <a:pPr>
+              <a:lnSpc>
+                <a:spcPct val="120000"/>
+              </a:lnSpc>
+              <a:spcBef>
+                <a:spcPts val="600"/>
+              </a:spcBef>
+              <a:spcAft>
+                <a:spcPts val="600"/>
+              </a:spcAft>
+              <a:defRPr sz="1600">
                 <a:solidFill>
                   <a:srgbClr val="0F172A"/>
                 </a:solidFill>
@@ -7999,33 +7885,33 @@
           <a:p>
             <a:pPr>
               <a:lnSpc>
-                <a:spcPct val="140000"/>
-              </a:lnSpc>
-              <a:spcBef>
-                <a:spcPts val="1000"/>
-              </a:spcBef>
-              <a:spcAft>
-                <a:spcPts val="1000"/>
-              </a:spcAft>
-              <a:defRPr sz="2000">
-                <a:solidFill>
-                  <a:srgbClr val="0F172A"/>
-                </a:solidFill>
-              </a:defRPr>
-            </a:pPr>
-          </a:p>
-          <a:p>
-            <a:pPr>
-              <a:lnSpc>
-                <a:spcPct val="140000"/>
-              </a:lnSpc>
-              <a:spcBef>
-                <a:spcPts val="1000"/>
-              </a:spcBef>
-              <a:spcAft>
-                <a:spcPts val="1000"/>
-              </a:spcAft>
-              <a:defRPr sz="2000">
+                <a:spcPct val="120000"/>
+              </a:lnSpc>
+              <a:spcBef>
+                <a:spcPts val="600"/>
+              </a:spcBef>
+              <a:spcAft>
+                <a:spcPts val="600"/>
+              </a:spcAft>
+              <a:defRPr sz="1600">
+                <a:solidFill>
+                  <a:srgbClr val="0F172A"/>
+                </a:solidFill>
+              </a:defRPr>
+            </a:pPr>
+          </a:p>
+          <a:p>
+            <a:pPr>
+              <a:lnSpc>
+                <a:spcPct val="120000"/>
+              </a:lnSpc>
+              <a:spcBef>
+                <a:spcPts val="600"/>
+              </a:spcBef>
+              <a:spcAft>
+                <a:spcPts val="600"/>
+              </a:spcAft>
+              <a:defRPr sz="1600">
                 <a:solidFill>
                   <a:srgbClr val="0F172A"/>
                 </a:solidFill>
@@ -8038,35 +7924,35 @@
           <a:p>
             <a:pPr>
               <a:lnSpc>
-                <a:spcPct val="140000"/>
-              </a:lnSpc>
-              <a:spcBef>
-                <a:spcPts val="1000"/>
-              </a:spcBef>
-              <a:spcAft>
-                <a:spcPts val="1000"/>
-              </a:spcAft>
-              <a:defRPr sz="2000">
-                <a:solidFill>
-                  <a:srgbClr val="0F172A"/>
-                </a:solidFill>
-              </a:defRPr>
-            </a:pPr>
-          </a:p>
-          <a:p>
-            <a:pPr>
-              <a:lnSpc>
-                <a:spcPct val="140000"/>
-              </a:lnSpc>
-              <a:spcBef>
-                <a:spcPts val="1000"/>
-              </a:spcBef>
-              <a:spcAft>
-                <a:spcPts val="1000"/>
-              </a:spcAft>
-              <a:defRPr sz="2200" b="1">
-                <a:solidFill>
-                  <a:srgbClr val="1E3A8A"/>
+                <a:spcPct val="120000"/>
+              </a:lnSpc>
+              <a:spcBef>
+                <a:spcPts val="600"/>
+              </a:spcBef>
+              <a:spcAft>
+                <a:spcPts val="600"/>
+              </a:spcAft>
+              <a:defRPr sz="1600">
+                <a:solidFill>
+                  <a:srgbClr val="0F172A"/>
+                </a:solidFill>
+              </a:defRPr>
+            </a:pPr>
+          </a:p>
+          <a:p>
+            <a:pPr>
+              <a:lnSpc>
+                <a:spcPct val="120000"/>
+              </a:lnSpc>
+              <a:spcBef>
+                <a:spcPts val="600"/>
+              </a:spcBef>
+              <a:spcAft>
+                <a:spcPts val="600"/>
+              </a:spcAft>
+              <a:defRPr sz="1800" b="1">
+                <a:solidFill>
+                  <a:srgbClr val="EF4444"/>
                 </a:solidFill>
               </a:defRPr>
             </a:pPr>
@@ -8102,8 +7988,8 @@
         </p:nvSpPr>
         <p:spPr>
           <a:xfrm>
-            <a:off x="731520" y="548640"/>
-            <a:ext cx="10728655" cy="822960"/>
+            <a:off x="914400" y="457200"/>
+            <a:ext cx="10362895" cy="640080"/>
           </a:xfrm>
           <a:prstGeom prst="rect">
             <a:avLst/>
@@ -8111,20 +7997,20 @@
           <a:noFill/>
         </p:spPr>
         <p:txBody>
-          <a:bodyPr wrap="none">
+          <a:bodyPr wrap="square">
             <a:spAutoFit/>
           </a:bodyPr>
           <a:lstStyle/>
           <a:p>
             <a:pPr algn="ctr">
-              <a:defRPr sz="3600" b="1">
+              <a:defRPr sz="3200" b="1">
                 <a:solidFill>
                   <a:srgbClr val="1E3A8A"/>
                 </a:solidFill>
               </a:defRPr>
             </a:pPr>
             <a:r>
-              <a:t>交換準備時間軸：提早規劃是王道</a:t>
+              <a:t>交換準備時間軸</a:t>
             </a:r>
           </a:p>
         </p:txBody>
@@ -8137,8 +8023,8 @@
         </p:nvSpPr>
         <p:spPr>
           <a:xfrm>
-            <a:off x="4724704" y="1371600"/>
-            <a:ext cx="2743200" cy="45720"/>
+            <a:off x="5181904" y="1097280"/>
+            <a:ext cx="1828800" cy="36576"/>
           </a:xfrm>
           <a:prstGeom prst="rect">
             <a:avLst/>
@@ -8180,8 +8066,8 @@
         </p:nvSpPr>
         <p:spPr>
           <a:xfrm>
-            <a:off x="1371600" y="2011680"/>
-            <a:ext cx="9448495" cy="4389120"/>
+            <a:off x="1371600" y="1463040"/>
+            <a:ext cx="9448495" cy="5029200"/>
           </a:xfrm>
           <a:prstGeom prst="rect">
             <a:avLst/>
@@ -8189,139 +8075,139 @@
           <a:noFill/>
         </p:spPr>
         <p:txBody>
-          <a:bodyPr wrap="square" anchor="t">
+          <a:bodyPr wrap="square">
             <a:spAutoFit/>
           </a:bodyPr>
           <a:lstStyle/>
           <a:p>
             <a:pPr>
               <a:lnSpc>
-                <a:spcPct val="140000"/>
-              </a:lnSpc>
-              <a:spcBef>
-                <a:spcPts val="0"/>
-              </a:spcBef>
-              <a:spcAft>
-                <a:spcPts val="1000"/>
-              </a:spcAft>
-              <a:defRPr sz="2200" b="1">
+                <a:spcPct val="120000"/>
+              </a:lnSpc>
+              <a:spcBef>
+                <a:spcPts val="600"/>
+              </a:spcBef>
+              <a:spcAft>
+                <a:spcPts val="600"/>
+              </a:spcAft>
+              <a:defRPr sz="1800" b="1">
                 <a:solidFill>
                   <a:srgbClr val="1E3A8A"/>
                 </a:solidFill>
               </a:defRPr>
             </a:pPr>
             <a:r>
-              <a:t>▸ 12-18個月前：決定目標、開始研究國家/學校</a:t>
-            </a:r>
-          </a:p>
-          <a:p>
-            <a:pPr>
-              <a:lnSpc>
-                <a:spcPct val="140000"/>
-              </a:lnSpc>
-              <a:spcBef>
-                <a:spcPts val="1000"/>
-              </a:spcBef>
-              <a:spcAft>
-                <a:spcPts val="1000"/>
-              </a:spcAft>
-              <a:defRPr sz="2000">
-                <a:solidFill>
-                  <a:srgbClr val="0F172A"/>
-                </a:solidFill>
-              </a:defRPr>
-            </a:pPr>
-          </a:p>
-          <a:p>
-            <a:pPr>
-              <a:lnSpc>
-                <a:spcPct val="140000"/>
-              </a:lnSpc>
-              <a:spcBef>
-                <a:spcPts val="1000"/>
-              </a:spcBef>
-              <a:spcAft>
-                <a:spcPts val="1000"/>
-              </a:spcAft>
-              <a:defRPr sz="2200" b="1">
+              <a:t>▸ 12-18個月前：決定目標、研究國家/學校</a:t>
+            </a:r>
+          </a:p>
+          <a:p>
+            <a:pPr>
+              <a:lnSpc>
+                <a:spcPct val="120000"/>
+              </a:lnSpc>
+              <a:spcBef>
+                <a:spcPts val="600"/>
+              </a:spcBef>
+              <a:spcAft>
+                <a:spcPts val="600"/>
+              </a:spcAft>
+              <a:defRPr sz="1600">
+                <a:solidFill>
+                  <a:srgbClr val="0F172A"/>
+                </a:solidFill>
+              </a:defRPr>
+            </a:pPr>
+          </a:p>
+          <a:p>
+            <a:pPr>
+              <a:lnSpc>
+                <a:spcPct val="120000"/>
+              </a:lnSpc>
+              <a:spcBef>
+                <a:spcPts val="600"/>
+              </a:spcBef>
+              <a:spcAft>
+                <a:spcPts val="600"/>
+              </a:spcAft>
+              <a:defRPr sz="1800" b="1">
                 <a:solidFill>
                   <a:srgbClr val="1E3A8A"/>
                 </a:solidFill>
               </a:defRPr>
             </a:pPr>
             <a:r>
-              <a:t>▸ 10-12個月前：準備英文考試（托福/雅思）、提升GPA</a:t>
-            </a:r>
-          </a:p>
-          <a:p>
-            <a:pPr>
-              <a:lnSpc>
-                <a:spcPct val="140000"/>
-              </a:lnSpc>
-              <a:spcBef>
-                <a:spcPts val="1000"/>
-              </a:spcBef>
-              <a:spcAft>
-                <a:spcPts val="1000"/>
-              </a:spcAft>
-              <a:defRPr sz="2000">
-                <a:solidFill>
-                  <a:srgbClr val="0F172A"/>
-                </a:solidFill>
-              </a:defRPr>
-            </a:pPr>
-          </a:p>
-          <a:p>
-            <a:pPr>
-              <a:lnSpc>
-                <a:spcPct val="140000"/>
-              </a:lnSpc>
-              <a:spcBef>
-                <a:spcPts val="1000"/>
-              </a:spcBef>
-              <a:spcAft>
-                <a:spcPts val="1000"/>
-              </a:spcAft>
-              <a:defRPr sz="2200" b="1">
+              <a:t>▸ 10-12個月前：準備英文考試、提升GPA</a:t>
+            </a:r>
+          </a:p>
+          <a:p>
+            <a:pPr>
+              <a:lnSpc>
+                <a:spcPct val="120000"/>
+              </a:lnSpc>
+              <a:spcBef>
+                <a:spcPts val="600"/>
+              </a:spcBef>
+              <a:spcAft>
+                <a:spcPts val="600"/>
+              </a:spcAft>
+              <a:defRPr sz="1600">
+                <a:solidFill>
+                  <a:srgbClr val="0F172A"/>
+                </a:solidFill>
+              </a:defRPr>
+            </a:pPr>
+          </a:p>
+          <a:p>
+            <a:pPr>
+              <a:lnSpc>
+                <a:spcPct val="120000"/>
+              </a:lnSpc>
+              <a:spcBef>
+                <a:spcPts val="600"/>
+              </a:spcBef>
+              <a:spcAft>
+                <a:spcPts val="600"/>
+              </a:spcAft>
+              <a:defRPr sz="1800" b="1">
                 <a:solidFill>
                   <a:srgbClr val="1E3A8A"/>
                 </a:solidFill>
               </a:defRPr>
             </a:pPr>
             <a:r>
-              <a:t>▸ 8-10個月前：撰寫研究計畫、爭取教授邀請函</a:t>
-            </a:r>
-          </a:p>
-          <a:p>
-            <a:pPr>
-              <a:lnSpc>
-                <a:spcPct val="140000"/>
-              </a:lnSpc>
-              <a:spcBef>
-                <a:spcPts val="1000"/>
-              </a:spcBef>
-              <a:spcAft>
-                <a:spcPts val="1000"/>
-              </a:spcAft>
-              <a:defRPr sz="2000">
-                <a:solidFill>
-                  <a:srgbClr val="0F172A"/>
-                </a:solidFill>
-              </a:defRPr>
-            </a:pPr>
-          </a:p>
-          <a:p>
-            <a:pPr>
-              <a:lnSpc>
-                <a:spcPct val="140000"/>
-              </a:lnSpc>
-              <a:spcBef>
-                <a:spcPts val="1000"/>
-              </a:spcBef>
-              <a:spcAft>
-                <a:spcPts val="1000"/>
-              </a:spcAft>
-              <a:defRPr sz="2200" b="1">
+              <a:t>▸ 8-10個月前：撰寫研究計畫、爭取邀請函</a:t>
+            </a:r>
+          </a:p>
+          <a:p>
+            <a:pPr>
+              <a:lnSpc>
+                <a:spcPct val="120000"/>
+              </a:lnSpc>
+              <a:spcBef>
+                <a:spcPts val="600"/>
+              </a:spcBef>
+              <a:spcAft>
+                <a:spcPts val="600"/>
+              </a:spcAft>
+              <a:defRPr sz="1600">
+                <a:solidFill>
+                  <a:srgbClr val="0F172A"/>
+                </a:solidFill>
+              </a:defRPr>
+            </a:pPr>
+          </a:p>
+          <a:p>
+            <a:pPr>
+              <a:lnSpc>
+                <a:spcPct val="120000"/>
+              </a:lnSpc>
+              <a:spcBef>
+                <a:spcPts val="600"/>
+              </a:spcBef>
+              <a:spcAft>
+                <a:spcPts val="600"/>
+              </a:spcAft>
+              <a:defRPr sz="1800" b="1">
                 <a:solidFill>
                   <a:srgbClr val="1E3A8A"/>
                 </a:solidFill>
@@ -8334,157 +8220,157 @@
           <a:p>
             <a:pPr>
               <a:lnSpc>
-                <a:spcPct val="140000"/>
-              </a:lnSpc>
-              <a:spcBef>
-                <a:spcPts val="1000"/>
-              </a:spcBef>
-              <a:spcAft>
-                <a:spcPts val="1000"/>
-              </a:spcAft>
-              <a:defRPr sz="2000">
-                <a:solidFill>
-                  <a:srgbClr val="0F172A"/>
-                </a:solidFill>
-              </a:defRPr>
-            </a:pPr>
-          </a:p>
-          <a:p>
-            <a:pPr>
-              <a:lnSpc>
-                <a:spcPct val="140000"/>
-              </a:lnSpc>
-              <a:spcBef>
-                <a:spcPts val="1000"/>
-              </a:spcBef>
-              <a:spcAft>
-                <a:spcPts val="1000"/>
-              </a:spcAft>
-              <a:defRPr sz="2200" b="1">
+                <a:spcPct val="120000"/>
+              </a:lnSpc>
+              <a:spcBef>
+                <a:spcPts val="600"/>
+              </a:spcBef>
+              <a:spcAft>
+                <a:spcPts val="600"/>
+              </a:spcAft>
+              <a:defRPr sz="1600">
+                <a:solidFill>
+                  <a:srgbClr val="0F172A"/>
+                </a:solidFill>
+              </a:defRPr>
+            </a:pPr>
+          </a:p>
+          <a:p>
+            <a:pPr>
+              <a:lnSpc>
+                <a:spcPct val="120000"/>
+              </a:lnSpc>
+              <a:spcBef>
+                <a:spcPts val="600"/>
+              </a:spcBef>
+              <a:spcAft>
+                <a:spcPts val="600"/>
+              </a:spcAft>
+              <a:defRPr sz="1800" b="1">
                 <a:solidFill>
                   <a:srgbClr val="1E3A8A"/>
                 </a:solidFill>
               </a:defRPr>
             </a:pPr>
             <a:r>
-              <a:t>▸ 4-6個月前：申請學校、準備申請文件</a:t>
-            </a:r>
-          </a:p>
-          <a:p>
-            <a:pPr>
-              <a:lnSpc>
-                <a:spcPct val="140000"/>
-              </a:lnSpc>
-              <a:spcBef>
-                <a:spcPts val="1000"/>
-              </a:spcBef>
-              <a:spcAft>
-                <a:spcPts val="1000"/>
-              </a:spcAft>
-              <a:defRPr sz="2000">
-                <a:solidFill>
-                  <a:srgbClr val="0F172A"/>
-                </a:solidFill>
-              </a:defRPr>
-            </a:pPr>
-          </a:p>
-          <a:p>
-            <a:pPr>
-              <a:lnSpc>
-                <a:spcPct val="140000"/>
-              </a:lnSpc>
-              <a:spcBef>
-                <a:spcPts val="1000"/>
-              </a:spcBef>
-              <a:spcAft>
-                <a:spcPts val="1000"/>
-              </a:spcAft>
-              <a:defRPr sz="2200" b="1">
+              <a:t>▸ 4-6個月前：申請學校、準備文件</a:t>
+            </a:r>
+          </a:p>
+          <a:p>
+            <a:pPr>
+              <a:lnSpc>
+                <a:spcPct val="120000"/>
+              </a:lnSpc>
+              <a:spcBef>
+                <a:spcPts val="600"/>
+              </a:spcBef>
+              <a:spcAft>
+                <a:spcPts val="600"/>
+              </a:spcAft>
+              <a:defRPr sz="1600">
+                <a:solidFill>
+                  <a:srgbClr val="0F172A"/>
+                </a:solidFill>
+              </a:defRPr>
+            </a:pPr>
+          </a:p>
+          <a:p>
+            <a:pPr>
+              <a:lnSpc>
+                <a:spcPct val="120000"/>
+              </a:lnSpc>
+              <a:spcBef>
+                <a:spcPts val="600"/>
+              </a:spcBef>
+              <a:spcAft>
+                <a:spcPts val="600"/>
+              </a:spcAft>
+              <a:defRPr sz="1800" b="1">
                 <a:solidFill>
                   <a:srgbClr val="1E3A8A"/>
                 </a:solidFill>
               </a:defRPr>
             </a:pPr>
             <a:r>
-              <a:t>▸ 2-4個月前：申請簽證（德國需2個月！）</a:t>
-            </a:r>
-          </a:p>
-          <a:p>
-            <a:pPr>
-              <a:lnSpc>
-                <a:spcPct val="140000"/>
-              </a:lnSpc>
-              <a:spcBef>
-                <a:spcPts val="1000"/>
-              </a:spcBef>
-              <a:spcAft>
-                <a:spcPts val="1000"/>
-              </a:spcAft>
-              <a:defRPr sz="2000">
-                <a:solidFill>
-                  <a:srgbClr val="0F172A"/>
-                </a:solidFill>
-              </a:defRPr>
-            </a:pPr>
-          </a:p>
-          <a:p>
-            <a:pPr>
-              <a:lnSpc>
-                <a:spcPct val="140000"/>
-              </a:lnSpc>
-              <a:spcBef>
-                <a:spcPts val="1000"/>
-              </a:spcBef>
-              <a:spcAft>
-                <a:spcPts val="1000"/>
-              </a:spcAft>
-              <a:defRPr sz="2200" b="1">
+              <a:t>▸ 2-4個月前：申請簽證（德國需2個月）</a:t>
+            </a:r>
+          </a:p>
+          <a:p>
+            <a:pPr>
+              <a:lnSpc>
+                <a:spcPct val="120000"/>
+              </a:lnSpc>
+              <a:spcBef>
+                <a:spcPts val="600"/>
+              </a:spcBef>
+              <a:spcAft>
+                <a:spcPts val="600"/>
+              </a:spcAft>
+              <a:defRPr sz="1600">
+                <a:solidFill>
+                  <a:srgbClr val="0F172A"/>
+                </a:solidFill>
+              </a:defRPr>
+            </a:pPr>
+          </a:p>
+          <a:p>
+            <a:pPr>
+              <a:lnSpc>
+                <a:spcPct val="120000"/>
+              </a:lnSpc>
+              <a:spcBef>
+                <a:spcPts val="600"/>
+              </a:spcBef>
+              <a:spcAft>
+                <a:spcPts val="600"/>
+              </a:spcAft>
+              <a:defRPr sz="1800" b="1">
                 <a:solidFill>
                   <a:srgbClr val="1E3A8A"/>
                 </a:solidFill>
               </a:defRPr>
             </a:pPr>
             <a:r>
-              <a:t>▸ 1-2個月前：訂機票、保險、住宿、網卡</a:t>
-            </a:r>
-          </a:p>
-          <a:p>
-            <a:pPr>
-              <a:lnSpc>
-                <a:spcPct val="140000"/>
-              </a:lnSpc>
-              <a:spcBef>
-                <a:spcPts val="1000"/>
-              </a:spcBef>
-              <a:spcAft>
-                <a:spcPts val="1000"/>
-              </a:spcAft>
-              <a:defRPr sz="2000">
-                <a:solidFill>
-                  <a:srgbClr val="0F172A"/>
-                </a:solidFill>
-              </a:defRPr>
-            </a:pPr>
-          </a:p>
-          <a:p>
-            <a:pPr>
-              <a:lnSpc>
-                <a:spcPct val="140000"/>
-              </a:lnSpc>
-              <a:spcBef>
-                <a:spcPts val="1000"/>
-              </a:spcBef>
-              <a:spcAft>
-                <a:spcPts val="1000"/>
-              </a:spcAft>
-              <a:defRPr sz="2200" b="1">
-                <a:solidFill>
-                  <a:srgbClr val="1E3A8A"/>
-                </a:solidFill>
-              </a:defRPr>
-            </a:pPr>
-            <a:r>
-              <a:t>【重要提醒】越早開始，選擇越多！</a:t>
+              <a:t>▸ 1-2個月前：訂機票、保險、住宿</a:t>
+            </a:r>
+          </a:p>
+          <a:p>
+            <a:pPr>
+              <a:lnSpc>
+                <a:spcPct val="120000"/>
+              </a:lnSpc>
+              <a:spcBef>
+                <a:spcPts val="600"/>
+              </a:spcBef>
+              <a:spcAft>
+                <a:spcPts val="600"/>
+              </a:spcAft>
+              <a:defRPr sz="1600">
+                <a:solidFill>
+                  <a:srgbClr val="0F172A"/>
+                </a:solidFill>
+              </a:defRPr>
+            </a:pPr>
+          </a:p>
+          <a:p>
+            <a:pPr>
+              <a:lnSpc>
+                <a:spcPct val="120000"/>
+              </a:lnSpc>
+              <a:spcBef>
+                <a:spcPts val="600"/>
+              </a:spcBef>
+              <a:spcAft>
+                <a:spcPts val="600"/>
+              </a:spcAft>
+              <a:defRPr sz="1800" b="1">
+                <a:solidFill>
+                  <a:srgbClr val="EF4444"/>
+                </a:solidFill>
+              </a:defRPr>
+            </a:pPr>
+            <a:r>
+              <a:t>【重點】越早開始，選擇越多！</a:t>
             </a:r>
           </a:p>
         </p:txBody>
@@ -8515,8 +8401,8 @@
         </p:nvSpPr>
         <p:spPr>
           <a:xfrm>
-            <a:off x="731520" y="457200"/>
-            <a:ext cx="10728655" cy="731520"/>
+            <a:off x="914400" y="365760"/>
+            <a:ext cx="10362895" cy="548640"/>
           </a:xfrm>
           <a:prstGeom prst="rect">
             <a:avLst/>
@@ -8524,20 +8410,20 @@
           <a:noFill/>
         </p:spPr>
         <p:txBody>
-          <a:bodyPr wrap="none">
+          <a:bodyPr wrap="square">
             <a:spAutoFit/>
           </a:bodyPr>
           <a:lstStyle/>
           <a:p>
             <a:pPr algn="ctr">
-              <a:defRPr sz="3200" b="1">
+              <a:defRPr sz="2800" b="1">
                 <a:solidFill>
                   <a:srgbClr val="1E3A8A"/>
                 </a:solidFill>
               </a:defRPr>
             </a:pPr>
             <a:r>
-              <a:t>第一個決定：你為什麼要交換？</a:t>
+              <a:t>你為什麼要交換？</a:t>
             </a:r>
           </a:p>
         </p:txBody>
@@ -8550,8 +8436,8 @@
         </p:nvSpPr>
         <p:spPr>
           <a:xfrm>
-            <a:off x="6096304" y="1371600"/>
-            <a:ext cx="27432" cy="5029200"/>
+            <a:off x="6096304" y="1188720"/>
+            <a:ext cx="18288" cy="5303520"/>
           </a:xfrm>
           <a:prstGeom prst="rect">
             <a:avLst/>
@@ -8593,8 +8479,8 @@
         </p:nvSpPr>
         <p:spPr>
           <a:xfrm>
-            <a:off x="731520" y="1371600"/>
-            <a:ext cx="5029200" cy="457200"/>
+            <a:off x="914400" y="1097280"/>
+            <a:ext cx="4846320" cy="365760"/>
           </a:xfrm>
           <a:prstGeom prst="rect">
             <a:avLst/>
@@ -8608,14 +8494,14 @@
           <a:lstStyle/>
           <a:p>
             <a:pPr algn="ctr">
-              <a:defRPr sz="2400" b="1">
+              <a:defRPr sz="2000" b="1">
                 <a:solidFill>
                   <a:srgbClr val="3B82F6"/>
                 </a:solidFill>
               </a:defRPr>
             </a:pPr>
             <a:r>
-              <a:t>類型一：玩樂優先</a:t>
+              <a:t>玩樂優先</a:t>
             </a:r>
           </a:p>
         </p:txBody>
@@ -8628,8 +8514,8 @@
         </p:nvSpPr>
         <p:spPr>
           <a:xfrm>
-            <a:off x="731520" y="2011680"/>
-            <a:ext cx="5029200" cy="4572000"/>
+            <a:off x="914400" y="1554480"/>
+            <a:ext cx="4846320" cy="4937760"/>
           </a:xfrm>
           <a:prstGeom prst="rect">
             <a:avLst/>
@@ -8644,12 +8530,15 @@
           <a:p>
             <a:pPr>
               <a:lnSpc>
-                <a:spcPct val="130000"/>
-              </a:lnSpc>
-              <a:spcBef>
-                <a:spcPts val="800"/>
-              </a:spcBef>
-              <a:defRPr sz="2000" b="1">
+                <a:spcPct val="120000"/>
+              </a:lnSpc>
+              <a:spcBef>
+                <a:spcPts val="400"/>
+              </a:spcBef>
+              <a:spcAft>
+                <a:spcPts val="400"/>
+              </a:spcAft>
+              <a:defRPr sz="1600" b="1">
                 <a:solidFill>
                   <a:srgbClr val="1E3A8A"/>
                 </a:solidFill>
@@ -8662,12 +8551,15 @@
           <a:p>
             <a:pPr>
               <a:lnSpc>
-                <a:spcPct val="130000"/>
-              </a:lnSpc>
-              <a:spcBef>
-                <a:spcPts val="800"/>
-              </a:spcBef>
-              <a:defRPr sz="1800">
+                <a:spcPct val="120000"/>
+              </a:lnSpc>
+              <a:spcBef>
+                <a:spcPts val="400"/>
+              </a:spcBef>
+              <a:spcAft>
+                <a:spcPts val="400"/>
+              </a:spcAft>
+              <a:defRPr sz="1500">
                 <a:solidFill>
                   <a:srgbClr val="0F172A"/>
                 </a:solidFill>
@@ -8680,12 +8572,15 @@
           <a:p>
             <a:pPr>
               <a:lnSpc>
-                <a:spcPct val="130000"/>
-              </a:lnSpc>
-              <a:spcBef>
-                <a:spcPts val="800"/>
-              </a:spcBef>
-              <a:defRPr sz="1800">
+                <a:spcPct val="120000"/>
+              </a:lnSpc>
+              <a:spcBef>
+                <a:spcPts val="400"/>
+              </a:spcBef>
+              <a:spcAft>
+                <a:spcPts val="400"/>
+              </a:spcAft>
+              <a:defRPr sz="1500">
                 <a:solidFill>
                   <a:srgbClr val="0F172A"/>
                 </a:solidFill>
@@ -8698,12 +8593,15 @@
           <a:p>
             <a:pPr>
               <a:lnSpc>
-                <a:spcPct val="130000"/>
-              </a:lnSpc>
-              <a:spcBef>
-                <a:spcPts val="800"/>
-              </a:spcBef>
-              <a:defRPr sz="1800">
+                <a:spcPct val="120000"/>
+              </a:lnSpc>
+              <a:spcBef>
+                <a:spcPts val="400"/>
+              </a:spcBef>
+              <a:spcAft>
+                <a:spcPts val="400"/>
+              </a:spcAft>
+              <a:defRPr sz="1500">
                 <a:solidFill>
                   <a:srgbClr val="0F172A"/>
                 </a:solidFill>
@@ -8716,12 +8614,15 @@
           <a:p>
             <a:pPr>
               <a:lnSpc>
-                <a:spcPct val="130000"/>
-              </a:lnSpc>
-              <a:spcBef>
-                <a:spcPts val="800"/>
-              </a:spcBef>
-              <a:defRPr sz="1800">
+                <a:spcPct val="120000"/>
+              </a:lnSpc>
+              <a:spcBef>
+                <a:spcPts val="400"/>
+              </a:spcBef>
+              <a:spcAft>
+                <a:spcPts val="400"/>
+              </a:spcAft>
+              <a:defRPr sz="1500">
                 <a:solidFill>
                   <a:srgbClr val="0F172A"/>
                 </a:solidFill>
@@ -8734,27 +8635,33 @@
           <a:p>
             <a:pPr>
               <a:lnSpc>
-                <a:spcPct val="130000"/>
-              </a:lnSpc>
-              <a:spcBef>
-                <a:spcPts val="800"/>
-              </a:spcBef>
-              <a:defRPr sz="1800">
-                <a:solidFill>
-                  <a:srgbClr val="0F172A"/>
-                </a:solidFill>
-              </a:defRPr>
-            </a:pPr>
-          </a:p>
-          <a:p>
-            <a:pPr>
-              <a:lnSpc>
-                <a:spcPct val="130000"/>
-              </a:lnSpc>
-              <a:spcBef>
-                <a:spcPts val="800"/>
-              </a:spcBef>
-              <a:defRPr sz="2000" b="1">
+                <a:spcPct val="120000"/>
+              </a:lnSpc>
+              <a:spcBef>
+                <a:spcPts val="400"/>
+              </a:spcBef>
+              <a:spcAft>
+                <a:spcPts val="400"/>
+              </a:spcAft>
+              <a:defRPr sz="1500">
+                <a:solidFill>
+                  <a:srgbClr val="0F172A"/>
+                </a:solidFill>
+              </a:defRPr>
+            </a:pPr>
+          </a:p>
+          <a:p>
+            <a:pPr>
+              <a:lnSpc>
+                <a:spcPct val="120000"/>
+              </a:lnSpc>
+              <a:spcBef>
+                <a:spcPts val="400"/>
+              </a:spcBef>
+              <a:spcAft>
+                <a:spcPts val="400"/>
+              </a:spcAft>
+              <a:defRPr sz="1600" b="1">
                 <a:solidFill>
                   <a:srgbClr val="1E3A8A"/>
                 </a:solidFill>
@@ -8767,12 +8674,15 @@
           <a:p>
             <a:pPr>
               <a:lnSpc>
-                <a:spcPct val="130000"/>
-              </a:lnSpc>
-              <a:spcBef>
-                <a:spcPts val="800"/>
-              </a:spcBef>
-              <a:defRPr sz="1800">
+                <a:spcPct val="120000"/>
+              </a:lnSpc>
+              <a:spcBef>
+                <a:spcPts val="400"/>
+              </a:spcBef>
+              <a:spcAft>
+                <a:spcPts val="400"/>
+              </a:spcAft>
+              <a:defRPr sz="1500">
                 <a:solidFill>
                   <a:srgbClr val="0F172A"/>
                 </a:solidFill>
@@ -8785,12 +8695,15 @@
           <a:p>
             <a:pPr>
               <a:lnSpc>
-                <a:spcPct val="130000"/>
-              </a:lnSpc>
-              <a:spcBef>
-                <a:spcPts val="800"/>
-              </a:spcBef>
-              <a:defRPr sz="1800">
+                <a:spcPct val="120000"/>
+              </a:lnSpc>
+              <a:spcBef>
+                <a:spcPts val="400"/>
+              </a:spcBef>
+              <a:spcAft>
+                <a:spcPts val="400"/>
+              </a:spcAft>
+              <a:defRPr sz="1500">
                 <a:solidFill>
                   <a:srgbClr val="0F172A"/>
                 </a:solidFill>
@@ -8803,12 +8716,15 @@
           <a:p>
             <a:pPr>
               <a:lnSpc>
-                <a:spcPct val="130000"/>
-              </a:lnSpc>
-              <a:spcBef>
-                <a:spcPts val="800"/>
-              </a:spcBef>
-              <a:defRPr sz="1800">
+                <a:spcPct val="120000"/>
+              </a:lnSpc>
+              <a:spcBef>
+                <a:spcPts val="400"/>
+              </a:spcBef>
+              <a:spcAft>
+                <a:spcPts val="400"/>
+              </a:spcAft>
+              <a:defRPr sz="1500">
                 <a:solidFill>
                   <a:srgbClr val="0F172A"/>
                 </a:solidFill>
@@ -8816,24 +8732,6 @@
             </a:pPr>
             <a:r>
               <a:t>• 一週上4天課仍能遊17國</a:t>
-            </a:r>
-          </a:p>
-          <a:p>
-            <a:pPr>
-              <a:lnSpc>
-                <a:spcPct val="130000"/>
-              </a:lnSpc>
-              <a:spcBef>
-                <a:spcPts val="800"/>
-              </a:spcBef>
-              <a:defRPr sz="1800">
-                <a:solidFill>
-                  <a:srgbClr val="0F172A"/>
-                </a:solidFill>
-              </a:defRPr>
-            </a:pPr>
-            <a:r>
-              <a:t>  （真實案例）</a:t>
             </a:r>
           </a:p>
         </p:txBody>
@@ -8846,8 +8744,8 @@
         </p:nvSpPr>
         <p:spPr>
           <a:xfrm>
-            <a:off x="6430975" y="1371600"/>
-            <a:ext cx="5029200" cy="457200"/>
+            <a:off x="6430975" y="1097280"/>
+            <a:ext cx="4846320" cy="365760"/>
           </a:xfrm>
           <a:prstGeom prst="rect">
             <a:avLst/>
@@ -8861,14 +8759,14 @@
           <a:lstStyle/>
           <a:p>
             <a:pPr algn="ctr">
-              <a:defRPr sz="2400" b="1">
+              <a:defRPr sz="2000" b="1">
                 <a:solidFill>
                   <a:srgbClr val="EF4444"/>
                 </a:solidFill>
               </a:defRPr>
             </a:pPr>
             <a:r>
-              <a:t>類型二：學術優先</a:t>
+              <a:t>學術優先</a:t>
             </a:r>
           </a:p>
         </p:txBody>
@@ -8881,8 +8779,8 @@
         </p:nvSpPr>
         <p:spPr>
           <a:xfrm>
-            <a:off x="6430975" y="2011680"/>
-            <a:ext cx="5029200" cy="4572000"/>
+            <a:off x="6430975" y="1554480"/>
+            <a:ext cx="4846320" cy="4937760"/>
           </a:xfrm>
           <a:prstGeom prst="rect">
             <a:avLst/>
@@ -8897,12 +8795,15 @@
           <a:p>
             <a:pPr>
               <a:lnSpc>
-                <a:spcPct val="130000"/>
-              </a:lnSpc>
-              <a:spcBef>
-                <a:spcPts val="800"/>
-              </a:spcBef>
-              <a:defRPr sz="2000" b="1">
+                <a:spcPct val="120000"/>
+              </a:lnSpc>
+              <a:spcBef>
+                <a:spcPts val="400"/>
+              </a:spcBef>
+              <a:spcAft>
+                <a:spcPts val="400"/>
+              </a:spcAft>
+              <a:defRPr sz="1600" b="1">
                 <a:solidFill>
                   <a:srgbClr val="1E3A8A"/>
                 </a:solidFill>
@@ -8915,12 +8816,15 @@
           <a:p>
             <a:pPr>
               <a:lnSpc>
-                <a:spcPct val="130000"/>
-              </a:lnSpc>
-              <a:spcBef>
-                <a:spcPts val="800"/>
-              </a:spcBef>
-              <a:defRPr sz="1800">
+                <a:spcPct val="120000"/>
+              </a:lnSpc>
+              <a:spcBef>
+                <a:spcPts val="400"/>
+              </a:spcBef>
+              <a:spcAft>
+                <a:spcPts val="400"/>
+              </a:spcAft>
+              <a:defRPr sz="1500">
                 <a:solidFill>
                   <a:srgbClr val="0F172A"/>
                 </a:solidFill>
@@ -8933,12 +8837,15 @@
           <a:p>
             <a:pPr>
               <a:lnSpc>
-                <a:spcPct val="130000"/>
-              </a:lnSpc>
-              <a:spcBef>
-                <a:spcPts val="800"/>
-              </a:spcBef>
-              <a:defRPr sz="1800">
+                <a:spcPct val="120000"/>
+              </a:lnSpc>
+              <a:spcBef>
+                <a:spcPts val="400"/>
+              </a:spcBef>
+              <a:spcAft>
+                <a:spcPts val="400"/>
+              </a:spcAft>
+              <a:defRPr sz="1500">
                 <a:solidFill>
                   <a:srgbClr val="0F172A"/>
                 </a:solidFill>
@@ -8951,12 +8858,15 @@
           <a:p>
             <a:pPr>
               <a:lnSpc>
-                <a:spcPct val="130000"/>
-              </a:lnSpc>
-              <a:spcBef>
-                <a:spcPts val="800"/>
-              </a:spcBef>
-              <a:defRPr sz="1800">
+                <a:spcPct val="120000"/>
+              </a:lnSpc>
+              <a:spcBef>
+                <a:spcPts val="400"/>
+              </a:spcBef>
+              <a:spcAft>
+                <a:spcPts val="400"/>
+              </a:spcAft>
+              <a:defRPr sz="1500">
                 <a:solidFill>
                   <a:srgbClr val="0F172A"/>
                 </a:solidFill>
@@ -8969,12 +8879,15 @@
           <a:p>
             <a:pPr>
               <a:lnSpc>
-                <a:spcPct val="130000"/>
-              </a:lnSpc>
-              <a:spcBef>
-                <a:spcPts val="800"/>
-              </a:spcBef>
-              <a:defRPr sz="1800">
+                <a:spcPct val="120000"/>
+              </a:lnSpc>
+              <a:spcBef>
+                <a:spcPts val="400"/>
+              </a:spcBef>
+              <a:spcAft>
+                <a:spcPts val="400"/>
+              </a:spcAft>
+              <a:defRPr sz="1500">
                 <a:solidFill>
                   <a:srgbClr val="0F172A"/>
                 </a:solidFill>
@@ -8987,63 +8900,54 @@
           <a:p>
             <a:pPr>
               <a:lnSpc>
-                <a:spcPct val="130000"/>
-              </a:lnSpc>
-              <a:spcBef>
-                <a:spcPts val="800"/>
-              </a:spcBef>
-              <a:defRPr sz="1800">
-                <a:solidFill>
-                  <a:srgbClr val="0F172A"/>
-                </a:solidFill>
-              </a:defRPr>
-            </a:pPr>
-          </a:p>
-          <a:p>
-            <a:pPr>
-              <a:lnSpc>
-                <a:spcPct val="130000"/>
-              </a:lnSpc>
-              <a:spcBef>
-                <a:spcPts val="800"/>
-              </a:spcBef>
-              <a:defRPr sz="2000" b="1">
+                <a:spcPct val="120000"/>
+              </a:lnSpc>
+              <a:spcBef>
+                <a:spcPts val="400"/>
+              </a:spcBef>
+              <a:spcAft>
+                <a:spcPts val="400"/>
+              </a:spcAft>
+              <a:defRPr sz="1500">
+                <a:solidFill>
+                  <a:srgbClr val="0F172A"/>
+                </a:solidFill>
+              </a:defRPr>
+            </a:pPr>
+          </a:p>
+          <a:p>
+            <a:pPr>
+              <a:lnSpc>
+                <a:spcPct val="120000"/>
+              </a:lnSpc>
+              <a:spcBef>
+                <a:spcPts val="400"/>
+              </a:spcBef>
+              <a:spcAft>
+                <a:spcPts val="400"/>
+              </a:spcAft>
+              <a:defRPr sz="1600" b="1">
                 <a:solidFill>
                   <a:srgbClr val="1E3A8A"/>
                 </a:solidFill>
               </a:defRPr>
             </a:pPr>
             <a:r>
-              <a:t>【重要提醒】</a:t>
-            </a:r>
-          </a:p>
-          <a:p>
-            <a:pPr>
-              <a:lnSpc>
-                <a:spcPct val="130000"/>
-              </a:lnSpc>
-              <a:spcBef>
-                <a:spcPts val="800"/>
-              </a:spcBef>
-              <a:defRPr sz="1800">
-                <a:solidFill>
-                  <a:srgbClr val="0F172A"/>
-                </a:solidFill>
-              </a:defRPr>
-            </a:pPr>
-            <a:r>
-              <a:t>• 不要只學一套快淘汰的技術</a:t>
-            </a:r>
-          </a:p>
-          <a:p>
-            <a:pPr>
-              <a:lnSpc>
-                <a:spcPct val="130000"/>
-              </a:lnSpc>
-              <a:spcBef>
-                <a:spcPts val="800"/>
-              </a:spcBef>
-              <a:defRPr sz="1800">
+              <a:t>【提醒】</a:t>
+            </a:r>
+          </a:p>
+          <a:p>
+            <a:pPr>
+              <a:lnSpc>
+                <a:spcPct val="120000"/>
+              </a:lnSpc>
+              <a:spcBef>
+                <a:spcPts val="400"/>
+              </a:spcBef>
+              <a:spcAft>
+                <a:spcPts val="400"/>
+              </a:spcAft>
+              <a:defRPr sz="1500">
                 <a:solidFill>
                   <a:srgbClr val="0F172A"/>
                 </a:solidFill>
@@ -9056,12 +8960,15 @@
           <a:p>
             <a:pPr>
               <a:lnSpc>
-                <a:spcPct val="130000"/>
-              </a:lnSpc>
-              <a:spcBef>
-                <a:spcPts val="800"/>
-              </a:spcBef>
-              <a:defRPr sz="1800">
+                <a:spcPct val="120000"/>
+              </a:lnSpc>
+              <a:spcBef>
+                <a:spcPts val="400"/>
+              </a:spcBef>
+              <a:spcAft>
+                <a:spcPts val="400"/>
+              </a:spcAft>
+              <a:defRPr sz="1500">
                 <a:solidFill>
                   <a:srgbClr val="0F172A"/>
                 </a:solidFill>
@@ -9099,8 +9006,8 @@
         </p:nvSpPr>
         <p:spPr>
           <a:xfrm>
-            <a:off x="731520" y="548640"/>
-            <a:ext cx="10728655" cy="822960"/>
+            <a:off x="914400" y="457200"/>
+            <a:ext cx="10362895" cy="640080"/>
           </a:xfrm>
           <a:prstGeom prst="rect">
             <a:avLst/>
@@ -9108,13 +9015,13 @@
           <a:noFill/>
         </p:spPr>
         <p:txBody>
-          <a:bodyPr wrap="none">
+          <a:bodyPr wrap="square">
             <a:spAutoFit/>
           </a:bodyPr>
           <a:lstStyle/>
           <a:p>
             <a:pPr algn="ctr">
-              <a:defRPr sz="3600" b="1">
+              <a:defRPr sz="3200" b="1">
                 <a:solidFill>
                   <a:srgbClr val="1E3A8A"/>
                 </a:solidFill>
@@ -9134,8 +9041,8 @@
         </p:nvSpPr>
         <p:spPr>
           <a:xfrm>
-            <a:off x="4724704" y="1371600"/>
-            <a:ext cx="2743200" cy="45720"/>
+            <a:off x="5181904" y="1097280"/>
+            <a:ext cx="1828800" cy="36576"/>
           </a:xfrm>
           <a:prstGeom prst="rect">
             <a:avLst/>
@@ -9177,8 +9084,8 @@
         </p:nvSpPr>
         <p:spPr>
           <a:xfrm>
-            <a:off x="1371600" y="2011680"/>
-            <a:ext cx="9448495" cy="4389120"/>
+            <a:off x="1371600" y="1463040"/>
+            <a:ext cx="9448495" cy="5029200"/>
           </a:xfrm>
           <a:prstGeom prst="rect">
             <a:avLst/>
@@ -9186,22 +9093,22 @@
           <a:noFill/>
         </p:spPr>
         <p:txBody>
-          <a:bodyPr wrap="square" anchor="t">
+          <a:bodyPr wrap="square">
             <a:spAutoFit/>
           </a:bodyPr>
           <a:lstStyle/>
           <a:p>
             <a:pPr>
               <a:lnSpc>
-                <a:spcPct val="140000"/>
-              </a:lnSpc>
-              <a:spcBef>
-                <a:spcPts val="0"/>
-              </a:spcBef>
-              <a:spcAft>
-                <a:spcPts val="1000"/>
-              </a:spcAft>
-              <a:defRPr sz="2200" b="1">
+                <a:spcPct val="120000"/>
+              </a:lnSpc>
+              <a:spcBef>
+                <a:spcPts val="600"/>
+              </a:spcBef>
+              <a:spcAft>
+                <a:spcPts val="600"/>
+              </a:spcAft>
+              <a:defRPr sz="1800" b="1">
                 <a:solidFill>
                   <a:srgbClr val="1E3A8A"/>
                 </a:solidFill>
@@ -9214,96 +9121,75 @@
           <a:p>
             <a:pPr>
               <a:lnSpc>
-                <a:spcPct val="140000"/>
-              </a:lnSpc>
-              <a:spcBef>
-                <a:spcPts val="1000"/>
-              </a:spcBef>
-              <a:spcAft>
-                <a:spcPts val="1000"/>
-              </a:spcAft>
-              <a:defRPr sz="2000">
-                <a:solidFill>
-                  <a:srgbClr val="0F172A"/>
-                </a:solidFill>
-              </a:defRPr>
-            </a:pPr>
-            <a:r>
-              <a:t>   • 多數學校要求：托福80+ / 雅思6.0+ / 在校英文80分+</a:t>
-            </a:r>
-          </a:p>
-          <a:p>
-            <a:pPr>
-              <a:lnSpc>
-                <a:spcPct val="140000"/>
-              </a:lnSpc>
-              <a:spcBef>
-                <a:spcPts val="1000"/>
-              </a:spcBef>
-              <a:spcAft>
-                <a:spcPts val="1000"/>
-              </a:spcAft>
-              <a:defRPr sz="2000">
-                <a:solidFill>
-                  <a:srgbClr val="0F172A"/>
-                </a:solidFill>
-              </a:defRPr>
-            </a:pPr>
-            <a:r>
-              <a:t>   • 建議達到B2等級</a:t>
-            </a:r>
-          </a:p>
-          <a:p>
-            <a:pPr>
-              <a:lnSpc>
-                <a:spcPct val="140000"/>
-              </a:lnSpc>
-              <a:spcBef>
-                <a:spcPts val="1000"/>
-              </a:spcBef>
-              <a:spcAft>
-                <a:spcPts val="1000"/>
-              </a:spcAft>
-              <a:defRPr sz="2000">
-                <a:solidFill>
-                  <a:srgbClr val="0F172A"/>
-                </a:solidFill>
-              </a:defRPr>
-            </a:pPr>
-            <a:r>
-              <a:t>   • 越早考越好，可以重考</a:t>
-            </a:r>
-          </a:p>
-          <a:p>
-            <a:pPr>
-              <a:lnSpc>
-                <a:spcPct val="140000"/>
-              </a:lnSpc>
-              <a:spcBef>
-                <a:spcPts val="1000"/>
-              </a:spcBef>
-              <a:spcAft>
-                <a:spcPts val="1000"/>
-              </a:spcAft>
-              <a:defRPr sz="2000">
-                <a:solidFill>
-                  <a:srgbClr val="0F172A"/>
-                </a:solidFill>
-              </a:defRPr>
-            </a:pPr>
-          </a:p>
-          <a:p>
-            <a:pPr>
-              <a:lnSpc>
-                <a:spcPct val="140000"/>
-              </a:lnSpc>
-              <a:spcBef>
-                <a:spcPts val="1000"/>
-              </a:spcBef>
-              <a:spcAft>
-                <a:spcPts val="1000"/>
-              </a:spcAft>
-              <a:defRPr sz="2200" b="1">
+                <a:spcPct val="120000"/>
+              </a:lnSpc>
+              <a:spcBef>
+                <a:spcPts val="600"/>
+              </a:spcBef>
+              <a:spcAft>
+                <a:spcPts val="600"/>
+              </a:spcAft>
+              <a:defRPr sz="1600">
+                <a:solidFill>
+                  <a:srgbClr val="0F172A"/>
+                </a:solidFill>
+              </a:defRPr>
+            </a:pPr>
+            <a:r>
+              <a:t>• 多數學校：托福80+ / 雅思6.0+ / 在校英文80+</a:t>
+            </a:r>
+          </a:p>
+          <a:p>
+            <a:pPr>
+              <a:lnSpc>
+                <a:spcPct val="120000"/>
+              </a:lnSpc>
+              <a:spcBef>
+                <a:spcPts val="600"/>
+              </a:spcBef>
+              <a:spcAft>
+                <a:spcPts val="600"/>
+              </a:spcAft>
+              <a:defRPr sz="1600">
+                <a:solidFill>
+                  <a:srgbClr val="0F172A"/>
+                </a:solidFill>
+              </a:defRPr>
+            </a:pPr>
+            <a:r>
+              <a:t>• 建議達到B2等級，越早考越好</a:t>
+            </a:r>
+          </a:p>
+          <a:p>
+            <a:pPr>
+              <a:lnSpc>
+                <a:spcPct val="120000"/>
+              </a:lnSpc>
+              <a:spcBef>
+                <a:spcPts val="600"/>
+              </a:spcBef>
+              <a:spcAft>
+                <a:spcPts val="600"/>
+              </a:spcAft>
+              <a:defRPr sz="1600">
+                <a:solidFill>
+                  <a:srgbClr val="0F172A"/>
+                </a:solidFill>
+              </a:defRPr>
+            </a:pPr>
+          </a:p>
+          <a:p>
+            <a:pPr>
+              <a:lnSpc>
+                <a:spcPct val="120000"/>
+              </a:lnSpc>
+              <a:spcBef>
+                <a:spcPts val="600"/>
+              </a:spcBef>
+              <a:spcAft>
+                <a:spcPts val="600"/>
+              </a:spcAft>
+              <a:defRPr sz="1800" b="1">
                 <a:solidFill>
                   <a:srgbClr val="1E3A8A"/>
                 </a:solidFill>
@@ -9316,75 +9202,75 @@
           <a:p>
             <a:pPr>
               <a:lnSpc>
-                <a:spcPct val="140000"/>
-              </a:lnSpc>
-              <a:spcBef>
-                <a:spcPts val="1000"/>
-              </a:spcBef>
-              <a:spcAft>
-                <a:spcPts val="1000"/>
-              </a:spcAft>
-              <a:defRPr sz="2000">
-                <a:solidFill>
-                  <a:srgbClr val="0F172A"/>
-                </a:solidFill>
-              </a:defRPr>
-            </a:pPr>
-            <a:r>
-              <a:t>   • 沒有學術發表時，GPA是審核第一關</a:t>
-            </a:r>
-          </a:p>
-          <a:p>
-            <a:pPr>
-              <a:lnSpc>
-                <a:spcPct val="140000"/>
-              </a:lnSpc>
-              <a:spcBef>
-                <a:spcPts val="1000"/>
-              </a:spcBef>
-              <a:spcAft>
-                <a:spcPts val="1000"/>
-              </a:spcAft>
-              <a:defRPr sz="2000">
-                <a:solidFill>
-                  <a:srgbClr val="0F172A"/>
-                </a:solidFill>
-              </a:defRPr>
-            </a:pPr>
-            <a:r>
-              <a:t>   • 從大二就要開始重視</a:t>
-            </a:r>
-          </a:p>
-          <a:p>
-            <a:pPr>
-              <a:lnSpc>
-                <a:spcPct val="140000"/>
-              </a:lnSpc>
-              <a:spcBef>
-                <a:spcPts val="1000"/>
-              </a:spcBef>
-              <a:spcAft>
-                <a:spcPts val="1000"/>
-              </a:spcAft>
-              <a:defRPr sz="2000">
-                <a:solidFill>
-                  <a:srgbClr val="0F172A"/>
-                </a:solidFill>
-              </a:defRPr>
-            </a:pPr>
-          </a:p>
-          <a:p>
-            <a:pPr>
-              <a:lnSpc>
-                <a:spcPct val="140000"/>
-              </a:lnSpc>
-              <a:spcBef>
-                <a:spcPts val="1000"/>
-              </a:spcBef>
-              <a:spcAft>
-                <a:spcPts val="1000"/>
-              </a:spcAft>
-              <a:defRPr sz="2200" b="1">
+                <a:spcPct val="120000"/>
+              </a:lnSpc>
+              <a:spcBef>
+                <a:spcPts val="600"/>
+              </a:spcBef>
+              <a:spcAft>
+                <a:spcPts val="600"/>
+              </a:spcAft>
+              <a:defRPr sz="1600">
+                <a:solidFill>
+                  <a:srgbClr val="0F172A"/>
+                </a:solidFill>
+              </a:defRPr>
+            </a:pPr>
+            <a:r>
+              <a:t>• 沒有學術發表時，GPA是審核第一關</a:t>
+            </a:r>
+          </a:p>
+          <a:p>
+            <a:pPr>
+              <a:lnSpc>
+                <a:spcPct val="120000"/>
+              </a:lnSpc>
+              <a:spcBef>
+                <a:spcPts val="600"/>
+              </a:spcBef>
+              <a:spcAft>
+                <a:spcPts val="600"/>
+              </a:spcAft>
+              <a:defRPr sz="1600">
+                <a:solidFill>
+                  <a:srgbClr val="0F172A"/>
+                </a:solidFill>
+              </a:defRPr>
+            </a:pPr>
+            <a:r>
+              <a:t>• 從大二就要開始重視</a:t>
+            </a:r>
+          </a:p>
+          <a:p>
+            <a:pPr>
+              <a:lnSpc>
+                <a:spcPct val="120000"/>
+              </a:lnSpc>
+              <a:spcBef>
+                <a:spcPts val="600"/>
+              </a:spcBef>
+              <a:spcAft>
+                <a:spcPts val="600"/>
+              </a:spcAft>
+              <a:defRPr sz="1600">
+                <a:solidFill>
+                  <a:srgbClr val="0F172A"/>
+                </a:solidFill>
+              </a:defRPr>
+            </a:pPr>
+          </a:p>
+          <a:p>
+            <a:pPr>
+              <a:lnSpc>
+                <a:spcPct val="120000"/>
+              </a:lnSpc>
+              <a:spcBef>
+                <a:spcPts val="600"/>
+              </a:spcBef>
+              <a:spcAft>
+                <a:spcPts val="600"/>
+              </a:spcAft>
+              <a:defRPr sz="1800" b="1">
                 <a:solidFill>
                   <a:srgbClr val="1E3A8A"/>
                 </a:solidFill>
@@ -9397,85 +9283,85 @@
           <a:p>
             <a:pPr>
               <a:lnSpc>
-                <a:spcPct val="140000"/>
-              </a:lnSpc>
-              <a:spcBef>
-                <a:spcPts val="1000"/>
-              </a:spcBef>
-              <a:spcAft>
-                <a:spcPts val="1000"/>
-              </a:spcAft>
-              <a:defRPr sz="2000">
-                <a:solidFill>
-                  <a:srgbClr val="0F172A"/>
-                </a:solidFill>
-              </a:defRPr>
-            </a:pPr>
-            <a:r>
-              <a:t>   • 展現高度動機與熱忱</a:t>
-            </a:r>
-          </a:p>
-          <a:p>
-            <a:pPr>
-              <a:lnSpc>
-                <a:spcPct val="140000"/>
-              </a:lnSpc>
-              <a:spcBef>
-                <a:spcPts val="1000"/>
-              </a:spcBef>
-              <a:spcAft>
-                <a:spcPts val="1000"/>
-              </a:spcAft>
-              <a:defRPr sz="2000">
-                <a:solidFill>
-                  <a:srgbClr val="0F172A"/>
-                </a:solidFill>
-              </a:defRPr>
-            </a:pPr>
-            <a:r>
-              <a:t>   • 計畫要有組織性、可行性</a:t>
-            </a:r>
-          </a:p>
-          <a:p>
-            <a:pPr>
-              <a:lnSpc>
-                <a:spcPct val="140000"/>
-              </a:lnSpc>
-              <a:spcBef>
-                <a:spcPts val="1000"/>
-              </a:spcBef>
-              <a:spcAft>
-                <a:spcPts val="1000"/>
-              </a:spcAft>
-              <a:defRPr sz="2000">
-                <a:solidFill>
-                  <a:srgbClr val="0F172A"/>
-                </a:solidFill>
-              </a:defRPr>
-            </a:pPr>
-            <a:r>
-              <a:t>   • 證明你知道如何運用該地資源</a:t>
-            </a:r>
-          </a:p>
-          <a:p>
-            <a:pPr>
-              <a:lnSpc>
-                <a:spcPct val="140000"/>
-              </a:lnSpc>
-              <a:spcBef>
-                <a:spcPts val="1000"/>
-              </a:spcBef>
-              <a:spcAft>
-                <a:spcPts val="1000"/>
-              </a:spcAft>
-              <a:defRPr sz="2000">
-                <a:solidFill>
-                  <a:srgbClr val="0F172A"/>
-                </a:solidFill>
-              </a:defRPr>
-            </a:pPr>
-            <a:r>
-              <a:t>   • 找同學/老師進行同儕審查（peer review）</a:t>
+                <a:spcPct val="120000"/>
+              </a:lnSpc>
+              <a:spcBef>
+                <a:spcPts val="600"/>
+              </a:spcBef>
+              <a:spcAft>
+                <a:spcPts val="600"/>
+              </a:spcAft>
+              <a:defRPr sz="1600">
+                <a:solidFill>
+                  <a:srgbClr val="0F172A"/>
+                </a:solidFill>
+              </a:defRPr>
+            </a:pPr>
+            <a:r>
+              <a:t>• 展現高度動機與熱忱</a:t>
+            </a:r>
+          </a:p>
+          <a:p>
+            <a:pPr>
+              <a:lnSpc>
+                <a:spcPct val="120000"/>
+              </a:lnSpc>
+              <a:spcBef>
+                <a:spcPts val="600"/>
+              </a:spcBef>
+              <a:spcAft>
+                <a:spcPts val="600"/>
+              </a:spcAft>
+              <a:defRPr sz="1600">
+                <a:solidFill>
+                  <a:srgbClr val="0F172A"/>
+                </a:solidFill>
+              </a:defRPr>
+            </a:pPr>
+            <a:r>
+              <a:t>• 計畫要有組織性、可行性</a:t>
+            </a:r>
+          </a:p>
+          <a:p>
+            <a:pPr>
+              <a:lnSpc>
+                <a:spcPct val="120000"/>
+              </a:lnSpc>
+              <a:spcBef>
+                <a:spcPts val="600"/>
+              </a:spcBef>
+              <a:spcAft>
+                <a:spcPts val="600"/>
+              </a:spcAft>
+              <a:defRPr sz="1600">
+                <a:solidFill>
+                  <a:srgbClr val="0F172A"/>
+                </a:solidFill>
+              </a:defRPr>
+            </a:pPr>
+            <a:r>
+              <a:t>• 證明你知道如何運用該地資源</a:t>
+            </a:r>
+          </a:p>
+          <a:p>
+            <a:pPr>
+              <a:lnSpc>
+                <a:spcPct val="120000"/>
+              </a:lnSpc>
+              <a:spcBef>
+                <a:spcPts val="600"/>
+              </a:spcBef>
+              <a:spcAft>
+                <a:spcPts val="600"/>
+              </a:spcAft>
+              <a:defRPr sz="1600">
+                <a:solidFill>
+                  <a:srgbClr val="0F172A"/>
+                </a:solidFill>
+              </a:defRPr>
+            </a:pPr>
+            <a:r>
+              <a:t>• 找同學/老師進行同儕審查（peer review）</a:t>
             </a:r>
           </a:p>
         </p:txBody>
@@ -9506,8 +9392,8 @@
         </p:nvSpPr>
         <p:spPr>
           <a:xfrm>
-            <a:off x="731520" y="548640"/>
-            <a:ext cx="10728655" cy="822960"/>
+            <a:off x="914400" y="457200"/>
+            <a:ext cx="10362895" cy="640080"/>
           </a:xfrm>
           <a:prstGeom prst="rect">
             <a:avLst/>
@@ -9515,20 +9401,20 @@
           <a:noFill/>
         </p:spPr>
         <p:txBody>
-          <a:bodyPr wrap="none">
+          <a:bodyPr wrap="square">
             <a:spAutoFit/>
           </a:bodyPr>
           <a:lstStyle/>
           <a:p>
             <a:pPr algn="ctr">
-              <a:defRPr sz="3600" b="1">
+              <a:defRPr sz="3200" b="1">
                 <a:solidFill>
                   <a:srgbClr val="1E3A8A"/>
                 </a:solidFill>
               </a:defRPr>
             </a:pPr>
             <a:r>
-              <a:t>獎學金地圖：不要錯過免費機會</a:t>
+              <a:t>獎學金地圖</a:t>
             </a:r>
           </a:p>
         </p:txBody>
@@ -9541,8 +9427,8 @@
         </p:nvSpPr>
         <p:spPr>
           <a:xfrm>
-            <a:off x="4724704" y="1371600"/>
-            <a:ext cx="2743200" cy="45720"/>
+            <a:off x="5181904" y="1097280"/>
+            <a:ext cx="1828800" cy="36576"/>
           </a:xfrm>
           <a:prstGeom prst="rect">
             <a:avLst/>
@@ -9584,8 +9470,8 @@
         </p:nvSpPr>
         <p:spPr>
           <a:xfrm>
-            <a:off x="1371600" y="2011680"/>
-            <a:ext cx="9448495" cy="4389120"/>
+            <a:off x="1371600" y="1463040"/>
+            <a:ext cx="9448495" cy="5029200"/>
           </a:xfrm>
           <a:prstGeom prst="rect">
             <a:avLst/>
@@ -9593,22 +9479,22 @@
           <a:noFill/>
         </p:spPr>
         <p:txBody>
-          <a:bodyPr wrap="square" anchor="t">
+          <a:bodyPr wrap="square">
             <a:spAutoFit/>
           </a:bodyPr>
           <a:lstStyle/>
           <a:p>
             <a:pPr>
               <a:lnSpc>
-                <a:spcPct val="140000"/>
-              </a:lnSpc>
-              <a:spcBef>
-                <a:spcPts val="0"/>
-              </a:spcBef>
-              <a:spcAft>
-                <a:spcPts val="1000"/>
-              </a:spcAft>
-              <a:defRPr sz="2200" b="1">
+                <a:spcPct val="120000"/>
+              </a:lnSpc>
+              <a:spcBef>
+                <a:spcPts val="600"/>
+              </a:spcBef>
+              <a:spcAft>
+                <a:spcPts val="600"/>
+              </a:spcAft>
+              <a:defRPr sz="1800" b="1">
                 <a:solidFill>
                   <a:srgbClr val="1E3A8A"/>
                 </a:solidFill>
@@ -9621,96 +9507,96 @@
           <a:p>
             <a:pPr>
               <a:lnSpc>
-                <a:spcPct val="140000"/>
-              </a:lnSpc>
-              <a:spcBef>
-                <a:spcPts val="1000"/>
-              </a:spcBef>
-              <a:spcAft>
-                <a:spcPts val="1000"/>
-              </a:spcAft>
-              <a:defRPr sz="2000">
-                <a:solidFill>
-                  <a:srgbClr val="0F172A"/>
-                </a:solidFill>
-              </a:defRPr>
-            </a:pPr>
-            <a:r>
-              <a:t>   • 學海飛揚/惜珠：交換讀書類，NT$ 5-30萬</a:t>
-            </a:r>
-          </a:p>
-          <a:p>
-            <a:pPr>
-              <a:lnSpc>
-                <a:spcPct val="140000"/>
-              </a:lnSpc>
-              <a:spcBef>
-                <a:spcPts val="1000"/>
-              </a:spcBef>
-              <a:spcAft>
-                <a:spcPts val="1000"/>
-              </a:spcAft>
-              <a:defRPr sz="2000">
-                <a:solidFill>
-                  <a:srgbClr val="0F172A"/>
-                </a:solidFill>
-              </a:defRPr>
-            </a:pPr>
-            <a:r>
-              <a:t>   • 學海逐夢：實習類</a:t>
-            </a:r>
-          </a:p>
-          <a:p>
-            <a:pPr>
-              <a:lnSpc>
-                <a:spcPct val="140000"/>
-              </a:lnSpc>
-              <a:spcBef>
-                <a:spcPts val="1000"/>
-              </a:spcBef>
-              <a:spcAft>
-                <a:spcPts val="1000"/>
-              </a:spcAft>
-              <a:defRPr sz="2000">
-                <a:solidFill>
-                  <a:srgbClr val="0F172A"/>
-                </a:solidFill>
-              </a:defRPr>
-            </a:pPr>
-            <a:r>
-              <a:t>   • 弱勢優秀生（清寒）有保障名額</a:t>
-            </a:r>
-          </a:p>
-          <a:p>
-            <a:pPr>
-              <a:lnSpc>
-                <a:spcPct val="140000"/>
-              </a:lnSpc>
-              <a:spcBef>
-                <a:spcPts val="1000"/>
-              </a:spcBef>
-              <a:spcAft>
-                <a:spcPts val="1000"/>
-              </a:spcAft>
-              <a:defRPr sz="2000">
-                <a:solidFill>
-                  <a:srgbClr val="0F172A"/>
-                </a:solidFill>
-              </a:defRPr>
-            </a:pPr>
-          </a:p>
-          <a:p>
-            <a:pPr>
-              <a:lnSpc>
-                <a:spcPct val="140000"/>
-              </a:lnSpc>
-              <a:spcBef>
-                <a:spcPts val="1000"/>
-              </a:spcBef>
-              <a:spcAft>
-                <a:spcPts val="1000"/>
-              </a:spcAft>
-              <a:defRPr sz="2200" b="1">
+                <a:spcPct val="120000"/>
+              </a:lnSpc>
+              <a:spcBef>
+                <a:spcPts val="600"/>
+              </a:spcBef>
+              <a:spcAft>
+                <a:spcPts val="600"/>
+              </a:spcAft>
+              <a:defRPr sz="1600">
+                <a:solidFill>
+                  <a:srgbClr val="0F172A"/>
+                </a:solidFill>
+              </a:defRPr>
+            </a:pPr>
+            <a:r>
+              <a:t>• 學海飛揚/惜珠：交換讀書類，NT$ 5-30萬</a:t>
+            </a:r>
+          </a:p>
+          <a:p>
+            <a:pPr>
+              <a:lnSpc>
+                <a:spcPct val="120000"/>
+              </a:lnSpc>
+              <a:spcBef>
+                <a:spcPts val="600"/>
+              </a:spcBef>
+              <a:spcAft>
+                <a:spcPts val="600"/>
+              </a:spcAft>
+              <a:defRPr sz="1600">
+                <a:solidFill>
+                  <a:srgbClr val="0F172A"/>
+                </a:solidFill>
+              </a:defRPr>
+            </a:pPr>
+            <a:r>
+              <a:t>• 學海逐夢：實習類</a:t>
+            </a:r>
+          </a:p>
+          <a:p>
+            <a:pPr>
+              <a:lnSpc>
+                <a:spcPct val="120000"/>
+              </a:lnSpc>
+              <a:spcBef>
+                <a:spcPts val="600"/>
+              </a:spcBef>
+              <a:spcAft>
+                <a:spcPts val="600"/>
+              </a:spcAft>
+              <a:defRPr sz="1600">
+                <a:solidFill>
+                  <a:srgbClr val="0F172A"/>
+                </a:solidFill>
+              </a:defRPr>
+            </a:pPr>
+            <a:r>
+              <a:t>• 弱勢優秀生（清寒）有保障名額</a:t>
+            </a:r>
+          </a:p>
+          <a:p>
+            <a:pPr>
+              <a:lnSpc>
+                <a:spcPct val="120000"/>
+              </a:lnSpc>
+              <a:spcBef>
+                <a:spcPts val="600"/>
+              </a:spcBef>
+              <a:spcAft>
+                <a:spcPts val="600"/>
+              </a:spcAft>
+              <a:defRPr sz="1600">
+                <a:solidFill>
+                  <a:srgbClr val="0F172A"/>
+                </a:solidFill>
+              </a:defRPr>
+            </a:pPr>
+          </a:p>
+          <a:p>
+            <a:pPr>
+              <a:lnSpc>
+                <a:spcPct val="120000"/>
+              </a:lnSpc>
+              <a:spcBef>
+                <a:spcPts val="600"/>
+              </a:spcBef>
+              <a:spcAft>
+                <a:spcPts val="600"/>
+              </a:spcAft>
+              <a:defRPr sz="1800" b="1">
                 <a:solidFill>
                   <a:srgbClr val="1E3A8A"/>
                 </a:solidFill>
@@ -9723,117 +9609,96 @@
           <a:p>
             <a:pPr>
               <a:lnSpc>
-                <a:spcPct val="140000"/>
-              </a:lnSpc>
-              <a:spcBef>
-                <a:spcPts val="1000"/>
-              </a:spcBef>
-              <a:spcAft>
-                <a:spcPts val="1000"/>
-              </a:spcAft>
-              <a:defRPr sz="2000">
-                <a:solidFill>
-                  <a:srgbClr val="0F172A"/>
-                </a:solidFill>
-              </a:defRPr>
-            </a:pPr>
-            <a:r>
-              <a:t>   • 每月12,000捷克克朗（約NT$ 16,800）</a:t>
-            </a:r>
-          </a:p>
-          <a:p>
-            <a:pPr>
-              <a:lnSpc>
-                <a:spcPct val="140000"/>
-              </a:lnSpc>
-              <a:spcBef>
-                <a:spcPts val="1000"/>
-              </a:spcBef>
-              <a:spcAft>
-                <a:spcPts val="1000"/>
-              </a:spcAft>
-              <a:defRPr sz="2000">
-                <a:solidFill>
-                  <a:srgbClr val="0F172A"/>
-                </a:solidFill>
-              </a:defRPr>
-            </a:pPr>
-            <a:r>
-              <a:t>   • 取得邀請函 ≈ 保送</a:t>
-            </a:r>
-          </a:p>
-          <a:p>
-            <a:pPr>
-              <a:lnSpc>
-                <a:spcPct val="140000"/>
-              </a:lnSpc>
-              <a:spcBef>
-                <a:spcPts val="1000"/>
-              </a:spcBef>
-              <a:spcAft>
-                <a:spcPts val="1000"/>
-              </a:spcAft>
-              <a:defRPr sz="2000">
-                <a:solidFill>
-                  <a:srgbClr val="0F172A"/>
-                </a:solidFill>
-              </a:defRPr>
-            </a:pPr>
-            <a:r>
-              <a:t>   • 學校推薦名額有限（陽明交大最多5個）</a:t>
-            </a:r>
-          </a:p>
-          <a:p>
-            <a:pPr>
-              <a:lnSpc>
-                <a:spcPct val="140000"/>
-              </a:lnSpc>
-              <a:spcBef>
-                <a:spcPts val="1000"/>
-              </a:spcBef>
-              <a:spcAft>
-                <a:spcPts val="1000"/>
-              </a:spcAft>
-              <a:defRPr sz="2000">
-                <a:solidFill>
-                  <a:srgbClr val="0F172A"/>
-                </a:solidFill>
-              </a:defRPr>
-            </a:pPr>
-            <a:r>
-              <a:t>   • 注意：台灣錄取 ≠ 捷克最終核准</a:t>
-            </a:r>
-          </a:p>
-          <a:p>
-            <a:pPr>
-              <a:lnSpc>
-                <a:spcPct val="140000"/>
-              </a:lnSpc>
-              <a:spcBef>
-                <a:spcPts val="1000"/>
-              </a:spcBef>
-              <a:spcAft>
-                <a:spcPts val="1000"/>
-              </a:spcAft>
-              <a:defRPr sz="2000">
-                <a:solidFill>
-                  <a:srgbClr val="0F172A"/>
-                </a:solidFill>
-              </a:defRPr>
-            </a:pPr>
-          </a:p>
-          <a:p>
-            <a:pPr>
-              <a:lnSpc>
-                <a:spcPct val="140000"/>
-              </a:lnSpc>
-              <a:spcBef>
-                <a:spcPts val="1000"/>
-              </a:spcBef>
-              <a:spcAft>
-                <a:spcPts val="1000"/>
-              </a:spcAft>
-              <a:defRPr sz="2200" b="1">
+                <a:spcPct val="120000"/>
+              </a:lnSpc>
+              <a:spcBef>
+                <a:spcPts val="600"/>
+              </a:spcBef>
+              <a:spcAft>
+                <a:spcPts val="600"/>
+              </a:spcAft>
+              <a:defRPr sz="1600">
+                <a:solidFill>
+                  <a:srgbClr val="0F172A"/>
+                </a:solidFill>
+              </a:defRPr>
+            </a:pPr>
+            <a:r>
+              <a:t>• 每月12,000捷克克朗（約NT$ 16,800）</a:t>
+            </a:r>
+          </a:p>
+          <a:p>
+            <a:pPr>
+              <a:lnSpc>
+                <a:spcPct val="120000"/>
+              </a:lnSpc>
+              <a:spcBef>
+                <a:spcPts val="600"/>
+              </a:spcBef>
+              <a:spcAft>
+                <a:spcPts val="600"/>
+              </a:spcAft>
+              <a:defRPr sz="1600">
+                <a:solidFill>
+                  <a:srgbClr val="0F172A"/>
+                </a:solidFill>
+              </a:defRPr>
+            </a:pPr>
+            <a:r>
+              <a:t>• 取得邀請函 ≈ 保送</a:t>
+            </a:r>
+          </a:p>
+          <a:p>
+            <a:pPr>
+              <a:lnSpc>
+                <a:spcPct val="120000"/>
+              </a:lnSpc>
+              <a:spcBef>
+                <a:spcPts val="600"/>
+              </a:spcBef>
+              <a:spcAft>
+                <a:spcPts val="600"/>
+              </a:spcAft>
+              <a:defRPr sz="1600">
+                <a:solidFill>
+                  <a:srgbClr val="0F172A"/>
+                </a:solidFill>
+              </a:defRPr>
+            </a:pPr>
+            <a:r>
+              <a:t>• 學校推薦名額有限（陽明交大最多5個）</a:t>
+            </a:r>
+          </a:p>
+          <a:p>
+            <a:pPr>
+              <a:lnSpc>
+                <a:spcPct val="120000"/>
+              </a:lnSpc>
+              <a:spcBef>
+                <a:spcPts val="600"/>
+              </a:spcBef>
+              <a:spcAft>
+                <a:spcPts val="600"/>
+              </a:spcAft>
+              <a:defRPr sz="1600">
+                <a:solidFill>
+                  <a:srgbClr val="0F172A"/>
+                </a:solidFill>
+              </a:defRPr>
+            </a:pPr>
+          </a:p>
+          <a:p>
+            <a:pPr>
+              <a:lnSpc>
+                <a:spcPct val="120000"/>
+              </a:lnSpc>
+              <a:spcBef>
+                <a:spcPts val="600"/>
+              </a:spcBef>
+              <a:spcAft>
+                <a:spcPts val="600"/>
+              </a:spcAft>
+              <a:defRPr sz="1800" b="1">
                 <a:solidFill>
                   <a:srgbClr val="1E3A8A"/>
                 </a:solidFill>
@@ -9846,43 +9711,43 @@
           <a:p>
             <a:pPr>
               <a:lnSpc>
-                <a:spcPct val="140000"/>
-              </a:lnSpc>
-              <a:spcBef>
-                <a:spcPts val="1000"/>
-              </a:spcBef>
-              <a:spcAft>
-                <a:spcPts val="1000"/>
-              </a:spcAft>
-              <a:defRPr sz="2000">
-                <a:solidFill>
-                  <a:srgbClr val="0F172A"/>
-                </a:solidFill>
-              </a:defRPr>
-            </a:pPr>
-            <a:r>
-              <a:t>   • 教育部留學獎學金（碩博士）</a:t>
-            </a:r>
-          </a:p>
-          <a:p>
-            <a:pPr>
-              <a:lnSpc>
-                <a:spcPct val="140000"/>
-              </a:lnSpc>
-              <a:spcBef>
-                <a:spcPts val="1000"/>
-              </a:spcBef>
-              <a:spcAft>
-                <a:spcPts val="1000"/>
-              </a:spcAft>
-              <a:defRPr sz="2000">
-                <a:solidFill>
-                  <a:srgbClr val="0F172A"/>
-                </a:solidFill>
-              </a:defRPr>
-            </a:pPr>
-            <a:r>
-              <a:t>   • 教育部就學貸款（碩士100萬、博士200萬，清寒免息）</a:t>
+                <a:spcPct val="120000"/>
+              </a:lnSpc>
+              <a:spcBef>
+                <a:spcPts val="600"/>
+              </a:spcBef>
+              <a:spcAft>
+                <a:spcPts val="600"/>
+              </a:spcAft>
+              <a:defRPr sz="1600">
+                <a:solidFill>
+                  <a:srgbClr val="0F172A"/>
+                </a:solidFill>
+              </a:defRPr>
+            </a:pPr>
+            <a:r>
+              <a:t>• 教育部留學獎學金（碩博士）</a:t>
+            </a:r>
+          </a:p>
+          <a:p>
+            <a:pPr>
+              <a:lnSpc>
+                <a:spcPct val="120000"/>
+              </a:lnSpc>
+              <a:spcBef>
+                <a:spcPts val="600"/>
+              </a:spcBef>
+              <a:spcAft>
+                <a:spcPts val="600"/>
+              </a:spcAft>
+              <a:defRPr sz="1600">
+                <a:solidFill>
+                  <a:srgbClr val="0F172A"/>
+                </a:solidFill>
+              </a:defRPr>
+            </a:pPr>
+            <a:r>
+              <a:t>• 就學貸款（碩士100萬、博士200萬，清寒免息）</a:t>
             </a:r>
           </a:p>
         </p:txBody>
@@ -9913,8 +9778,8 @@
         </p:nvSpPr>
         <p:spPr>
           <a:xfrm>
-            <a:off x="731520" y="548640"/>
-            <a:ext cx="10728655" cy="822960"/>
+            <a:off x="914400" y="457200"/>
+            <a:ext cx="10362895" cy="640080"/>
           </a:xfrm>
           <a:prstGeom prst="rect">
             <a:avLst/>
@@ -9922,13 +9787,13 @@
           <a:noFill/>
         </p:spPr>
         <p:txBody>
-          <a:bodyPr wrap="none">
+          <a:bodyPr wrap="square">
             <a:spAutoFit/>
           </a:bodyPr>
           <a:lstStyle/>
           <a:p>
             <a:pPr algn="ctr">
-              <a:defRPr sz="3600" b="1">
+              <a:defRPr sz="3200" b="1">
                 <a:solidFill>
                   <a:srgbClr val="1E3A8A"/>
                 </a:solidFill>
@@ -9948,8 +9813,8 @@
         </p:nvSpPr>
         <p:spPr>
           <a:xfrm>
-            <a:off x="4724704" y="1371600"/>
-            <a:ext cx="2743200" cy="45720"/>
+            <a:off x="5181904" y="1097280"/>
+            <a:ext cx="1828800" cy="36576"/>
           </a:xfrm>
           <a:prstGeom prst="rect">
             <a:avLst/>
@@ -9991,8 +9856,8 @@
         </p:nvSpPr>
         <p:spPr>
           <a:xfrm>
-            <a:off x="1371600" y="2011680"/>
-            <a:ext cx="9448495" cy="4389120"/>
+            <a:off x="1371600" y="1463040"/>
+            <a:ext cx="9448495" cy="5029200"/>
           </a:xfrm>
           <a:prstGeom prst="rect">
             <a:avLst/>
@@ -10000,61 +9865,43 @@
           <a:noFill/>
         </p:spPr>
         <p:txBody>
-          <a:bodyPr wrap="square" anchor="t">
+          <a:bodyPr wrap="square">
             <a:spAutoFit/>
           </a:bodyPr>
           <a:lstStyle/>
           <a:p>
             <a:pPr>
               <a:lnSpc>
-                <a:spcPct val="140000"/>
-              </a:lnSpc>
-              <a:spcBef>
-                <a:spcPts val="0"/>
-              </a:spcBef>
-              <a:spcAft>
-                <a:spcPts val="1000"/>
-              </a:spcAft>
-              <a:defRPr sz="2200" b="1">
+                <a:spcPct val="120000"/>
+              </a:lnSpc>
+              <a:spcBef>
+                <a:spcPts val="600"/>
+              </a:spcBef>
+              <a:spcAft>
+                <a:spcPts val="600"/>
+              </a:spcAft>
+              <a:defRPr sz="1800" b="1">
                 <a:solidFill>
                   <a:srgbClr val="1E3A8A"/>
                 </a:solidFill>
               </a:defRPr>
             </a:pPr>
             <a:r>
-              <a:t>【考量因素清單】</a:t>
-            </a:r>
-          </a:p>
-          <a:p>
-            <a:pPr>
-              <a:lnSpc>
-                <a:spcPct val="140000"/>
-              </a:lnSpc>
-              <a:spcBef>
-                <a:spcPts val="1000"/>
-              </a:spcBef>
-              <a:spcAft>
-                <a:spcPts val="1000"/>
-              </a:spcAft>
-              <a:defRPr sz="2000">
-                <a:solidFill>
-                  <a:srgbClr val="0F172A"/>
-                </a:solidFill>
-              </a:defRPr>
-            </a:pPr>
-          </a:p>
-          <a:p>
-            <a:pPr>
-              <a:lnSpc>
-                <a:spcPct val="140000"/>
-              </a:lnSpc>
-              <a:spcBef>
-                <a:spcPts val="1000"/>
-              </a:spcBef>
-              <a:spcAft>
-                <a:spcPts val="1000"/>
-              </a:spcAft>
-              <a:defRPr sz="2000">
+              <a:t>【考量因素】</a:t>
+            </a:r>
+          </a:p>
+          <a:p>
+            <a:pPr>
+              <a:lnSpc>
+                <a:spcPct val="120000"/>
+              </a:lnSpc>
+              <a:spcBef>
+                <a:spcPts val="600"/>
+              </a:spcBef>
+              <a:spcAft>
+                <a:spcPts val="600"/>
+              </a:spcAft>
+              <a:defRPr sz="1600">
                 <a:solidFill>
                   <a:srgbClr val="0F172A"/>
                 </a:solidFill>
@@ -10067,15 +9914,15 @@
           <a:p>
             <a:pPr>
               <a:lnSpc>
-                <a:spcPct val="140000"/>
-              </a:lnSpc>
-              <a:spcBef>
-                <a:spcPts val="1000"/>
-              </a:spcBef>
-              <a:spcAft>
-                <a:spcPts val="1000"/>
-              </a:spcAft>
-              <a:defRPr sz="2000">
+                <a:spcPct val="120000"/>
+              </a:lnSpc>
+              <a:spcBef>
+                <a:spcPts val="600"/>
+              </a:spcBef>
+              <a:spcAft>
+                <a:spcPts val="600"/>
+              </a:spcAft>
+              <a:defRPr sz="1600">
                 <a:solidFill>
                   <a:srgbClr val="0F172A"/>
                 </a:solidFill>
@@ -10088,15 +9935,15 @@
           <a:p>
             <a:pPr>
               <a:lnSpc>
-                <a:spcPct val="140000"/>
-              </a:lnSpc>
-              <a:spcBef>
-                <a:spcPts val="1000"/>
-              </a:spcBef>
-              <a:spcAft>
-                <a:spcPts val="1000"/>
-              </a:spcAft>
-              <a:defRPr sz="2000">
+                <a:spcPct val="120000"/>
+              </a:lnSpc>
+              <a:spcBef>
+                <a:spcPts val="600"/>
+              </a:spcBef>
+              <a:spcAft>
+                <a:spcPts val="600"/>
+              </a:spcAft>
+              <a:defRPr sz="1600">
                 <a:solidFill>
                   <a:srgbClr val="0F172A"/>
                 </a:solidFill>
@@ -10109,15 +9956,15 @@
           <a:p>
             <a:pPr>
               <a:lnSpc>
-                <a:spcPct val="140000"/>
-              </a:lnSpc>
-              <a:spcBef>
-                <a:spcPts val="1000"/>
-              </a:spcBef>
-              <a:spcAft>
-                <a:spcPts val="1000"/>
-              </a:spcAft>
-              <a:defRPr sz="2000">
+                <a:spcPct val="120000"/>
+              </a:lnSpc>
+              <a:spcBef>
+                <a:spcPts val="600"/>
+              </a:spcBef>
+              <a:spcAft>
+                <a:spcPts val="600"/>
+              </a:spcAft>
+              <a:defRPr sz="1600">
                 <a:solidFill>
                   <a:srgbClr val="0F172A"/>
                 </a:solidFill>
@@ -10130,15 +9977,15 @@
           <a:p>
             <a:pPr>
               <a:lnSpc>
-                <a:spcPct val="140000"/>
-              </a:lnSpc>
-              <a:spcBef>
-                <a:spcPts val="1000"/>
-              </a:spcBef>
-              <a:spcAft>
-                <a:spcPts val="1000"/>
-              </a:spcAft>
-              <a:defRPr sz="2000">
+                <a:spcPct val="120000"/>
+              </a:lnSpc>
+              <a:spcBef>
+                <a:spcPts val="600"/>
+              </a:spcBef>
+              <a:spcAft>
+                <a:spcPts val="600"/>
+              </a:spcAft>
+              <a:defRPr sz="1600">
                 <a:solidFill>
                   <a:srgbClr val="0F172A"/>
                 </a:solidFill>
@@ -10151,15 +9998,15 @@
           <a:p>
             <a:pPr>
               <a:lnSpc>
-                <a:spcPct val="140000"/>
-              </a:lnSpc>
-              <a:spcBef>
-                <a:spcPts val="1000"/>
-              </a:spcBef>
-              <a:spcAft>
-                <a:spcPts val="1000"/>
-              </a:spcAft>
-              <a:defRPr sz="2000">
+                <a:spcPct val="120000"/>
+              </a:lnSpc>
+              <a:spcBef>
+                <a:spcPts val="600"/>
+              </a:spcBef>
+              <a:spcAft>
+                <a:spcPts val="600"/>
+              </a:spcAft>
+              <a:defRPr sz="1600">
                 <a:solidFill>
                   <a:srgbClr val="0F172A"/>
                 </a:solidFill>
@@ -10172,15 +10019,15 @@
           <a:p>
             <a:pPr>
               <a:lnSpc>
-                <a:spcPct val="140000"/>
-              </a:lnSpc>
-              <a:spcBef>
-                <a:spcPts val="1000"/>
-              </a:spcBef>
-              <a:spcAft>
-                <a:spcPts val="1000"/>
-              </a:spcAft>
-              <a:defRPr sz="2000">
+                <a:spcPct val="120000"/>
+              </a:lnSpc>
+              <a:spcBef>
+                <a:spcPts val="600"/>
+              </a:spcBef>
+              <a:spcAft>
+                <a:spcPts val="600"/>
+              </a:spcAft>
+              <a:defRPr sz="1600">
                 <a:solidFill>
                   <a:srgbClr val="0F172A"/>
                 </a:solidFill>
@@ -10193,15 +10040,15 @@
           <a:p>
             <a:pPr>
               <a:lnSpc>
-                <a:spcPct val="140000"/>
-              </a:lnSpc>
-              <a:spcBef>
-                <a:spcPts val="1000"/>
-              </a:spcBef>
-              <a:spcAft>
-                <a:spcPts val="1000"/>
-              </a:spcAft>
-              <a:defRPr sz="2000">
+                <a:spcPct val="120000"/>
+              </a:lnSpc>
+              <a:spcBef>
+                <a:spcPts val="600"/>
+              </a:spcBef>
+              <a:spcAft>
+                <a:spcPts val="600"/>
+              </a:spcAft>
+              <a:defRPr sz="1600">
                 <a:solidFill>
                   <a:srgbClr val="0F172A"/>
                 </a:solidFill>
@@ -10214,82 +10061,61 @@
           <a:p>
             <a:pPr>
               <a:lnSpc>
-                <a:spcPct val="140000"/>
-              </a:lnSpc>
-              <a:spcBef>
-                <a:spcPts val="1000"/>
-              </a:spcBef>
-              <a:spcAft>
-                <a:spcPts val="1000"/>
-              </a:spcAft>
-              <a:defRPr sz="2000">
-                <a:solidFill>
-                  <a:srgbClr val="0F172A"/>
-                </a:solidFill>
-              </a:defRPr>
-            </a:pPr>
-          </a:p>
-          <a:p>
-            <a:pPr>
-              <a:lnSpc>
-                <a:spcPct val="140000"/>
-              </a:lnSpc>
-              <a:spcBef>
-                <a:spcPts val="1000"/>
-              </a:spcBef>
-              <a:spcAft>
-                <a:spcPts val="1000"/>
-              </a:spcAft>
-              <a:defRPr sz="2200" b="1">
+                <a:spcPct val="120000"/>
+              </a:lnSpc>
+              <a:spcBef>
+                <a:spcPts val="600"/>
+              </a:spcBef>
+              <a:spcAft>
+                <a:spcPts val="600"/>
+              </a:spcAft>
+              <a:defRPr sz="1600">
+                <a:solidFill>
+                  <a:srgbClr val="0F172A"/>
+                </a:solidFill>
+              </a:defRPr>
+            </a:pPr>
+          </a:p>
+          <a:p>
+            <a:pPr>
+              <a:lnSpc>
+                <a:spcPct val="120000"/>
+              </a:lnSpc>
+              <a:spcBef>
+                <a:spcPts val="600"/>
+              </a:spcBef>
+              <a:spcAft>
+                <a:spcPts val="600"/>
+              </a:spcAft>
+              <a:defRPr sz="1800" b="1">
                 <a:solidFill>
                   <a:srgbClr val="1E3A8A"/>
                 </a:solidFill>
               </a:defRPr>
             </a:pPr>
             <a:r>
-              <a:t>【特殊領域提醒】</a:t>
-            </a:r>
-          </a:p>
-          <a:p>
-            <a:pPr>
-              <a:lnSpc>
-                <a:spcPct val="140000"/>
-              </a:lnSpc>
-              <a:spcBef>
-                <a:spcPts val="1000"/>
-              </a:spcBef>
-              <a:spcAft>
-                <a:spcPts val="1000"/>
-              </a:spcAft>
-              <a:defRPr sz="2000">
-                <a:solidFill>
-                  <a:srgbClr val="0F172A"/>
-                </a:solidFill>
-              </a:defRPr>
-            </a:pPr>
-            <a:r>
-              <a:t>AI研究：歐盟法規嚴格（GDPR、AI法），工具受限</a:t>
-            </a:r>
-          </a:p>
-          <a:p>
-            <a:pPr>
-              <a:lnSpc>
-                <a:spcPct val="140000"/>
-              </a:lnSpc>
-              <a:spcBef>
-                <a:spcPts val="1000"/>
-              </a:spcBef>
-              <a:spcAft>
-                <a:spcPts val="1000"/>
-              </a:spcAft>
-              <a:defRPr sz="2000">
-                <a:solidFill>
-                  <a:srgbClr val="0F172A"/>
-                </a:solidFill>
-              </a:defRPr>
-            </a:pPr>
-            <a:r>
-              <a:t>建議在歐盟做「只能在歐盟做的事」（如網路治理、AI法案研究）</a:t>
+              <a:t>【特殊提醒】AI研究：歐盟法規嚴格（GDPR、AI法），工具受限</a:t>
+            </a:r>
+          </a:p>
+          <a:p>
+            <a:pPr>
+              <a:lnSpc>
+                <a:spcPct val="120000"/>
+              </a:lnSpc>
+              <a:spcBef>
+                <a:spcPts val="600"/>
+              </a:spcBef>
+              <a:spcAft>
+                <a:spcPts val="600"/>
+              </a:spcAft>
+              <a:defRPr sz="1600">
+                <a:solidFill>
+                  <a:srgbClr val="0F172A"/>
+                </a:solidFill>
+              </a:defRPr>
+            </a:pPr>
+            <a:r>
+              <a:t>建議在歐盟做「只能在歐盟做的事」（網路治理、AI法案研究）</a:t>
             </a:r>
           </a:p>
         </p:txBody>
@@ -10320,8 +10146,8 @@
         </p:nvSpPr>
         <p:spPr>
           <a:xfrm>
-            <a:off x="731520" y="457200"/>
-            <a:ext cx="10728655" cy="731520"/>
+            <a:off x="914400" y="365760"/>
+            <a:ext cx="10362895" cy="548640"/>
           </a:xfrm>
           <a:prstGeom prst="rect">
             <a:avLst/>
@@ -10329,20 +10155,20 @@
           <a:noFill/>
         </p:spPr>
         <p:txBody>
-          <a:bodyPr wrap="none">
+          <a:bodyPr wrap="square">
             <a:spAutoFit/>
           </a:bodyPr>
           <a:lstStyle/>
           <a:p>
             <a:pPr algn="ctr">
-              <a:defRPr sz="3200" b="1">
+              <a:defRPr sz="2800" b="1">
                 <a:solidFill>
                   <a:srgbClr val="1E3A8A"/>
                 </a:solidFill>
               </a:defRPr>
             </a:pPr>
             <a:r>
-              <a:t>行前準備：不可妥協的8件事</a:t>
+              <a:t>行前準備：不可妥協的重要事項</a:t>
             </a:r>
           </a:p>
         </p:txBody>
@@ -10355,8 +10181,8 @@
         </p:nvSpPr>
         <p:spPr>
           <a:xfrm>
-            <a:off x="6096304" y="1371600"/>
-            <a:ext cx="27432" cy="5029200"/>
+            <a:off x="6096304" y="1188720"/>
+            <a:ext cx="18288" cy="5303520"/>
           </a:xfrm>
           <a:prstGeom prst="rect">
             <a:avLst/>
@@ -10398,8 +10224,8 @@
         </p:nvSpPr>
         <p:spPr>
           <a:xfrm>
-            <a:off x="731520" y="1371600"/>
-            <a:ext cx="5029200" cy="457200"/>
+            <a:off x="914400" y="1097280"/>
+            <a:ext cx="4846320" cy="365760"/>
           </a:xfrm>
           <a:prstGeom prst="rect">
             <a:avLst/>
@@ -10413,14 +10239,14 @@
           <a:lstStyle/>
           <a:p>
             <a:pPr algn="ctr">
-              <a:defRPr sz="2400" b="1">
+              <a:defRPr sz="2000" b="1">
                 <a:solidFill>
                   <a:srgbClr val="3B82F6"/>
                 </a:solidFill>
               </a:defRPr>
             </a:pPr>
             <a:r>
-              <a:t>必備項目（左）</a:t>
+              <a:t>必備項目</a:t>
             </a:r>
           </a:p>
         </p:txBody>
@@ -10433,8 +10259,8 @@
         </p:nvSpPr>
         <p:spPr>
           <a:xfrm>
-            <a:off x="731520" y="2011680"/>
-            <a:ext cx="5029200" cy="4572000"/>
+            <a:off x="914400" y="1554480"/>
+            <a:ext cx="4846320" cy="4937760"/>
           </a:xfrm>
           <a:prstGeom prst="rect">
             <a:avLst/>
@@ -10449,12 +10275,15 @@
           <a:p>
             <a:pPr>
               <a:lnSpc>
-                <a:spcPct val="130000"/>
-              </a:lnSpc>
-              <a:spcBef>
-                <a:spcPts val="800"/>
-              </a:spcBef>
-              <a:defRPr sz="2000" b="1">
+                <a:spcPct val="120000"/>
+              </a:lnSpc>
+              <a:spcBef>
+                <a:spcPts val="400"/>
+              </a:spcBef>
+              <a:spcAft>
+                <a:spcPts val="400"/>
+              </a:spcAft>
+              <a:defRPr sz="1600" b="1">
                 <a:solidFill>
                   <a:srgbClr val="1E3A8A"/>
                 </a:solidFill>
@@ -10467,12 +10296,15 @@
           <a:p>
             <a:pPr>
               <a:lnSpc>
-                <a:spcPct val="130000"/>
-              </a:lnSpc>
-              <a:spcBef>
-                <a:spcPts val="800"/>
-              </a:spcBef>
-              <a:defRPr sz="1800">
+                <a:spcPct val="120000"/>
+              </a:lnSpc>
+              <a:spcBef>
+                <a:spcPts val="400"/>
+              </a:spcBef>
+              <a:spcAft>
+                <a:spcPts val="400"/>
+              </a:spcAft>
+              <a:defRPr sz="1500">
                 <a:solidFill>
                   <a:srgbClr val="0F172A"/>
                 </a:solidFill>
@@ -10485,12 +10317,15 @@
           <a:p>
             <a:pPr>
               <a:lnSpc>
-                <a:spcPct val="130000"/>
-              </a:lnSpc>
-              <a:spcBef>
-                <a:spcPts val="800"/>
-              </a:spcBef>
-              <a:defRPr sz="1800">
+                <a:spcPct val="120000"/>
+              </a:lnSpc>
+              <a:spcBef>
+                <a:spcPts val="400"/>
+              </a:spcBef>
+              <a:spcAft>
+                <a:spcPts val="400"/>
+              </a:spcAft>
+              <a:defRPr sz="1500">
                 <a:solidFill>
                   <a:srgbClr val="0F172A"/>
                 </a:solidFill>
@@ -10503,30 +10338,36 @@
           <a:p>
             <a:pPr>
               <a:lnSpc>
-                <a:spcPct val="130000"/>
-              </a:lnSpc>
-              <a:spcBef>
-                <a:spcPts val="800"/>
-              </a:spcBef>
-              <a:defRPr sz="1800">
-                <a:solidFill>
-                  <a:srgbClr val="0F172A"/>
-                </a:solidFill>
-              </a:defRPr>
-            </a:pPr>
-            <a:r>
-              <a:t>• 國際學生證 ISIC（歐洲很好用）</a:t>
-            </a:r>
-          </a:p>
-          <a:p>
-            <a:pPr>
-              <a:lnSpc>
-                <a:spcPct val="130000"/>
-              </a:lnSpc>
-              <a:spcBef>
-                <a:spcPts val="800"/>
-              </a:spcBef>
-              <a:defRPr sz="1800">
+                <a:spcPct val="120000"/>
+              </a:lnSpc>
+              <a:spcBef>
+                <a:spcPts val="400"/>
+              </a:spcBef>
+              <a:spcAft>
+                <a:spcPts val="400"/>
+              </a:spcAft>
+              <a:defRPr sz="1500">
+                <a:solidFill>
+                  <a:srgbClr val="0F172A"/>
+                </a:solidFill>
+              </a:defRPr>
+            </a:pPr>
+            <a:r>
+              <a:t>• 國際學生證 ISIC</a:t>
+            </a:r>
+          </a:p>
+          <a:p>
+            <a:pPr>
+              <a:lnSpc>
+                <a:spcPct val="120000"/>
+              </a:lnSpc>
+              <a:spcBef>
+                <a:spcPts val="400"/>
+              </a:spcBef>
+              <a:spcAft>
+                <a:spcPts val="400"/>
+              </a:spcAft>
+              <a:defRPr sz="1500">
                 <a:solidFill>
                   <a:srgbClr val="0F172A"/>
                 </a:solidFill>
@@ -10539,27 +10380,33 @@
           <a:p>
             <a:pPr>
               <a:lnSpc>
-                <a:spcPct val="130000"/>
-              </a:lnSpc>
-              <a:spcBef>
-                <a:spcPts val="800"/>
-              </a:spcBef>
-              <a:defRPr sz="1800">
-                <a:solidFill>
-                  <a:srgbClr val="0F172A"/>
-                </a:solidFill>
-              </a:defRPr>
-            </a:pPr>
-          </a:p>
-          <a:p>
-            <a:pPr>
-              <a:lnSpc>
-                <a:spcPct val="130000"/>
-              </a:lnSpc>
-              <a:spcBef>
-                <a:spcPts val="800"/>
-              </a:spcBef>
-              <a:defRPr sz="2000" b="1">
+                <a:spcPct val="120000"/>
+              </a:lnSpc>
+              <a:spcBef>
+                <a:spcPts val="400"/>
+              </a:spcBef>
+              <a:spcAft>
+                <a:spcPts val="400"/>
+              </a:spcAft>
+              <a:defRPr sz="1500">
+                <a:solidFill>
+                  <a:srgbClr val="0F172A"/>
+                </a:solidFill>
+              </a:defRPr>
+            </a:pPr>
+          </a:p>
+          <a:p>
+            <a:pPr>
+              <a:lnSpc>
+                <a:spcPct val="120000"/>
+              </a:lnSpc>
+              <a:spcBef>
+                <a:spcPts val="400"/>
+              </a:spcBef>
+              <a:spcAft>
+                <a:spcPts val="400"/>
+              </a:spcAft>
+              <a:defRPr sz="1600" b="1">
                 <a:solidFill>
                   <a:srgbClr val="1E3A8A"/>
                 </a:solidFill>
@@ -10572,12 +10419,15 @@
           <a:p>
             <a:pPr>
               <a:lnSpc>
-                <a:spcPct val="130000"/>
-              </a:lnSpc>
-              <a:spcBef>
-                <a:spcPts val="800"/>
-              </a:spcBef>
-              <a:defRPr sz="1800">
+                <a:spcPct val="120000"/>
+              </a:lnSpc>
+              <a:spcBef>
+                <a:spcPts val="400"/>
+              </a:spcBef>
+              <a:spcAft>
+                <a:spcPts val="400"/>
+              </a:spcAft>
+              <a:defRPr sz="1500">
                 <a:solidFill>
                   <a:srgbClr val="0F172A"/>
                 </a:solidFill>
@@ -10590,12 +10440,15 @@
           <a:p>
             <a:pPr>
               <a:lnSpc>
-                <a:spcPct val="130000"/>
-              </a:lnSpc>
-              <a:spcBef>
-                <a:spcPts val="800"/>
-              </a:spcBef>
-              <a:defRPr sz="1800">
+                <a:spcPct val="120000"/>
+              </a:lnSpc>
+              <a:spcBef>
+                <a:spcPts val="400"/>
+              </a:spcBef>
+              <a:spcAft>
+                <a:spcPts val="400"/>
+              </a:spcAft>
+              <a:defRPr sz="1500">
                 <a:solidFill>
                   <a:srgbClr val="0F172A"/>
                 </a:solidFill>
@@ -10608,12 +10461,15 @@
           <a:p>
             <a:pPr>
               <a:lnSpc>
-                <a:spcPct val="130000"/>
-              </a:lnSpc>
-              <a:spcBef>
-                <a:spcPts val="800"/>
-              </a:spcBef>
-              <a:defRPr sz="1800">
+                <a:spcPct val="120000"/>
+              </a:lnSpc>
+              <a:spcBef>
+                <a:spcPts val="400"/>
+              </a:spcBef>
+              <a:spcAft>
+                <a:spcPts val="400"/>
+              </a:spcAft>
+              <a:defRPr sz="1500">
                 <a:solidFill>
                   <a:srgbClr val="0F172A"/>
                 </a:solidFill>
@@ -10626,12 +10482,15 @@
           <a:p>
             <a:pPr>
               <a:lnSpc>
-                <a:spcPct val="130000"/>
-              </a:lnSpc>
-              <a:spcBef>
-                <a:spcPts val="800"/>
-              </a:spcBef>
-              <a:defRPr sz="1800">
+                <a:spcPct val="120000"/>
+              </a:lnSpc>
+              <a:spcBef>
+                <a:spcPts val="400"/>
+              </a:spcBef>
+              <a:spcAft>
+                <a:spcPts val="400"/>
+              </a:spcAft>
+              <a:defRPr sz="1500">
                 <a:solidFill>
                   <a:srgbClr val="0F172A"/>
                 </a:solidFill>
@@ -10651,8 +10510,8 @@
         </p:nvSpPr>
         <p:spPr>
           <a:xfrm>
-            <a:off x="6430975" y="1371600"/>
-            <a:ext cx="5029200" cy="457200"/>
+            <a:off x="6430975" y="1097280"/>
+            <a:ext cx="4846320" cy="365760"/>
           </a:xfrm>
           <a:prstGeom prst="rect">
             <a:avLst/>
@@ -10666,14 +10525,14 @@
           <a:lstStyle/>
           <a:p>
             <a:pPr algn="ctr">
-              <a:defRPr sz="2400" b="1">
+              <a:defRPr sz="2000" b="1">
                 <a:solidFill>
                   <a:srgbClr val="EF4444"/>
                 </a:solidFill>
               </a:defRPr>
             </a:pPr>
             <a:r>
-              <a:t>實用工具（右）</a:t>
+              <a:t>實用工具</a:t>
             </a:r>
           </a:p>
         </p:txBody>
@@ -10686,8 +10545,8 @@
         </p:nvSpPr>
         <p:spPr>
           <a:xfrm>
-            <a:off x="6430975" y="2011680"/>
-            <a:ext cx="5029200" cy="4572000"/>
+            <a:off x="6430975" y="1554480"/>
+            <a:ext cx="4846320" cy="4937760"/>
           </a:xfrm>
           <a:prstGeom prst="rect">
             <a:avLst/>
@@ -10702,12 +10561,15 @@
           <a:p>
             <a:pPr>
               <a:lnSpc>
-                <a:spcPct val="130000"/>
-              </a:lnSpc>
-              <a:spcBef>
-                <a:spcPts val="800"/>
-              </a:spcBef>
-              <a:defRPr sz="2000" b="1">
+                <a:spcPct val="120000"/>
+              </a:lnSpc>
+              <a:spcBef>
+                <a:spcPts val="400"/>
+              </a:spcBef>
+              <a:spcAft>
+                <a:spcPts val="400"/>
+              </a:spcAft>
+              <a:defRPr sz="1600" b="1">
                 <a:solidFill>
                   <a:srgbClr val="1E3A8A"/>
                 </a:solidFill>
@@ -10720,30 +10582,36 @@
           <a:p>
             <a:pPr>
               <a:lnSpc>
-                <a:spcPct val="130000"/>
-              </a:lnSpc>
-              <a:spcBef>
-                <a:spcPts val="800"/>
-              </a:spcBef>
-              <a:defRPr sz="1800">
-                <a:solidFill>
-                  <a:srgbClr val="0F172A"/>
-                </a:solidFill>
-              </a:defRPr>
-            </a:pPr>
-            <a:r>
-              <a:t>• 網卡/SIM卡（必備！）</a:t>
-            </a:r>
-          </a:p>
-          <a:p>
-            <a:pPr>
-              <a:lnSpc>
-                <a:spcPct val="130000"/>
-              </a:lnSpc>
-              <a:spcBef>
-                <a:spcPts val="800"/>
-              </a:spcBef>
-              <a:defRPr sz="1800">
+                <a:spcPct val="120000"/>
+              </a:lnSpc>
+              <a:spcBef>
+                <a:spcPts val="400"/>
+              </a:spcBef>
+              <a:spcAft>
+                <a:spcPts val="400"/>
+              </a:spcAft>
+              <a:defRPr sz="1500">
+                <a:solidFill>
+                  <a:srgbClr val="0F172A"/>
+                </a:solidFill>
+              </a:defRPr>
+            </a:pPr>
+            <a:r>
+              <a:t>• 網卡/SIM卡（必備）</a:t>
+            </a:r>
+          </a:p>
+          <a:p>
+            <a:pPr>
+              <a:lnSpc>
+                <a:spcPct val="120000"/>
+              </a:lnSpc>
+              <a:spcBef>
+                <a:spcPts val="400"/>
+              </a:spcBef>
+              <a:spcAft>
+                <a:spcPts val="400"/>
+              </a:spcAft>
+              <a:defRPr sz="1500">
                 <a:solidFill>
                   <a:srgbClr val="0F172A"/>
                 </a:solidFill>
@@ -10756,12 +10624,15 @@
           <a:p>
             <a:pPr>
               <a:lnSpc>
-                <a:spcPct val="130000"/>
-              </a:lnSpc>
-              <a:spcBef>
-                <a:spcPts val="800"/>
-              </a:spcBef>
-              <a:defRPr sz="1800">
+                <a:spcPct val="120000"/>
+              </a:lnSpc>
+              <a:spcBef>
+                <a:spcPts val="400"/>
+              </a:spcBef>
+              <a:spcAft>
+                <a:spcPts val="400"/>
+              </a:spcAft>
+              <a:defRPr sz="1500">
                 <a:solidFill>
                   <a:srgbClr val="0F172A"/>
                 </a:solidFill>
@@ -10774,45 +10645,54 @@
           <a:p>
             <a:pPr>
               <a:lnSpc>
-                <a:spcPct val="130000"/>
-              </a:lnSpc>
-              <a:spcBef>
-                <a:spcPts val="800"/>
-              </a:spcBef>
-              <a:defRPr sz="1800">
-                <a:solidFill>
-                  <a:srgbClr val="0F172A"/>
-                </a:solidFill>
-              </a:defRPr>
-            </a:pPr>
-            <a:r>
-              <a:t>• 消費電子產品在台灣買（歐洲VAT 15-19%）</a:t>
-            </a:r>
-          </a:p>
-          <a:p>
-            <a:pPr>
-              <a:lnSpc>
-                <a:spcPct val="130000"/>
-              </a:lnSpc>
-              <a:spcBef>
-                <a:spcPts val="800"/>
-              </a:spcBef>
-              <a:defRPr sz="1800">
-                <a:solidFill>
-                  <a:srgbClr val="0F172A"/>
-                </a:solidFill>
-              </a:defRPr>
-            </a:pPr>
-          </a:p>
-          <a:p>
-            <a:pPr>
-              <a:lnSpc>
-                <a:spcPct val="130000"/>
-              </a:lnSpc>
-              <a:spcBef>
-                <a:spcPts val="800"/>
-              </a:spcBef>
-              <a:defRPr sz="2000" b="1">
+                <a:spcPct val="120000"/>
+              </a:lnSpc>
+              <a:spcBef>
+                <a:spcPts val="400"/>
+              </a:spcBef>
+              <a:spcAft>
+                <a:spcPts val="400"/>
+              </a:spcAft>
+              <a:defRPr sz="1500">
+                <a:solidFill>
+                  <a:srgbClr val="0F172A"/>
+                </a:solidFill>
+              </a:defRPr>
+            </a:pPr>
+            <a:r>
+              <a:t>• 3C產品在台灣買（歐洲VAT高）</a:t>
+            </a:r>
+          </a:p>
+          <a:p>
+            <a:pPr>
+              <a:lnSpc>
+                <a:spcPct val="120000"/>
+              </a:lnSpc>
+              <a:spcBef>
+                <a:spcPts val="400"/>
+              </a:spcBef>
+              <a:spcAft>
+                <a:spcPts val="400"/>
+              </a:spcAft>
+              <a:defRPr sz="1500">
+                <a:solidFill>
+                  <a:srgbClr val="0F172A"/>
+                </a:solidFill>
+              </a:defRPr>
+            </a:pPr>
+          </a:p>
+          <a:p>
+            <a:pPr>
+              <a:lnSpc>
+                <a:spcPct val="120000"/>
+              </a:lnSpc>
+              <a:spcBef>
+                <a:spcPts val="400"/>
+              </a:spcBef>
+              <a:spcAft>
+                <a:spcPts val="400"/>
+              </a:spcAft>
+              <a:defRPr sz="1600" b="1">
                 <a:solidFill>
                   <a:srgbClr val="1E3A8A"/>
                 </a:solidFill>
@@ -10825,12 +10705,15 @@
           <a:p>
             <a:pPr>
               <a:lnSpc>
-                <a:spcPct val="130000"/>
-              </a:lnSpc>
-              <a:spcBef>
-                <a:spcPts val="800"/>
-              </a:spcBef>
-              <a:defRPr sz="1800">
+                <a:spcPct val="120000"/>
+              </a:lnSpc>
+              <a:spcBef>
+                <a:spcPts val="400"/>
+              </a:spcBef>
+              <a:spcAft>
+                <a:spcPts val="400"/>
+              </a:spcAft>
+              <a:defRPr sz="1500">
                 <a:solidFill>
                   <a:srgbClr val="0F172A"/>
                 </a:solidFill>
@@ -10843,30 +10726,36 @@
           <a:p>
             <a:pPr>
               <a:lnSpc>
-                <a:spcPct val="130000"/>
-              </a:lnSpc>
-              <a:spcBef>
-                <a:spcPts val="800"/>
-              </a:spcBef>
-              <a:defRPr sz="1800">
-                <a:solidFill>
-                  <a:srgbClr val="0F172A"/>
-                </a:solidFill>
-              </a:defRPr>
-            </a:pPr>
-            <a:r>
-              <a:t>• 查詢國定假日（避免落地遇假期）</a:t>
-            </a:r>
-          </a:p>
-          <a:p>
-            <a:pPr>
-              <a:lnSpc>
-                <a:spcPct val="130000"/>
-              </a:lnSpc>
-              <a:spcBef>
-                <a:spcPts val="800"/>
-              </a:spcBef>
-              <a:defRPr sz="1800">
+                <a:spcPct val="120000"/>
+              </a:lnSpc>
+              <a:spcBef>
+                <a:spcPts val="400"/>
+              </a:spcBef>
+              <a:spcAft>
+                <a:spcPts val="400"/>
+              </a:spcAft>
+              <a:defRPr sz="1500">
+                <a:solidFill>
+                  <a:srgbClr val="0F172A"/>
+                </a:solidFill>
+              </a:defRPr>
+            </a:pPr>
+            <a:r>
+              <a:t>• 查詢國定假日</a:t>
+            </a:r>
+          </a:p>
+          <a:p>
+            <a:pPr>
+              <a:lnSpc>
+                <a:spcPct val="120000"/>
+              </a:lnSpc>
+              <a:spcBef>
+                <a:spcPts val="400"/>
+              </a:spcBef>
+              <a:spcAft>
+                <a:spcPts val="400"/>
+              </a:spcAft>
+              <a:defRPr sz="1500">
                 <a:solidFill>
                   <a:srgbClr val="0F172A"/>
                 </a:solidFill>
@@ -10879,19 +10768,22 @@
           <a:p>
             <a:pPr>
               <a:lnSpc>
-                <a:spcPct val="130000"/>
-              </a:lnSpc>
-              <a:spcBef>
-                <a:spcPts val="800"/>
-              </a:spcBef>
-              <a:defRPr sz="1800">
-                <a:solidFill>
-                  <a:srgbClr val="0F172A"/>
-                </a:solidFill>
-              </a:defRPr>
-            </a:pPr>
-            <a:r>
-              <a:t>• 加入當地留學生社團（FB/Line）</a:t>
+                <a:spcPct val="120000"/>
+              </a:lnSpc>
+              <a:spcBef>
+                <a:spcPts val="400"/>
+              </a:spcBef>
+              <a:spcAft>
+                <a:spcPts val="400"/>
+              </a:spcAft>
+              <a:defRPr sz="1500">
+                <a:solidFill>
+                  <a:srgbClr val="0F172A"/>
+                </a:solidFill>
+              </a:defRPr>
+            </a:pPr>
+            <a:r>
+              <a:t>• 加入當地留學生社團</a:t>
             </a:r>
           </a:p>
         </p:txBody>
